--- a/docs/pptx/whole/jx-linsubhr-sens-grade2.pptx
+++ b/docs/pptx/whole/jx-linsubhr-sens-grade2.pptx
@@ -5339,7 +5339,7 @@
           <p:spPr>
             <a:xfrm>
               <a:off x="817517" y="1896563"/>
-              <a:ext cx="6236116" cy="82021"/>
+              <a:ext cx="6899879" cy="82021"/>
             </a:xfrm>
             <a:prstGeom prst="rect">
               <a:avLst/>
@@ -5371,7 +5371,7 @@
                   <a:latin typeface="Helvetica"/>
                   <a:cs typeface="Helvetica"/>
                 </a:rPr>
-                <a:t>subHR per 0.1 ratio decline: 1.15 (1.09-1.21), p = &lt;0.001  |  per IQR decline (Δ = 0.27): 1.46 (1.26-1.68)  |  IQR: [0.71, 0.98]</a:t>
+                <a:t>subHR per 0.1 ratio decline: 1.15 (1.09-1.21), p_Bonf = &lt;0.001 (n = 6)  |  per IQR decline (Δ = 0.27): 1.46 (1.26-1.68)  |  IQR: [0.71, 0.98]</a:t>
               </a:r>
             </a:p>
           </p:txBody>

--- a/docs/pptx/whole/jx-linsubhr-sens-grade2.pptx
+++ b/docs/pptx/whole/jx-linsubhr-sens-grade2.pptx
@@ -3045,13 +3045,13 @@
           </p:nvSpPr>
           <p:spPr>
             <a:xfrm>
-              <a:off x="1172049" y="3959600"/>
-              <a:ext cx="7090630" cy="1252392"/>
+              <a:off x="1172049" y="3959602"/>
+              <a:ext cx="7090630" cy="1252390"/>
             </a:xfrm>
             <a:custGeom>
               <a:avLst/>
               <a:pathLst>
-                <a:path w="7090630" h="1252392">
+                <a:path w="7090630" h="1252390">
                   <a:moveTo>
                     <a:pt x="0" y="0"/>
                   </a:moveTo>
@@ -3059,7 +3059,7 @@
                     <a:pt x="71622" y="24532"/>
                   </a:lnTo>
                   <a:lnTo>
-                    <a:pt x="143245" y="48689"/>
+                    <a:pt x="143245" y="48688"/>
                   </a:lnTo>
                   <a:lnTo>
                     <a:pt x="214867" y="72474"/>
@@ -3071,7 +3071,7 @@
                     <a:pt x="358112" y="118954"/>
                   </a:lnTo>
                   <a:lnTo>
-                    <a:pt x="429735" y="141661"/>
+                    <a:pt x="429735" y="141660"/>
                   </a:lnTo>
                   <a:lnTo>
                     <a:pt x="501357" y="164018"/>
@@ -3080,19 +3080,19 @@
                     <a:pt x="572980" y="186032"/>
                   </a:lnTo>
                   <a:lnTo>
-                    <a:pt x="644602" y="207709"/>
+                    <a:pt x="644602" y="207708"/>
                   </a:lnTo>
                   <a:lnTo>
                     <a:pt x="716225" y="229052"/>
                   </a:lnTo>
                   <a:lnTo>
-                    <a:pt x="787847" y="250068"/>
-                  </a:lnTo>
-                  <a:lnTo>
-                    <a:pt x="859470" y="270761"/>
-                  </a:lnTo>
-                  <a:lnTo>
-                    <a:pt x="931092" y="291136"/>
+                    <a:pt x="787847" y="250067"/>
+                  </a:lnTo>
+                  <a:lnTo>
+                    <a:pt x="859470" y="270760"/>
+                  </a:lnTo>
+                  <a:lnTo>
+                    <a:pt x="931092" y="291135"/>
                   </a:lnTo>
                   <a:lnTo>
                     <a:pt x="1002715" y="311198"/>
@@ -3104,553 +3104,553 @@
                     <a:pt x="1145960" y="350403"/>
                   </a:lnTo>
                   <a:lnTo>
-                    <a:pt x="1217582" y="369556"/>
-                  </a:lnTo>
-                  <a:lnTo>
-                    <a:pt x="1289205" y="388414"/>
+                    <a:pt x="1217582" y="369555"/>
+                  </a:lnTo>
+                  <a:lnTo>
+                    <a:pt x="1289205" y="388413"/>
                   </a:lnTo>
                   <a:lnTo>
                     <a:pt x="1360827" y="406982"/>
                   </a:lnTo>
                   <a:lnTo>
-                    <a:pt x="1432450" y="425266"/>
+                    <a:pt x="1432450" y="425265"/>
                   </a:lnTo>
                   <a:lnTo>
                     <a:pt x="1504073" y="443268"/>
                   </a:lnTo>
                   <a:lnTo>
-                    <a:pt x="1575695" y="460995"/>
-                  </a:lnTo>
-                  <a:lnTo>
-                    <a:pt x="1647318" y="478449"/>
-                  </a:lnTo>
-                  <a:lnTo>
-                    <a:pt x="1718940" y="495635"/>
-                  </a:lnTo>
-                  <a:lnTo>
-                    <a:pt x="1790563" y="512557"/>
-                  </a:lnTo>
-                  <a:lnTo>
-                    <a:pt x="1862185" y="529219"/>
+                    <a:pt x="1575695" y="460994"/>
+                  </a:lnTo>
+                  <a:lnTo>
+                    <a:pt x="1647318" y="478448"/>
+                  </a:lnTo>
+                  <a:lnTo>
+                    <a:pt x="1718940" y="495634"/>
+                  </a:lnTo>
+                  <a:lnTo>
+                    <a:pt x="1790563" y="512556"/>
+                  </a:lnTo>
+                  <a:lnTo>
+                    <a:pt x="1862185" y="529218"/>
                   </a:lnTo>
                   <a:lnTo>
                     <a:pt x="1933808" y="545625"/>
                   </a:lnTo>
                   <a:lnTo>
-                    <a:pt x="2005430" y="561780"/>
-                  </a:lnTo>
-                  <a:lnTo>
-                    <a:pt x="2077053" y="577686"/>
-                  </a:lnTo>
-                  <a:lnTo>
-                    <a:pt x="2148675" y="593349"/>
-                  </a:lnTo>
-                  <a:lnTo>
-                    <a:pt x="2220298" y="608770"/>
-                  </a:lnTo>
-                  <a:lnTo>
-                    <a:pt x="2291920" y="623955"/>
-                  </a:lnTo>
-                  <a:lnTo>
-                    <a:pt x="2363543" y="638907"/>
-                  </a:lnTo>
-                  <a:lnTo>
-                    <a:pt x="2435165" y="653629"/>
-                  </a:lnTo>
-                  <a:lnTo>
-                    <a:pt x="2506788" y="668125"/>
-                  </a:lnTo>
-                  <a:lnTo>
-                    <a:pt x="2578410" y="682398"/>
-                  </a:lnTo>
-                  <a:lnTo>
-                    <a:pt x="2650033" y="696452"/>
-                  </a:lnTo>
-                  <a:lnTo>
-                    <a:pt x="2721655" y="710291"/>
-                  </a:lnTo>
-                  <a:lnTo>
-                    <a:pt x="2793278" y="723917"/>
-                  </a:lnTo>
-                  <a:lnTo>
-                    <a:pt x="2864901" y="737334"/>
-                  </a:lnTo>
-                  <a:lnTo>
-                    <a:pt x="2936523" y="750544"/>
-                  </a:lnTo>
-                  <a:lnTo>
-                    <a:pt x="3008146" y="763552"/>
-                  </a:lnTo>
-                  <a:lnTo>
-                    <a:pt x="3079768" y="771884"/>
-                  </a:lnTo>
-                  <a:lnTo>
-                    <a:pt x="3151391" y="777631"/>
-                  </a:lnTo>
-                  <a:lnTo>
-                    <a:pt x="3223013" y="783338"/>
-                  </a:lnTo>
-                  <a:lnTo>
-                    <a:pt x="3294636" y="789005"/>
-                  </a:lnTo>
-                  <a:lnTo>
-                    <a:pt x="3366258" y="794633"/>
-                  </a:lnTo>
-                  <a:lnTo>
-                    <a:pt x="3437881" y="800222"/>
-                  </a:lnTo>
-                  <a:lnTo>
-                    <a:pt x="3509503" y="805771"/>
-                  </a:lnTo>
-                  <a:lnTo>
-                    <a:pt x="3581126" y="811282"/>
-                  </a:lnTo>
-                  <a:lnTo>
-                    <a:pt x="3652748" y="816755"/>
-                  </a:lnTo>
-                  <a:lnTo>
-                    <a:pt x="3724371" y="822190"/>
-                  </a:lnTo>
-                  <a:lnTo>
-                    <a:pt x="3795993" y="827587"/>
-                  </a:lnTo>
-                  <a:lnTo>
-                    <a:pt x="3867616" y="832946"/>
-                  </a:lnTo>
-                  <a:lnTo>
-                    <a:pt x="3939238" y="838268"/>
-                  </a:lnTo>
-                  <a:lnTo>
-                    <a:pt x="4010861" y="843553"/>
-                  </a:lnTo>
-                  <a:lnTo>
-                    <a:pt x="4082483" y="848801"/>
-                  </a:lnTo>
-                  <a:lnTo>
-                    <a:pt x="4154106" y="854012"/>
-                  </a:lnTo>
-                  <a:lnTo>
-                    <a:pt x="4225729" y="859188"/>
-                  </a:lnTo>
-                  <a:lnTo>
-                    <a:pt x="4297351" y="864327"/>
-                  </a:lnTo>
-                  <a:lnTo>
-                    <a:pt x="4368974" y="869430"/>
-                  </a:lnTo>
-                  <a:lnTo>
-                    <a:pt x="4440596" y="874498"/>
-                  </a:lnTo>
-                  <a:lnTo>
-                    <a:pt x="4512219" y="879531"/>
-                  </a:lnTo>
-                  <a:lnTo>
-                    <a:pt x="4583841" y="884529"/>
-                  </a:lnTo>
-                  <a:lnTo>
-                    <a:pt x="4655464" y="889492"/>
-                  </a:lnTo>
-                  <a:lnTo>
-                    <a:pt x="4727086" y="894420"/>
-                  </a:lnTo>
-                  <a:lnTo>
-                    <a:pt x="4798709" y="899314"/>
-                  </a:lnTo>
-                  <a:lnTo>
-                    <a:pt x="4870331" y="904174"/>
-                  </a:lnTo>
-                  <a:lnTo>
-                    <a:pt x="4941954" y="909001"/>
-                  </a:lnTo>
-                  <a:lnTo>
-                    <a:pt x="5013576" y="913793"/>
-                  </a:lnTo>
-                  <a:lnTo>
-                    <a:pt x="5085199" y="918553"/>
-                  </a:lnTo>
-                  <a:lnTo>
-                    <a:pt x="5156821" y="923279"/>
-                  </a:lnTo>
-                  <a:lnTo>
-                    <a:pt x="5228444" y="927972"/>
-                  </a:lnTo>
-                  <a:lnTo>
-                    <a:pt x="5300066" y="932633"/>
-                  </a:lnTo>
-                  <a:lnTo>
-                    <a:pt x="5371689" y="937261"/>
-                  </a:lnTo>
-                  <a:lnTo>
-                    <a:pt x="5443311" y="941857"/>
-                  </a:lnTo>
-                  <a:lnTo>
-                    <a:pt x="5514934" y="946421"/>
-                  </a:lnTo>
-                  <a:lnTo>
-                    <a:pt x="5586557" y="950953"/>
-                  </a:lnTo>
-                  <a:lnTo>
-                    <a:pt x="5658179" y="955454"/>
-                  </a:lnTo>
-                  <a:lnTo>
-                    <a:pt x="5729802" y="959923"/>
-                  </a:lnTo>
-                  <a:lnTo>
-                    <a:pt x="5801424" y="964361"/>
-                  </a:lnTo>
-                  <a:lnTo>
-                    <a:pt x="5873047" y="968768"/>
-                  </a:lnTo>
-                  <a:lnTo>
-                    <a:pt x="5944669" y="973145"/>
-                  </a:lnTo>
-                  <a:lnTo>
-                    <a:pt x="6016292" y="977491"/>
-                  </a:lnTo>
-                  <a:lnTo>
-                    <a:pt x="6087914" y="981807"/>
-                  </a:lnTo>
-                  <a:lnTo>
-                    <a:pt x="6159537" y="986093"/>
-                  </a:lnTo>
-                  <a:lnTo>
-                    <a:pt x="6231159" y="990349"/>
-                  </a:lnTo>
-                  <a:lnTo>
-                    <a:pt x="6302782" y="994576"/>
-                  </a:lnTo>
-                  <a:lnTo>
-                    <a:pt x="6374404" y="998773"/>
-                  </a:lnTo>
-                  <a:lnTo>
-                    <a:pt x="6446027" y="1002941"/>
-                  </a:lnTo>
-                  <a:lnTo>
-                    <a:pt x="6517649" y="1007080"/>
-                  </a:lnTo>
-                  <a:lnTo>
-                    <a:pt x="6589272" y="1011190"/>
-                  </a:lnTo>
-                  <a:lnTo>
-                    <a:pt x="6660894" y="1015271"/>
-                  </a:lnTo>
-                  <a:lnTo>
-                    <a:pt x="6732517" y="1019324"/>
-                  </a:lnTo>
-                  <a:lnTo>
-                    <a:pt x="6804139" y="1023349"/>
-                  </a:lnTo>
-                  <a:lnTo>
-                    <a:pt x="6875762" y="1027346"/>
-                  </a:lnTo>
-                  <a:lnTo>
-                    <a:pt x="6947385" y="1031315"/>
-                  </a:lnTo>
-                  <a:lnTo>
-                    <a:pt x="7019007" y="1035256"/>
-                  </a:lnTo>
-                  <a:lnTo>
-                    <a:pt x="7090630" y="1039170"/>
-                  </a:lnTo>
-                  <a:lnTo>
-                    <a:pt x="7090630" y="1252392"/>
-                  </a:lnTo>
-                  <a:lnTo>
-                    <a:pt x="7019007" y="1247007"/>
-                  </a:lnTo>
-                  <a:lnTo>
-                    <a:pt x="6947385" y="1241539"/>
-                  </a:lnTo>
-                  <a:lnTo>
-                    <a:pt x="6875762" y="1235986"/>
-                  </a:lnTo>
-                  <a:lnTo>
-                    <a:pt x="6804139" y="1230345"/>
-                  </a:lnTo>
-                  <a:lnTo>
-                    <a:pt x="6732517" y="1224617"/>
-                  </a:lnTo>
-                  <a:lnTo>
-                    <a:pt x="6660894" y="1218800"/>
-                  </a:lnTo>
-                  <a:lnTo>
-                    <a:pt x="6589272" y="1212892"/>
-                  </a:lnTo>
-                  <a:lnTo>
-                    <a:pt x="6517649" y="1206891"/>
-                  </a:lnTo>
-                  <a:lnTo>
-                    <a:pt x="6446027" y="1200797"/>
-                  </a:lnTo>
-                  <a:lnTo>
-                    <a:pt x="6374404" y="1194608"/>
-                  </a:lnTo>
-                  <a:lnTo>
-                    <a:pt x="6302782" y="1188323"/>
-                  </a:lnTo>
-                  <a:lnTo>
-                    <a:pt x="6231159" y="1181940"/>
-                  </a:lnTo>
-                  <a:lnTo>
-                    <a:pt x="6159537" y="1175457"/>
-                  </a:lnTo>
-                  <a:lnTo>
-                    <a:pt x="6087914" y="1168872"/>
-                  </a:lnTo>
-                  <a:lnTo>
-                    <a:pt x="6016292" y="1162186"/>
-                  </a:lnTo>
-                  <a:lnTo>
-                    <a:pt x="5944669" y="1155394"/>
-                  </a:lnTo>
-                  <a:lnTo>
-                    <a:pt x="5873047" y="1148497"/>
-                  </a:lnTo>
-                  <a:lnTo>
-                    <a:pt x="5801424" y="1141493"/>
-                  </a:lnTo>
-                  <a:lnTo>
-                    <a:pt x="5729802" y="1134379"/>
-                  </a:lnTo>
-                  <a:lnTo>
-                    <a:pt x="5658179" y="1127154"/>
-                  </a:lnTo>
-                  <a:lnTo>
-                    <a:pt x="5586557" y="1119817"/>
-                  </a:lnTo>
-                  <a:lnTo>
-                    <a:pt x="5514934" y="1112365"/>
-                  </a:lnTo>
-                  <a:lnTo>
-                    <a:pt x="5443311" y="1104797"/>
-                  </a:lnTo>
-                  <a:lnTo>
-                    <a:pt x="5371689" y="1097111"/>
-                  </a:lnTo>
-                  <a:lnTo>
-                    <a:pt x="5300066" y="1089305"/>
-                  </a:lnTo>
-                  <a:lnTo>
-                    <a:pt x="5228444" y="1081377"/>
-                  </a:lnTo>
-                  <a:lnTo>
-                    <a:pt x="5156821" y="1073326"/>
-                  </a:lnTo>
-                  <a:lnTo>
-                    <a:pt x="5085199" y="1065149"/>
-                  </a:lnTo>
-                  <a:lnTo>
-                    <a:pt x="5013576" y="1056845"/>
-                  </a:lnTo>
-                  <a:lnTo>
-                    <a:pt x="4941954" y="1048411"/>
-                  </a:lnTo>
-                  <a:lnTo>
-                    <a:pt x="4870331" y="1039846"/>
-                  </a:lnTo>
-                  <a:lnTo>
-                    <a:pt x="4798709" y="1031147"/>
-                  </a:lnTo>
-                  <a:lnTo>
-                    <a:pt x="4727086" y="1022312"/>
-                  </a:lnTo>
-                  <a:lnTo>
-                    <a:pt x="4655464" y="1013340"/>
-                  </a:lnTo>
-                  <a:lnTo>
-                    <a:pt x="4583841" y="1004227"/>
-                  </a:lnTo>
-                  <a:lnTo>
-                    <a:pt x="4512219" y="994973"/>
-                  </a:lnTo>
-                  <a:lnTo>
-                    <a:pt x="4440596" y="985574"/>
-                  </a:lnTo>
-                  <a:lnTo>
-                    <a:pt x="4368974" y="976029"/>
-                  </a:lnTo>
-                  <a:lnTo>
-                    <a:pt x="4297351" y="966334"/>
-                  </a:lnTo>
-                  <a:lnTo>
-                    <a:pt x="4225729" y="956489"/>
-                  </a:lnTo>
-                  <a:lnTo>
-                    <a:pt x="4154106" y="946490"/>
-                  </a:lnTo>
-                  <a:lnTo>
-                    <a:pt x="4082483" y="936335"/>
-                  </a:lnTo>
-                  <a:lnTo>
-                    <a:pt x="4010861" y="926022"/>
-                  </a:lnTo>
-                  <a:lnTo>
-                    <a:pt x="3939238" y="915548"/>
-                  </a:lnTo>
-                  <a:lnTo>
-                    <a:pt x="3867616" y="904910"/>
-                  </a:lnTo>
-                  <a:lnTo>
-                    <a:pt x="3795993" y="894107"/>
-                  </a:lnTo>
-                  <a:lnTo>
-                    <a:pt x="3724371" y="883135"/>
-                  </a:lnTo>
-                  <a:lnTo>
-                    <a:pt x="3652748" y="871992"/>
-                  </a:lnTo>
-                  <a:lnTo>
-                    <a:pt x="3581126" y="860676"/>
-                  </a:lnTo>
-                  <a:lnTo>
-                    <a:pt x="3509503" y="849182"/>
-                  </a:lnTo>
-                  <a:lnTo>
-                    <a:pt x="3437881" y="837510"/>
-                  </a:lnTo>
-                  <a:lnTo>
-                    <a:pt x="3366258" y="825656"/>
-                  </a:lnTo>
-                  <a:lnTo>
-                    <a:pt x="3294636" y="813616"/>
-                  </a:lnTo>
-                  <a:lnTo>
-                    <a:pt x="3223013" y="801389"/>
-                  </a:lnTo>
-                  <a:lnTo>
-                    <a:pt x="3151391" y="788972"/>
-                  </a:lnTo>
-                  <a:lnTo>
-                    <a:pt x="3079768" y="776360"/>
-                  </a:lnTo>
-                  <a:lnTo>
-                    <a:pt x="3008146" y="766097"/>
-                  </a:lnTo>
-                  <a:lnTo>
-                    <a:pt x="2936523" y="760270"/>
-                  </a:lnTo>
-                  <a:lnTo>
-                    <a:pt x="2864901" y="754401"/>
-                  </a:lnTo>
-                  <a:lnTo>
-                    <a:pt x="2793278" y="748491"/>
-                  </a:lnTo>
-                  <a:lnTo>
-                    <a:pt x="2721655" y="742540"/>
-                  </a:lnTo>
-                  <a:lnTo>
-                    <a:pt x="2650033" y="736547"/>
-                  </a:lnTo>
-                  <a:lnTo>
-                    <a:pt x="2578410" y="730513"/>
-                  </a:lnTo>
-                  <a:lnTo>
-                    <a:pt x="2506788" y="724436"/>
-                  </a:lnTo>
-                  <a:lnTo>
-                    <a:pt x="2435165" y="718316"/>
-                  </a:lnTo>
-                  <a:lnTo>
-                    <a:pt x="2363543" y="712153"/>
-                  </a:lnTo>
-                  <a:lnTo>
-                    <a:pt x="2291920" y="705947"/>
-                  </a:lnTo>
-                  <a:lnTo>
-                    <a:pt x="2220298" y="699698"/>
-                  </a:lnTo>
-                  <a:lnTo>
-                    <a:pt x="2148675" y="693405"/>
-                  </a:lnTo>
-                  <a:lnTo>
-                    <a:pt x="2077053" y="687068"/>
-                  </a:lnTo>
-                  <a:lnTo>
-                    <a:pt x="2005430" y="680686"/>
-                  </a:lnTo>
-                  <a:lnTo>
-                    <a:pt x="1933808" y="674260"/>
-                  </a:lnTo>
-                  <a:lnTo>
-                    <a:pt x="1862185" y="667789"/>
-                  </a:lnTo>
-                  <a:lnTo>
-                    <a:pt x="1790563" y="661272"/>
-                  </a:lnTo>
-                  <a:lnTo>
-                    <a:pt x="1718940" y="654710"/>
-                  </a:lnTo>
-                  <a:lnTo>
-                    <a:pt x="1647318" y="648101"/>
-                  </a:lnTo>
-                  <a:lnTo>
-                    <a:pt x="1575695" y="641447"/>
-                  </a:lnTo>
-                  <a:lnTo>
-                    <a:pt x="1504073" y="634745"/>
-                  </a:lnTo>
-                  <a:lnTo>
-                    <a:pt x="1432450" y="627997"/>
-                  </a:lnTo>
-                  <a:lnTo>
-                    <a:pt x="1360827" y="621202"/>
-                  </a:lnTo>
-                  <a:lnTo>
-                    <a:pt x="1289205" y="614358"/>
-                  </a:lnTo>
-                  <a:lnTo>
-                    <a:pt x="1217582" y="607467"/>
-                  </a:lnTo>
-                  <a:lnTo>
-                    <a:pt x="1145960" y="600528"/>
-                  </a:lnTo>
-                  <a:lnTo>
-                    <a:pt x="1074337" y="593540"/>
-                  </a:lnTo>
-                  <a:lnTo>
-                    <a:pt x="1002715" y="586503"/>
-                  </a:lnTo>
-                  <a:lnTo>
-                    <a:pt x="931092" y="579416"/>
-                  </a:lnTo>
-                  <a:lnTo>
-                    <a:pt x="859470" y="572280"/>
-                  </a:lnTo>
-                  <a:lnTo>
-                    <a:pt x="787847" y="565094"/>
-                  </a:lnTo>
-                  <a:lnTo>
-                    <a:pt x="716225" y="557858"/>
-                  </a:lnTo>
-                  <a:lnTo>
-                    <a:pt x="644602" y="550571"/>
-                  </a:lnTo>
-                  <a:lnTo>
-                    <a:pt x="572980" y="543233"/>
-                  </a:lnTo>
-                  <a:lnTo>
-                    <a:pt x="501357" y="535843"/>
-                  </a:lnTo>
-                  <a:lnTo>
-                    <a:pt x="429735" y="528402"/>
-                  </a:lnTo>
-                  <a:lnTo>
-                    <a:pt x="358112" y="520908"/>
-                  </a:lnTo>
-                  <a:lnTo>
-                    <a:pt x="286490" y="513362"/>
-                  </a:lnTo>
-                  <a:lnTo>
-                    <a:pt x="214867" y="505763"/>
-                  </a:lnTo>
-                  <a:lnTo>
-                    <a:pt x="143245" y="498111"/>
-                  </a:lnTo>
-                  <a:lnTo>
-                    <a:pt x="71622" y="490405"/>
-                  </a:lnTo>
-                  <a:lnTo>
-                    <a:pt x="0" y="482645"/>
+                    <a:pt x="2005430" y="561779"/>
+                  </a:lnTo>
+                  <a:lnTo>
+                    <a:pt x="2077053" y="577685"/>
+                  </a:lnTo>
+                  <a:lnTo>
+                    <a:pt x="2148675" y="593348"/>
+                  </a:lnTo>
+                  <a:lnTo>
+                    <a:pt x="2220298" y="608769"/>
+                  </a:lnTo>
+                  <a:lnTo>
+                    <a:pt x="2291920" y="623954"/>
+                  </a:lnTo>
+                  <a:lnTo>
+                    <a:pt x="2363543" y="638906"/>
+                  </a:lnTo>
+                  <a:lnTo>
+                    <a:pt x="2435165" y="653628"/>
+                  </a:lnTo>
+                  <a:lnTo>
+                    <a:pt x="2506788" y="668124"/>
+                  </a:lnTo>
+                  <a:lnTo>
+                    <a:pt x="2578410" y="682397"/>
+                  </a:lnTo>
+                  <a:lnTo>
+                    <a:pt x="2650033" y="696451"/>
+                  </a:lnTo>
+                  <a:lnTo>
+                    <a:pt x="2721655" y="710290"/>
+                  </a:lnTo>
+                  <a:lnTo>
+                    <a:pt x="2793278" y="723916"/>
+                  </a:lnTo>
+                  <a:lnTo>
+                    <a:pt x="2864901" y="737332"/>
+                  </a:lnTo>
+                  <a:lnTo>
+                    <a:pt x="2936523" y="750543"/>
+                  </a:lnTo>
+                  <a:lnTo>
+                    <a:pt x="3008146" y="763551"/>
+                  </a:lnTo>
+                  <a:lnTo>
+                    <a:pt x="3079768" y="771883"/>
+                  </a:lnTo>
+                  <a:lnTo>
+                    <a:pt x="3151391" y="777630"/>
+                  </a:lnTo>
+                  <a:lnTo>
+                    <a:pt x="3223013" y="783337"/>
+                  </a:lnTo>
+                  <a:lnTo>
+                    <a:pt x="3294636" y="789004"/>
+                  </a:lnTo>
+                  <a:lnTo>
+                    <a:pt x="3366258" y="794632"/>
+                  </a:lnTo>
+                  <a:lnTo>
+                    <a:pt x="3437881" y="800221"/>
+                  </a:lnTo>
+                  <a:lnTo>
+                    <a:pt x="3509503" y="805770"/>
+                  </a:lnTo>
+                  <a:lnTo>
+                    <a:pt x="3581126" y="811281"/>
+                  </a:lnTo>
+                  <a:lnTo>
+                    <a:pt x="3652748" y="816754"/>
+                  </a:lnTo>
+                  <a:lnTo>
+                    <a:pt x="3724371" y="822189"/>
+                  </a:lnTo>
+                  <a:lnTo>
+                    <a:pt x="3795993" y="827585"/>
+                  </a:lnTo>
+                  <a:lnTo>
+                    <a:pt x="3867616" y="832945"/>
+                  </a:lnTo>
+                  <a:lnTo>
+                    <a:pt x="3939238" y="838266"/>
+                  </a:lnTo>
+                  <a:lnTo>
+                    <a:pt x="4010861" y="843551"/>
+                  </a:lnTo>
+                  <a:lnTo>
+                    <a:pt x="4082483" y="848799"/>
+                  </a:lnTo>
+                  <a:lnTo>
+                    <a:pt x="4154106" y="854011"/>
+                  </a:lnTo>
+                  <a:lnTo>
+                    <a:pt x="4225729" y="859186"/>
+                  </a:lnTo>
+                  <a:lnTo>
+                    <a:pt x="4297351" y="864326"/>
+                  </a:lnTo>
+                  <a:lnTo>
+                    <a:pt x="4368974" y="869429"/>
+                  </a:lnTo>
+                  <a:lnTo>
+                    <a:pt x="4440596" y="874497"/>
+                  </a:lnTo>
+                  <a:lnTo>
+                    <a:pt x="4512219" y="879530"/>
+                  </a:lnTo>
+                  <a:lnTo>
+                    <a:pt x="4583841" y="884528"/>
+                  </a:lnTo>
+                  <a:lnTo>
+                    <a:pt x="4655464" y="889491"/>
+                  </a:lnTo>
+                  <a:lnTo>
+                    <a:pt x="4727086" y="894419"/>
+                  </a:lnTo>
+                  <a:lnTo>
+                    <a:pt x="4798709" y="899313"/>
+                  </a:lnTo>
+                  <a:lnTo>
+                    <a:pt x="4870331" y="904173"/>
+                  </a:lnTo>
+                  <a:lnTo>
+                    <a:pt x="4941954" y="908999"/>
+                  </a:lnTo>
+                  <a:lnTo>
+                    <a:pt x="5013576" y="913792"/>
+                  </a:lnTo>
+                  <a:lnTo>
+                    <a:pt x="5085199" y="918551"/>
+                  </a:lnTo>
+                  <a:lnTo>
+                    <a:pt x="5156821" y="923277"/>
+                  </a:lnTo>
+                  <a:lnTo>
+                    <a:pt x="5228444" y="927971"/>
+                  </a:lnTo>
+                  <a:lnTo>
+                    <a:pt x="5300066" y="932631"/>
+                  </a:lnTo>
+                  <a:lnTo>
+                    <a:pt x="5371689" y="937259"/>
+                  </a:lnTo>
+                  <a:lnTo>
+                    <a:pt x="5443311" y="941855"/>
+                  </a:lnTo>
+                  <a:lnTo>
+                    <a:pt x="5514934" y="946419"/>
+                  </a:lnTo>
+                  <a:lnTo>
+                    <a:pt x="5586557" y="950952"/>
+                  </a:lnTo>
+                  <a:lnTo>
+                    <a:pt x="5658179" y="955452"/>
+                  </a:lnTo>
+                  <a:lnTo>
+                    <a:pt x="5729802" y="959922"/>
+                  </a:lnTo>
+                  <a:lnTo>
+                    <a:pt x="5801424" y="964360"/>
+                  </a:lnTo>
+                  <a:lnTo>
+                    <a:pt x="5873047" y="968767"/>
+                  </a:lnTo>
+                  <a:lnTo>
+                    <a:pt x="5944669" y="973144"/>
+                  </a:lnTo>
+                  <a:lnTo>
+                    <a:pt x="6016292" y="977490"/>
+                  </a:lnTo>
+                  <a:lnTo>
+                    <a:pt x="6087914" y="981806"/>
+                  </a:lnTo>
+                  <a:lnTo>
+                    <a:pt x="6159537" y="986092"/>
+                  </a:lnTo>
+                  <a:lnTo>
+                    <a:pt x="6231159" y="990348"/>
+                  </a:lnTo>
+                  <a:lnTo>
+                    <a:pt x="6302782" y="994575"/>
+                  </a:lnTo>
+                  <a:lnTo>
+                    <a:pt x="6374404" y="998772"/>
+                  </a:lnTo>
+                  <a:lnTo>
+                    <a:pt x="6446027" y="1002939"/>
+                  </a:lnTo>
+                  <a:lnTo>
+                    <a:pt x="6517649" y="1007078"/>
+                  </a:lnTo>
+                  <a:lnTo>
+                    <a:pt x="6589272" y="1011188"/>
+                  </a:lnTo>
+                  <a:lnTo>
+                    <a:pt x="6660894" y="1015270"/>
+                  </a:lnTo>
+                  <a:lnTo>
+                    <a:pt x="6732517" y="1019323"/>
+                  </a:lnTo>
+                  <a:lnTo>
+                    <a:pt x="6804139" y="1023348"/>
+                  </a:lnTo>
+                  <a:lnTo>
+                    <a:pt x="6875762" y="1027345"/>
+                  </a:lnTo>
+                  <a:lnTo>
+                    <a:pt x="6947385" y="1031314"/>
+                  </a:lnTo>
+                  <a:lnTo>
+                    <a:pt x="7019007" y="1035255"/>
+                  </a:lnTo>
+                  <a:lnTo>
+                    <a:pt x="7090630" y="1039169"/>
+                  </a:lnTo>
+                  <a:lnTo>
+                    <a:pt x="7090630" y="1252390"/>
+                  </a:lnTo>
+                  <a:lnTo>
+                    <a:pt x="7019007" y="1247006"/>
+                  </a:lnTo>
+                  <a:lnTo>
+                    <a:pt x="6947385" y="1241538"/>
+                  </a:lnTo>
+                  <a:lnTo>
+                    <a:pt x="6875762" y="1235984"/>
+                  </a:lnTo>
+                  <a:lnTo>
+                    <a:pt x="6804139" y="1230344"/>
+                  </a:lnTo>
+                  <a:lnTo>
+                    <a:pt x="6732517" y="1224616"/>
+                  </a:lnTo>
+                  <a:lnTo>
+                    <a:pt x="6660894" y="1218798"/>
+                  </a:lnTo>
+                  <a:lnTo>
+                    <a:pt x="6589272" y="1212890"/>
+                  </a:lnTo>
+                  <a:lnTo>
+                    <a:pt x="6517649" y="1206890"/>
+                  </a:lnTo>
+                  <a:lnTo>
+                    <a:pt x="6446027" y="1200796"/>
+                  </a:lnTo>
+                  <a:lnTo>
+                    <a:pt x="6374404" y="1194607"/>
+                  </a:lnTo>
+                  <a:lnTo>
+                    <a:pt x="6302782" y="1188321"/>
+                  </a:lnTo>
+                  <a:lnTo>
+                    <a:pt x="6231159" y="1181938"/>
+                  </a:lnTo>
+                  <a:lnTo>
+                    <a:pt x="6159537" y="1175455"/>
+                  </a:lnTo>
+                  <a:lnTo>
+                    <a:pt x="6087914" y="1168871"/>
+                  </a:lnTo>
+                  <a:lnTo>
+                    <a:pt x="6016292" y="1162184"/>
+                  </a:lnTo>
+                  <a:lnTo>
+                    <a:pt x="5944669" y="1155393"/>
+                  </a:lnTo>
+                  <a:lnTo>
+                    <a:pt x="5873047" y="1148496"/>
+                  </a:lnTo>
+                  <a:lnTo>
+                    <a:pt x="5801424" y="1141491"/>
+                  </a:lnTo>
+                  <a:lnTo>
+                    <a:pt x="5729802" y="1134378"/>
+                  </a:lnTo>
+                  <a:lnTo>
+                    <a:pt x="5658179" y="1127153"/>
+                  </a:lnTo>
+                  <a:lnTo>
+                    <a:pt x="5586557" y="1119816"/>
+                  </a:lnTo>
+                  <a:lnTo>
+                    <a:pt x="5514934" y="1112364"/>
+                  </a:lnTo>
+                  <a:lnTo>
+                    <a:pt x="5443311" y="1104796"/>
+                  </a:lnTo>
+                  <a:lnTo>
+                    <a:pt x="5371689" y="1097110"/>
+                  </a:lnTo>
+                  <a:lnTo>
+                    <a:pt x="5300066" y="1089304"/>
+                  </a:lnTo>
+                  <a:lnTo>
+                    <a:pt x="5228444" y="1081376"/>
+                  </a:lnTo>
+                  <a:lnTo>
+                    <a:pt x="5156821" y="1073325"/>
+                  </a:lnTo>
+                  <a:lnTo>
+                    <a:pt x="5085199" y="1065148"/>
+                  </a:lnTo>
+                  <a:lnTo>
+                    <a:pt x="5013576" y="1056843"/>
+                  </a:lnTo>
+                  <a:lnTo>
+                    <a:pt x="4941954" y="1048410"/>
+                  </a:lnTo>
+                  <a:lnTo>
+                    <a:pt x="4870331" y="1039844"/>
+                  </a:lnTo>
+                  <a:lnTo>
+                    <a:pt x="4798709" y="1031145"/>
+                  </a:lnTo>
+                  <a:lnTo>
+                    <a:pt x="4727086" y="1022311"/>
+                  </a:lnTo>
+                  <a:lnTo>
+                    <a:pt x="4655464" y="1013338"/>
+                  </a:lnTo>
+                  <a:lnTo>
+                    <a:pt x="4583841" y="1004226"/>
+                  </a:lnTo>
+                  <a:lnTo>
+                    <a:pt x="4512219" y="994971"/>
+                  </a:lnTo>
+                  <a:lnTo>
+                    <a:pt x="4440596" y="985573"/>
+                  </a:lnTo>
+                  <a:lnTo>
+                    <a:pt x="4368974" y="976027"/>
+                  </a:lnTo>
+                  <a:lnTo>
+                    <a:pt x="4297351" y="966333"/>
+                  </a:lnTo>
+                  <a:lnTo>
+                    <a:pt x="4225729" y="956488"/>
+                  </a:lnTo>
+                  <a:lnTo>
+                    <a:pt x="4154106" y="946489"/>
+                  </a:lnTo>
+                  <a:lnTo>
+                    <a:pt x="4082483" y="936334"/>
+                  </a:lnTo>
+                  <a:lnTo>
+                    <a:pt x="4010861" y="926020"/>
+                  </a:lnTo>
+                  <a:lnTo>
+                    <a:pt x="3939238" y="915546"/>
+                  </a:lnTo>
+                  <a:lnTo>
+                    <a:pt x="3867616" y="904909"/>
+                  </a:lnTo>
+                  <a:lnTo>
+                    <a:pt x="3795993" y="894106"/>
+                  </a:lnTo>
+                  <a:lnTo>
+                    <a:pt x="3724371" y="883134"/>
+                  </a:lnTo>
+                  <a:lnTo>
+                    <a:pt x="3652748" y="871991"/>
+                  </a:lnTo>
+                  <a:lnTo>
+                    <a:pt x="3581126" y="860674"/>
+                  </a:lnTo>
+                  <a:lnTo>
+                    <a:pt x="3509503" y="849181"/>
+                  </a:lnTo>
+                  <a:lnTo>
+                    <a:pt x="3437881" y="837509"/>
+                  </a:lnTo>
+                  <a:lnTo>
+                    <a:pt x="3366258" y="825654"/>
+                  </a:lnTo>
+                  <a:lnTo>
+                    <a:pt x="3294636" y="813615"/>
+                  </a:lnTo>
+                  <a:lnTo>
+                    <a:pt x="3223013" y="801388"/>
+                  </a:lnTo>
+                  <a:lnTo>
+                    <a:pt x="3151391" y="788970"/>
+                  </a:lnTo>
+                  <a:lnTo>
+                    <a:pt x="3079768" y="776359"/>
+                  </a:lnTo>
+                  <a:lnTo>
+                    <a:pt x="3008146" y="766096"/>
+                  </a:lnTo>
+                  <a:lnTo>
+                    <a:pt x="2936523" y="760268"/>
+                  </a:lnTo>
+                  <a:lnTo>
+                    <a:pt x="2864901" y="754400"/>
+                  </a:lnTo>
+                  <a:lnTo>
+                    <a:pt x="2793278" y="748490"/>
+                  </a:lnTo>
+                  <a:lnTo>
+                    <a:pt x="2721655" y="742539"/>
+                  </a:lnTo>
+                  <a:lnTo>
+                    <a:pt x="2650033" y="736546"/>
+                  </a:lnTo>
+                  <a:lnTo>
+                    <a:pt x="2578410" y="730511"/>
+                  </a:lnTo>
+                  <a:lnTo>
+                    <a:pt x="2506788" y="724434"/>
+                  </a:lnTo>
+                  <a:lnTo>
+                    <a:pt x="2435165" y="718315"/>
+                  </a:lnTo>
+                  <a:lnTo>
+                    <a:pt x="2363543" y="712152"/>
+                  </a:lnTo>
+                  <a:lnTo>
+                    <a:pt x="2291920" y="705946"/>
+                  </a:lnTo>
+                  <a:lnTo>
+                    <a:pt x="2220298" y="699697"/>
+                  </a:lnTo>
+                  <a:lnTo>
+                    <a:pt x="2148675" y="693404"/>
+                  </a:lnTo>
+                  <a:lnTo>
+                    <a:pt x="2077053" y="687067"/>
+                  </a:lnTo>
+                  <a:lnTo>
+                    <a:pt x="2005430" y="680685"/>
+                  </a:lnTo>
+                  <a:lnTo>
+                    <a:pt x="1933808" y="674259"/>
+                  </a:lnTo>
+                  <a:lnTo>
+                    <a:pt x="1862185" y="667788"/>
+                  </a:lnTo>
+                  <a:lnTo>
+                    <a:pt x="1790563" y="661271"/>
+                  </a:lnTo>
+                  <a:lnTo>
+                    <a:pt x="1718940" y="654709"/>
+                  </a:lnTo>
+                  <a:lnTo>
+                    <a:pt x="1647318" y="648100"/>
+                  </a:lnTo>
+                  <a:lnTo>
+                    <a:pt x="1575695" y="641446"/>
+                  </a:lnTo>
+                  <a:lnTo>
+                    <a:pt x="1504073" y="634744"/>
+                  </a:lnTo>
+                  <a:lnTo>
+                    <a:pt x="1432450" y="627996"/>
+                  </a:lnTo>
+                  <a:lnTo>
+                    <a:pt x="1360827" y="621200"/>
+                  </a:lnTo>
+                  <a:lnTo>
+                    <a:pt x="1289205" y="614357"/>
+                  </a:lnTo>
+                  <a:lnTo>
+                    <a:pt x="1217582" y="607466"/>
+                  </a:lnTo>
+                  <a:lnTo>
+                    <a:pt x="1145960" y="600527"/>
+                  </a:lnTo>
+                  <a:lnTo>
+                    <a:pt x="1074337" y="593539"/>
+                  </a:lnTo>
+                  <a:lnTo>
+                    <a:pt x="1002715" y="586502"/>
+                  </a:lnTo>
+                  <a:lnTo>
+                    <a:pt x="931092" y="579415"/>
+                  </a:lnTo>
+                  <a:lnTo>
+                    <a:pt x="859470" y="572279"/>
+                  </a:lnTo>
+                  <a:lnTo>
+                    <a:pt x="787847" y="565093"/>
+                  </a:lnTo>
+                  <a:lnTo>
+                    <a:pt x="716225" y="557857"/>
+                  </a:lnTo>
+                  <a:lnTo>
+                    <a:pt x="644602" y="550570"/>
+                  </a:lnTo>
+                  <a:lnTo>
+                    <a:pt x="572980" y="543231"/>
+                  </a:lnTo>
+                  <a:lnTo>
+                    <a:pt x="501357" y="535842"/>
+                  </a:lnTo>
+                  <a:lnTo>
+                    <a:pt x="429735" y="528400"/>
+                  </a:lnTo>
+                  <a:lnTo>
+                    <a:pt x="358112" y="520907"/>
+                  </a:lnTo>
+                  <a:lnTo>
+                    <a:pt x="286490" y="513361"/>
+                  </a:lnTo>
+                  <a:lnTo>
+                    <a:pt x="214867" y="505762"/>
+                  </a:lnTo>
+                  <a:lnTo>
+                    <a:pt x="143245" y="498110"/>
+                  </a:lnTo>
+                  <a:lnTo>
+                    <a:pt x="71622" y="490404"/>
+                  </a:lnTo>
+                  <a:lnTo>
+                    <a:pt x="0" y="482644"/>
                   </a:lnTo>
                   <a:close/>
                 </a:path>
@@ -3676,13 +3676,13 @@
           </p:nvSpPr>
           <p:spPr>
             <a:xfrm>
-              <a:off x="1172049" y="3959600"/>
-              <a:ext cx="7090630" cy="1039170"/>
+              <a:off x="1172049" y="3959602"/>
+              <a:ext cx="7090630" cy="1039169"/>
             </a:xfrm>
             <a:custGeom>
               <a:avLst/>
               <a:pathLst>
-                <a:path w="7090630" h="1039170">
+                <a:path w="7090630" h="1039169">
                   <a:moveTo>
                     <a:pt x="0" y="0"/>
                   </a:moveTo>
@@ -3690,7 +3690,7 @@
                     <a:pt x="71622" y="24532"/>
                   </a:lnTo>
                   <a:lnTo>
-                    <a:pt x="143245" y="48689"/>
+                    <a:pt x="143245" y="48688"/>
                   </a:lnTo>
                   <a:lnTo>
                     <a:pt x="214867" y="72474"/>
@@ -3702,7 +3702,7 @@
                     <a:pt x="358112" y="118954"/>
                   </a:lnTo>
                   <a:lnTo>
-                    <a:pt x="429735" y="141661"/>
+                    <a:pt x="429735" y="141660"/>
                   </a:lnTo>
                   <a:lnTo>
                     <a:pt x="501357" y="164018"/>
@@ -3711,19 +3711,19 @@
                     <a:pt x="572980" y="186032"/>
                   </a:lnTo>
                   <a:lnTo>
-                    <a:pt x="644602" y="207709"/>
+                    <a:pt x="644602" y="207708"/>
                   </a:lnTo>
                   <a:lnTo>
                     <a:pt x="716225" y="229052"/>
                   </a:lnTo>
                   <a:lnTo>
-                    <a:pt x="787847" y="250068"/>
-                  </a:lnTo>
-                  <a:lnTo>
-                    <a:pt x="859470" y="270761"/>
-                  </a:lnTo>
-                  <a:lnTo>
-                    <a:pt x="931092" y="291136"/>
+                    <a:pt x="787847" y="250067"/>
+                  </a:lnTo>
+                  <a:lnTo>
+                    <a:pt x="859470" y="270760"/>
+                  </a:lnTo>
+                  <a:lnTo>
+                    <a:pt x="931092" y="291135"/>
                   </a:lnTo>
                   <a:lnTo>
                     <a:pt x="1002715" y="311198"/>
@@ -3735,253 +3735,253 @@
                     <a:pt x="1145960" y="350403"/>
                   </a:lnTo>
                   <a:lnTo>
-                    <a:pt x="1217582" y="369556"/>
-                  </a:lnTo>
-                  <a:lnTo>
-                    <a:pt x="1289205" y="388414"/>
+                    <a:pt x="1217582" y="369555"/>
+                  </a:lnTo>
+                  <a:lnTo>
+                    <a:pt x="1289205" y="388413"/>
                   </a:lnTo>
                   <a:lnTo>
                     <a:pt x="1360827" y="406982"/>
                   </a:lnTo>
                   <a:lnTo>
-                    <a:pt x="1432450" y="425266"/>
+                    <a:pt x="1432450" y="425265"/>
                   </a:lnTo>
                   <a:lnTo>
                     <a:pt x="1504073" y="443268"/>
                   </a:lnTo>
                   <a:lnTo>
-                    <a:pt x="1575695" y="460995"/>
-                  </a:lnTo>
-                  <a:lnTo>
-                    <a:pt x="1647318" y="478449"/>
-                  </a:lnTo>
-                  <a:lnTo>
-                    <a:pt x="1718940" y="495635"/>
-                  </a:lnTo>
-                  <a:lnTo>
-                    <a:pt x="1790563" y="512557"/>
-                  </a:lnTo>
-                  <a:lnTo>
-                    <a:pt x="1862185" y="529219"/>
+                    <a:pt x="1575695" y="460994"/>
+                  </a:lnTo>
+                  <a:lnTo>
+                    <a:pt x="1647318" y="478448"/>
+                  </a:lnTo>
+                  <a:lnTo>
+                    <a:pt x="1718940" y="495634"/>
+                  </a:lnTo>
+                  <a:lnTo>
+                    <a:pt x="1790563" y="512556"/>
+                  </a:lnTo>
+                  <a:lnTo>
+                    <a:pt x="1862185" y="529218"/>
                   </a:lnTo>
                   <a:lnTo>
                     <a:pt x="1933808" y="545625"/>
                   </a:lnTo>
                   <a:lnTo>
-                    <a:pt x="2005430" y="561780"/>
-                  </a:lnTo>
-                  <a:lnTo>
-                    <a:pt x="2077053" y="577686"/>
-                  </a:lnTo>
-                  <a:lnTo>
-                    <a:pt x="2148675" y="593349"/>
-                  </a:lnTo>
-                  <a:lnTo>
-                    <a:pt x="2220298" y="608770"/>
-                  </a:lnTo>
-                  <a:lnTo>
-                    <a:pt x="2291920" y="623955"/>
-                  </a:lnTo>
-                  <a:lnTo>
-                    <a:pt x="2363543" y="638907"/>
-                  </a:lnTo>
-                  <a:lnTo>
-                    <a:pt x="2435165" y="653629"/>
-                  </a:lnTo>
-                  <a:lnTo>
-                    <a:pt x="2506788" y="668125"/>
-                  </a:lnTo>
-                  <a:lnTo>
-                    <a:pt x="2578410" y="682398"/>
-                  </a:lnTo>
-                  <a:lnTo>
-                    <a:pt x="2650033" y="696452"/>
-                  </a:lnTo>
-                  <a:lnTo>
-                    <a:pt x="2721655" y="710291"/>
-                  </a:lnTo>
-                  <a:lnTo>
-                    <a:pt x="2793278" y="723917"/>
-                  </a:lnTo>
-                  <a:lnTo>
-                    <a:pt x="2864901" y="737334"/>
-                  </a:lnTo>
-                  <a:lnTo>
-                    <a:pt x="2936523" y="750544"/>
-                  </a:lnTo>
-                  <a:lnTo>
-                    <a:pt x="3008146" y="763552"/>
-                  </a:lnTo>
-                  <a:lnTo>
-                    <a:pt x="3079768" y="771884"/>
-                  </a:lnTo>
-                  <a:lnTo>
-                    <a:pt x="3151391" y="777631"/>
-                  </a:lnTo>
-                  <a:lnTo>
-                    <a:pt x="3223013" y="783338"/>
-                  </a:lnTo>
-                  <a:lnTo>
-                    <a:pt x="3294636" y="789005"/>
-                  </a:lnTo>
-                  <a:lnTo>
-                    <a:pt x="3366258" y="794633"/>
-                  </a:lnTo>
-                  <a:lnTo>
-                    <a:pt x="3437881" y="800222"/>
-                  </a:lnTo>
-                  <a:lnTo>
-                    <a:pt x="3509503" y="805771"/>
-                  </a:lnTo>
-                  <a:lnTo>
-                    <a:pt x="3581126" y="811282"/>
-                  </a:lnTo>
-                  <a:lnTo>
-                    <a:pt x="3652748" y="816755"/>
-                  </a:lnTo>
-                  <a:lnTo>
-                    <a:pt x="3724371" y="822190"/>
-                  </a:lnTo>
-                  <a:lnTo>
-                    <a:pt x="3795993" y="827587"/>
-                  </a:lnTo>
-                  <a:lnTo>
-                    <a:pt x="3867616" y="832946"/>
-                  </a:lnTo>
-                  <a:lnTo>
-                    <a:pt x="3939238" y="838268"/>
-                  </a:lnTo>
-                  <a:lnTo>
-                    <a:pt x="4010861" y="843553"/>
-                  </a:lnTo>
-                  <a:lnTo>
-                    <a:pt x="4082483" y="848801"/>
-                  </a:lnTo>
-                  <a:lnTo>
-                    <a:pt x="4154106" y="854012"/>
-                  </a:lnTo>
-                  <a:lnTo>
-                    <a:pt x="4225729" y="859188"/>
-                  </a:lnTo>
-                  <a:lnTo>
-                    <a:pt x="4297351" y="864327"/>
-                  </a:lnTo>
-                  <a:lnTo>
-                    <a:pt x="4368974" y="869430"/>
-                  </a:lnTo>
-                  <a:lnTo>
-                    <a:pt x="4440596" y="874498"/>
-                  </a:lnTo>
-                  <a:lnTo>
-                    <a:pt x="4512219" y="879531"/>
-                  </a:lnTo>
-                  <a:lnTo>
-                    <a:pt x="4583841" y="884529"/>
-                  </a:lnTo>
-                  <a:lnTo>
-                    <a:pt x="4655464" y="889492"/>
-                  </a:lnTo>
-                  <a:lnTo>
-                    <a:pt x="4727086" y="894420"/>
-                  </a:lnTo>
-                  <a:lnTo>
-                    <a:pt x="4798709" y="899314"/>
-                  </a:lnTo>
-                  <a:lnTo>
-                    <a:pt x="4870331" y="904174"/>
-                  </a:lnTo>
-                  <a:lnTo>
-                    <a:pt x="4941954" y="909001"/>
-                  </a:lnTo>
-                  <a:lnTo>
-                    <a:pt x="5013576" y="913793"/>
-                  </a:lnTo>
-                  <a:lnTo>
-                    <a:pt x="5085199" y="918553"/>
-                  </a:lnTo>
-                  <a:lnTo>
-                    <a:pt x="5156821" y="923279"/>
-                  </a:lnTo>
-                  <a:lnTo>
-                    <a:pt x="5228444" y="927972"/>
-                  </a:lnTo>
-                  <a:lnTo>
-                    <a:pt x="5300066" y="932633"/>
-                  </a:lnTo>
-                  <a:lnTo>
-                    <a:pt x="5371689" y="937261"/>
-                  </a:lnTo>
-                  <a:lnTo>
-                    <a:pt x="5443311" y="941857"/>
-                  </a:lnTo>
-                  <a:lnTo>
-                    <a:pt x="5514934" y="946421"/>
-                  </a:lnTo>
-                  <a:lnTo>
-                    <a:pt x="5586557" y="950953"/>
-                  </a:lnTo>
-                  <a:lnTo>
-                    <a:pt x="5658179" y="955454"/>
-                  </a:lnTo>
-                  <a:lnTo>
-                    <a:pt x="5729802" y="959923"/>
-                  </a:lnTo>
-                  <a:lnTo>
-                    <a:pt x="5801424" y="964361"/>
-                  </a:lnTo>
-                  <a:lnTo>
-                    <a:pt x="5873047" y="968768"/>
-                  </a:lnTo>
-                  <a:lnTo>
-                    <a:pt x="5944669" y="973145"/>
-                  </a:lnTo>
-                  <a:lnTo>
-                    <a:pt x="6016292" y="977491"/>
-                  </a:lnTo>
-                  <a:lnTo>
-                    <a:pt x="6087914" y="981807"/>
-                  </a:lnTo>
-                  <a:lnTo>
-                    <a:pt x="6159537" y="986093"/>
-                  </a:lnTo>
-                  <a:lnTo>
-                    <a:pt x="6231159" y="990349"/>
-                  </a:lnTo>
-                  <a:lnTo>
-                    <a:pt x="6302782" y="994576"/>
-                  </a:lnTo>
-                  <a:lnTo>
-                    <a:pt x="6374404" y="998773"/>
-                  </a:lnTo>
-                  <a:lnTo>
-                    <a:pt x="6446027" y="1002941"/>
-                  </a:lnTo>
-                  <a:lnTo>
-                    <a:pt x="6517649" y="1007080"/>
-                  </a:lnTo>
-                  <a:lnTo>
-                    <a:pt x="6589272" y="1011190"/>
-                  </a:lnTo>
-                  <a:lnTo>
-                    <a:pt x="6660894" y="1015271"/>
-                  </a:lnTo>
-                  <a:lnTo>
-                    <a:pt x="6732517" y="1019324"/>
-                  </a:lnTo>
-                  <a:lnTo>
-                    <a:pt x="6804139" y="1023349"/>
-                  </a:lnTo>
-                  <a:lnTo>
-                    <a:pt x="6875762" y="1027346"/>
-                  </a:lnTo>
-                  <a:lnTo>
-                    <a:pt x="6947385" y="1031315"/>
-                  </a:lnTo>
-                  <a:lnTo>
-                    <a:pt x="7019007" y="1035256"/>
-                  </a:lnTo>
-                  <a:lnTo>
-                    <a:pt x="7090630" y="1039170"/>
+                    <a:pt x="2005430" y="561779"/>
+                  </a:lnTo>
+                  <a:lnTo>
+                    <a:pt x="2077053" y="577685"/>
+                  </a:lnTo>
+                  <a:lnTo>
+                    <a:pt x="2148675" y="593348"/>
+                  </a:lnTo>
+                  <a:lnTo>
+                    <a:pt x="2220298" y="608769"/>
+                  </a:lnTo>
+                  <a:lnTo>
+                    <a:pt x="2291920" y="623954"/>
+                  </a:lnTo>
+                  <a:lnTo>
+                    <a:pt x="2363543" y="638906"/>
+                  </a:lnTo>
+                  <a:lnTo>
+                    <a:pt x="2435165" y="653628"/>
+                  </a:lnTo>
+                  <a:lnTo>
+                    <a:pt x="2506788" y="668124"/>
+                  </a:lnTo>
+                  <a:lnTo>
+                    <a:pt x="2578410" y="682397"/>
+                  </a:lnTo>
+                  <a:lnTo>
+                    <a:pt x="2650033" y="696451"/>
+                  </a:lnTo>
+                  <a:lnTo>
+                    <a:pt x="2721655" y="710290"/>
+                  </a:lnTo>
+                  <a:lnTo>
+                    <a:pt x="2793278" y="723916"/>
+                  </a:lnTo>
+                  <a:lnTo>
+                    <a:pt x="2864901" y="737332"/>
+                  </a:lnTo>
+                  <a:lnTo>
+                    <a:pt x="2936523" y="750543"/>
+                  </a:lnTo>
+                  <a:lnTo>
+                    <a:pt x="3008146" y="763551"/>
+                  </a:lnTo>
+                  <a:lnTo>
+                    <a:pt x="3079768" y="771883"/>
+                  </a:lnTo>
+                  <a:lnTo>
+                    <a:pt x="3151391" y="777630"/>
+                  </a:lnTo>
+                  <a:lnTo>
+                    <a:pt x="3223013" y="783337"/>
+                  </a:lnTo>
+                  <a:lnTo>
+                    <a:pt x="3294636" y="789004"/>
+                  </a:lnTo>
+                  <a:lnTo>
+                    <a:pt x="3366258" y="794632"/>
+                  </a:lnTo>
+                  <a:lnTo>
+                    <a:pt x="3437881" y="800221"/>
+                  </a:lnTo>
+                  <a:lnTo>
+                    <a:pt x="3509503" y="805770"/>
+                  </a:lnTo>
+                  <a:lnTo>
+                    <a:pt x="3581126" y="811281"/>
+                  </a:lnTo>
+                  <a:lnTo>
+                    <a:pt x="3652748" y="816754"/>
+                  </a:lnTo>
+                  <a:lnTo>
+                    <a:pt x="3724371" y="822189"/>
+                  </a:lnTo>
+                  <a:lnTo>
+                    <a:pt x="3795993" y="827585"/>
+                  </a:lnTo>
+                  <a:lnTo>
+                    <a:pt x="3867616" y="832945"/>
+                  </a:lnTo>
+                  <a:lnTo>
+                    <a:pt x="3939238" y="838266"/>
+                  </a:lnTo>
+                  <a:lnTo>
+                    <a:pt x="4010861" y="843551"/>
+                  </a:lnTo>
+                  <a:lnTo>
+                    <a:pt x="4082483" y="848799"/>
+                  </a:lnTo>
+                  <a:lnTo>
+                    <a:pt x="4154106" y="854011"/>
+                  </a:lnTo>
+                  <a:lnTo>
+                    <a:pt x="4225729" y="859186"/>
+                  </a:lnTo>
+                  <a:lnTo>
+                    <a:pt x="4297351" y="864326"/>
+                  </a:lnTo>
+                  <a:lnTo>
+                    <a:pt x="4368974" y="869429"/>
+                  </a:lnTo>
+                  <a:lnTo>
+                    <a:pt x="4440596" y="874497"/>
+                  </a:lnTo>
+                  <a:lnTo>
+                    <a:pt x="4512219" y="879530"/>
+                  </a:lnTo>
+                  <a:lnTo>
+                    <a:pt x="4583841" y="884528"/>
+                  </a:lnTo>
+                  <a:lnTo>
+                    <a:pt x="4655464" y="889491"/>
+                  </a:lnTo>
+                  <a:lnTo>
+                    <a:pt x="4727086" y="894419"/>
+                  </a:lnTo>
+                  <a:lnTo>
+                    <a:pt x="4798709" y="899313"/>
+                  </a:lnTo>
+                  <a:lnTo>
+                    <a:pt x="4870331" y="904173"/>
+                  </a:lnTo>
+                  <a:lnTo>
+                    <a:pt x="4941954" y="908999"/>
+                  </a:lnTo>
+                  <a:lnTo>
+                    <a:pt x="5013576" y="913792"/>
+                  </a:lnTo>
+                  <a:lnTo>
+                    <a:pt x="5085199" y="918551"/>
+                  </a:lnTo>
+                  <a:lnTo>
+                    <a:pt x="5156821" y="923277"/>
+                  </a:lnTo>
+                  <a:lnTo>
+                    <a:pt x="5228444" y="927971"/>
+                  </a:lnTo>
+                  <a:lnTo>
+                    <a:pt x="5300066" y="932631"/>
+                  </a:lnTo>
+                  <a:lnTo>
+                    <a:pt x="5371689" y="937259"/>
+                  </a:lnTo>
+                  <a:lnTo>
+                    <a:pt x="5443311" y="941855"/>
+                  </a:lnTo>
+                  <a:lnTo>
+                    <a:pt x="5514934" y="946419"/>
+                  </a:lnTo>
+                  <a:lnTo>
+                    <a:pt x="5586557" y="950952"/>
+                  </a:lnTo>
+                  <a:lnTo>
+                    <a:pt x="5658179" y="955452"/>
+                  </a:lnTo>
+                  <a:lnTo>
+                    <a:pt x="5729802" y="959922"/>
+                  </a:lnTo>
+                  <a:lnTo>
+                    <a:pt x="5801424" y="964360"/>
+                  </a:lnTo>
+                  <a:lnTo>
+                    <a:pt x="5873047" y="968767"/>
+                  </a:lnTo>
+                  <a:lnTo>
+                    <a:pt x="5944669" y="973144"/>
+                  </a:lnTo>
+                  <a:lnTo>
+                    <a:pt x="6016292" y="977490"/>
+                  </a:lnTo>
+                  <a:lnTo>
+                    <a:pt x="6087914" y="981806"/>
+                  </a:lnTo>
+                  <a:lnTo>
+                    <a:pt x="6159537" y="986092"/>
+                  </a:lnTo>
+                  <a:lnTo>
+                    <a:pt x="6231159" y="990348"/>
+                  </a:lnTo>
+                  <a:lnTo>
+                    <a:pt x="6302782" y="994575"/>
+                  </a:lnTo>
+                  <a:lnTo>
+                    <a:pt x="6374404" y="998772"/>
+                  </a:lnTo>
+                  <a:lnTo>
+                    <a:pt x="6446027" y="1002939"/>
+                  </a:lnTo>
+                  <a:lnTo>
+                    <a:pt x="6517649" y="1007078"/>
+                  </a:lnTo>
+                  <a:lnTo>
+                    <a:pt x="6589272" y="1011188"/>
+                  </a:lnTo>
+                  <a:lnTo>
+                    <a:pt x="6660894" y="1015270"/>
+                  </a:lnTo>
+                  <a:lnTo>
+                    <a:pt x="6732517" y="1019323"/>
+                  </a:lnTo>
+                  <a:lnTo>
+                    <a:pt x="6804139" y="1023348"/>
+                  </a:lnTo>
+                  <a:lnTo>
+                    <a:pt x="6875762" y="1027345"/>
+                  </a:lnTo>
+                  <a:lnTo>
+                    <a:pt x="6947385" y="1031314"/>
+                  </a:lnTo>
+                  <a:lnTo>
+                    <a:pt x="7019007" y="1035255"/>
+                  </a:lnTo>
+                  <a:lnTo>
+                    <a:pt x="7090630" y="1039169"/>
                   </a:lnTo>
                 </a:path>
               </a:pathLst>
@@ -4012,19 +4012,19 @@
                     <a:pt x="7090630" y="769746"/>
                   </a:moveTo>
                   <a:lnTo>
-                    <a:pt x="7019007" y="764362"/>
-                  </a:lnTo>
-                  <a:lnTo>
-                    <a:pt x="6947385" y="758894"/>
-                  </a:lnTo>
-                  <a:lnTo>
-                    <a:pt x="6875762" y="753340"/>
-                  </a:lnTo>
-                  <a:lnTo>
-                    <a:pt x="6804139" y="747700"/>
-                  </a:lnTo>
-                  <a:lnTo>
-                    <a:pt x="6732517" y="741972"/>
+                    <a:pt x="7019007" y="764361"/>
+                  </a:lnTo>
+                  <a:lnTo>
+                    <a:pt x="6947385" y="758893"/>
+                  </a:lnTo>
+                  <a:lnTo>
+                    <a:pt x="6875762" y="753339"/>
+                  </a:lnTo>
+                  <a:lnTo>
+                    <a:pt x="6804139" y="747699"/>
+                  </a:lnTo>
+                  <a:lnTo>
+                    <a:pt x="6732517" y="741971"/>
                   </a:lnTo>
                   <a:lnTo>
                     <a:pt x="6660894" y="736154"/>
@@ -4033,67 +4033,67 @@
                     <a:pt x="6589272" y="730246"/>
                   </a:lnTo>
                   <a:lnTo>
-                    <a:pt x="6517649" y="724246"/>
-                  </a:lnTo>
-                  <a:lnTo>
-                    <a:pt x="6446027" y="718152"/>
-                  </a:lnTo>
-                  <a:lnTo>
-                    <a:pt x="6374404" y="711963"/>
+                    <a:pt x="6517649" y="724245"/>
+                  </a:lnTo>
+                  <a:lnTo>
+                    <a:pt x="6446027" y="718151"/>
+                  </a:lnTo>
+                  <a:lnTo>
+                    <a:pt x="6374404" y="711962"/>
                   </a:lnTo>
                   <a:lnTo>
                     <a:pt x="6302782" y="705677"/>
                   </a:lnTo>
                   <a:lnTo>
-                    <a:pt x="6231159" y="699294"/>
-                  </a:lnTo>
-                  <a:lnTo>
-                    <a:pt x="6159537" y="692811"/>
-                  </a:lnTo>
-                  <a:lnTo>
-                    <a:pt x="6087914" y="686227"/>
+                    <a:pt x="6231159" y="699293"/>
+                  </a:lnTo>
+                  <a:lnTo>
+                    <a:pt x="6159537" y="692810"/>
+                  </a:lnTo>
+                  <a:lnTo>
+                    <a:pt x="6087914" y="686226"/>
                   </a:lnTo>
                   <a:lnTo>
                     <a:pt x="6016292" y="679540"/>
                   </a:lnTo>
                   <a:lnTo>
-                    <a:pt x="5944669" y="672749"/>
-                  </a:lnTo>
-                  <a:lnTo>
-                    <a:pt x="5873047" y="665852"/>
+                    <a:pt x="5944669" y="672748"/>
+                  </a:lnTo>
+                  <a:lnTo>
+                    <a:pt x="5873047" y="665851"/>
                   </a:lnTo>
                   <a:lnTo>
                     <a:pt x="5801424" y="658847"/>
                   </a:lnTo>
                   <a:lnTo>
-                    <a:pt x="5729802" y="651734"/>
-                  </a:lnTo>
-                  <a:lnTo>
-                    <a:pt x="5658179" y="644509"/>
+                    <a:pt x="5729802" y="651733"/>
+                  </a:lnTo>
+                  <a:lnTo>
+                    <a:pt x="5658179" y="644508"/>
                   </a:lnTo>
                   <a:lnTo>
                     <a:pt x="5586557" y="637171"/>
                   </a:lnTo>
                   <a:lnTo>
-                    <a:pt x="5514934" y="629720"/>
-                  </a:lnTo>
-                  <a:lnTo>
-                    <a:pt x="5443311" y="622152"/>
-                  </a:lnTo>
-                  <a:lnTo>
-                    <a:pt x="5371689" y="614466"/>
-                  </a:lnTo>
-                  <a:lnTo>
-                    <a:pt x="5300066" y="606660"/>
-                  </a:lnTo>
-                  <a:lnTo>
-                    <a:pt x="5228444" y="598732"/>
-                  </a:lnTo>
-                  <a:lnTo>
-                    <a:pt x="5156821" y="590681"/>
-                  </a:lnTo>
-                  <a:lnTo>
-                    <a:pt x="5085199" y="582504"/>
+                    <a:pt x="5514934" y="629719"/>
+                  </a:lnTo>
+                  <a:lnTo>
+                    <a:pt x="5443311" y="622151"/>
+                  </a:lnTo>
+                  <a:lnTo>
+                    <a:pt x="5371689" y="614465"/>
+                  </a:lnTo>
+                  <a:lnTo>
+                    <a:pt x="5300066" y="606659"/>
+                  </a:lnTo>
+                  <a:lnTo>
+                    <a:pt x="5228444" y="598731"/>
+                  </a:lnTo>
+                  <a:lnTo>
+                    <a:pt x="5156821" y="590680"/>
+                  </a:lnTo>
+                  <a:lnTo>
+                    <a:pt x="5085199" y="582503"/>
                   </a:lnTo>
                   <a:lnTo>
                     <a:pt x="5013576" y="574199"/>
@@ -4114,7 +4114,7 @@
                     <a:pt x="4655464" y="530694"/>
                   </a:lnTo>
                   <a:lnTo>
-                    <a:pt x="4583841" y="521582"/>
+                    <a:pt x="4583841" y="521581"/>
                   </a:lnTo>
                   <a:lnTo>
                     <a:pt x="4512219" y="512327"/>
@@ -4126,7 +4126,7 @@
                     <a:pt x="4368974" y="493383"/>
                   </a:lnTo>
                   <a:lnTo>
-                    <a:pt x="4297351" y="483689"/>
+                    <a:pt x="4297351" y="483688"/>
                   </a:lnTo>
                   <a:lnTo>
                     <a:pt x="4225729" y="473843"/>
@@ -4135,7 +4135,7 @@
                     <a:pt x="4154106" y="463844"/>
                   </a:lnTo>
                   <a:lnTo>
-                    <a:pt x="4082483" y="453690"/>
+                    <a:pt x="4082483" y="453689"/>
                   </a:lnTo>
                   <a:lnTo>
                     <a:pt x="4010861" y="443376"/>
@@ -4144,16 +4144,16 @@
                     <a:pt x="3939238" y="432902"/>
                   </a:lnTo>
                   <a:lnTo>
-                    <a:pt x="3867616" y="422265"/>
+                    <a:pt x="3867616" y="422264"/>
                   </a:lnTo>
                   <a:lnTo>
                     <a:pt x="3795993" y="411461"/>
                   </a:lnTo>
                   <a:lnTo>
-                    <a:pt x="3724371" y="400490"/>
-                  </a:lnTo>
-                  <a:lnTo>
-                    <a:pt x="3652748" y="389347"/>
+                    <a:pt x="3724371" y="400489"/>
+                  </a:lnTo>
+                  <a:lnTo>
+                    <a:pt x="3652748" y="389346"/>
                   </a:lnTo>
                   <a:lnTo>
                     <a:pt x="3581126" y="378030"/>
@@ -4171,13 +4171,13 @@
                     <a:pt x="3294636" y="330971"/>
                   </a:lnTo>
                   <a:lnTo>
-                    <a:pt x="3223013" y="318744"/>
+                    <a:pt x="3223013" y="318743"/>
                   </a:lnTo>
                   <a:lnTo>
                     <a:pt x="3151391" y="306326"/>
                   </a:lnTo>
                   <a:lnTo>
-                    <a:pt x="3079768" y="293715"/>
+                    <a:pt x="3079768" y="293714"/>
                   </a:lnTo>
                   <a:lnTo>
                     <a:pt x="3008146" y="283452"/>
@@ -4213,10 +4213,10 @@
                     <a:pt x="2291920" y="223302"/>
                   </a:lnTo>
                   <a:lnTo>
-                    <a:pt x="2220298" y="217053"/>
-                  </a:lnTo>
-                  <a:lnTo>
-                    <a:pt x="2148675" y="210760"/>
+                    <a:pt x="2220298" y="217052"/>
+                  </a:lnTo>
+                  <a:lnTo>
+                    <a:pt x="2148675" y="210759"/>
                   </a:lnTo>
                   <a:lnTo>
                     <a:pt x="2077053" y="204422"/>
@@ -4225,7 +4225,7 @@
                     <a:pt x="2005430" y="198041"/>
                   </a:lnTo>
                   <a:lnTo>
-                    <a:pt x="1933808" y="191615"/>
+                    <a:pt x="1933808" y="191614"/>
                   </a:lnTo>
                   <a:lnTo>
                     <a:pt x="1862185" y="185143"/>
@@ -4246,7 +4246,7 @@
                     <a:pt x="1504073" y="152100"/>
                   </a:lnTo>
                   <a:lnTo>
-                    <a:pt x="1432450" y="145352"/>
+                    <a:pt x="1432450" y="145351"/>
                   </a:lnTo>
                   <a:lnTo>
                     <a:pt x="1360827" y="138556"/>
@@ -4326,13 +4326,13 @@
           </p:nvSpPr>
           <p:spPr>
             <a:xfrm>
-              <a:off x="1172049" y="4222564"/>
-              <a:ext cx="7090630" cy="895574"/>
+              <a:off x="1172049" y="4222565"/>
+              <a:ext cx="7090630" cy="895573"/>
             </a:xfrm>
             <a:custGeom>
               <a:avLst/>
               <a:pathLst>
-                <a:path w="7090630" h="895574">
+                <a:path w="7090630" h="895573">
                   <a:moveTo>
                     <a:pt x="0" y="0"/>
                   </a:moveTo>
@@ -4340,7 +4340,7 @@
                     <a:pt x="71622" y="14903"/>
                   </a:lnTo>
                   <a:lnTo>
-                    <a:pt x="143245" y="29641"/>
+                    <a:pt x="143245" y="29640"/>
                   </a:lnTo>
                   <a:lnTo>
                     <a:pt x="214867" y="44213"/>
@@ -4388,7 +4388,7 @@
                     <a:pt x="1217582" y="231945"/>
                   </a:lnTo>
                   <a:lnTo>
-                    <a:pt x="1289205" y="244259"/>
+                    <a:pt x="1289205" y="244258"/>
                   </a:lnTo>
                   <a:lnTo>
                     <a:pt x="1360827" y="256435"/>
@@ -4400,7 +4400,7 @@
                     <a:pt x="1504073" y="280381"/>
                   </a:lnTo>
                   <a:lnTo>
-                    <a:pt x="1575695" y="292154"/>
+                    <a:pt x="1575695" y="292153"/>
                   </a:lnTo>
                   <a:lnTo>
                     <a:pt x="1647318" y="303795"/>
@@ -4418,10 +4418,10 @@
                     <a:pt x="1933808" y="349075"/>
                   </a:lnTo>
                   <a:lnTo>
-                    <a:pt x="2005430" y="360081"/>
-                  </a:lnTo>
-                  <a:lnTo>
-                    <a:pt x="2077053" y="370964"/>
+                    <a:pt x="2005430" y="360080"/>
+                  </a:lnTo>
+                  <a:lnTo>
+                    <a:pt x="2077053" y="370963"/>
                   </a:lnTo>
                   <a:lnTo>
                     <a:pt x="2148675" y="381725"/>
@@ -4430,16 +4430,16 @@
                     <a:pt x="2220298" y="392366"/>
                   </a:lnTo>
                   <a:lnTo>
-                    <a:pt x="2291920" y="402889"/>
-                  </a:lnTo>
-                  <a:lnTo>
-                    <a:pt x="2363543" y="413294"/>
+                    <a:pt x="2291920" y="402888"/>
+                  </a:lnTo>
+                  <a:lnTo>
+                    <a:pt x="2363543" y="413293"/>
                   </a:lnTo>
                   <a:lnTo>
                     <a:pt x="2435165" y="423582"/>
                   </a:lnTo>
                   <a:lnTo>
-                    <a:pt x="2506788" y="433756"/>
+                    <a:pt x="2506788" y="433755"/>
                   </a:lnTo>
                   <a:lnTo>
                     <a:pt x="2578410" y="443816"/>
@@ -4448,19 +4448,19 @@
                     <a:pt x="2650033" y="453764"/>
                   </a:lnTo>
                   <a:lnTo>
-                    <a:pt x="2721655" y="463601"/>
-                  </a:lnTo>
-                  <a:lnTo>
-                    <a:pt x="2793278" y="473328"/>
-                  </a:lnTo>
-                  <a:lnTo>
-                    <a:pt x="2864901" y="482946"/>
-                  </a:lnTo>
-                  <a:lnTo>
-                    <a:pt x="2936523" y="492457"/>
-                  </a:lnTo>
-                  <a:lnTo>
-                    <a:pt x="3008146" y="501862"/>
+                    <a:pt x="2721655" y="463600"/>
+                  </a:lnTo>
+                  <a:lnTo>
+                    <a:pt x="2793278" y="473327"/>
+                  </a:lnTo>
+                  <a:lnTo>
+                    <a:pt x="2864901" y="482945"/>
+                  </a:lnTo>
+                  <a:lnTo>
+                    <a:pt x="2936523" y="492456"/>
+                  </a:lnTo>
+                  <a:lnTo>
+                    <a:pt x="3008146" y="501861"/>
                   </a:lnTo>
                   <a:lnTo>
                     <a:pt x="3079768" y="511161"/>
@@ -4472,49 +4472,49 @@
                     <a:pt x="3223013" y="529450"/>
                   </a:lnTo>
                   <a:lnTo>
-                    <a:pt x="3294636" y="538442"/>
+                    <a:pt x="3294636" y="538441"/>
                   </a:lnTo>
                   <a:lnTo>
                     <a:pt x="3366258" y="547333"/>
                   </a:lnTo>
                   <a:lnTo>
-                    <a:pt x="3437881" y="556125"/>
-                  </a:lnTo>
-                  <a:lnTo>
-                    <a:pt x="3509503" y="564819"/>
-                  </a:lnTo>
-                  <a:lnTo>
-                    <a:pt x="3581126" y="573416"/>
+                    <a:pt x="3437881" y="556124"/>
+                  </a:lnTo>
+                  <a:lnTo>
+                    <a:pt x="3509503" y="564818"/>
+                  </a:lnTo>
+                  <a:lnTo>
+                    <a:pt x="3581126" y="573415"/>
                   </a:lnTo>
                   <a:lnTo>
                     <a:pt x="3652748" y="581916"/>
                   </a:lnTo>
                   <a:lnTo>
-                    <a:pt x="3724371" y="590322"/>
-                  </a:lnTo>
-                  <a:lnTo>
-                    <a:pt x="3795993" y="598634"/>
-                  </a:lnTo>
-                  <a:lnTo>
-                    <a:pt x="3867616" y="606853"/>
+                    <a:pt x="3724371" y="590321"/>
+                  </a:lnTo>
+                  <a:lnTo>
+                    <a:pt x="3795993" y="598633"/>
+                  </a:lnTo>
+                  <a:lnTo>
+                    <a:pt x="3867616" y="606852"/>
                   </a:lnTo>
                   <a:lnTo>
                     <a:pt x="3939238" y="614980"/>
                   </a:lnTo>
                   <a:lnTo>
-                    <a:pt x="4010861" y="623017"/>
-                  </a:lnTo>
-                  <a:lnTo>
-                    <a:pt x="4082483" y="630964"/>
-                  </a:lnTo>
-                  <a:lnTo>
-                    <a:pt x="4154106" y="638822"/>
-                  </a:lnTo>
-                  <a:lnTo>
-                    <a:pt x="4225729" y="646592"/>
-                  </a:lnTo>
-                  <a:lnTo>
-                    <a:pt x="4297351" y="654276"/>
+                    <a:pt x="4010861" y="623016"/>
+                  </a:lnTo>
+                  <a:lnTo>
+                    <a:pt x="4082483" y="630963"/>
+                  </a:lnTo>
+                  <a:lnTo>
+                    <a:pt x="4154106" y="638821"/>
+                  </a:lnTo>
+                  <a:lnTo>
+                    <a:pt x="4225729" y="646591"/>
+                  </a:lnTo>
+                  <a:lnTo>
+                    <a:pt x="4297351" y="654275"/>
                   </a:lnTo>
                   <a:lnTo>
                     <a:pt x="4368974" y="661873"/>
@@ -4535,67 +4535,67 @@
                     <a:pt x="4727086" y="698608"/>
                   </a:lnTo>
                   <a:lnTo>
-                    <a:pt x="4798709" y="705711"/>
-                  </a:lnTo>
-                  <a:lnTo>
-                    <a:pt x="4870331" y="712735"/>
+                    <a:pt x="4798709" y="705710"/>
+                  </a:lnTo>
+                  <a:lnTo>
+                    <a:pt x="4870331" y="712734"/>
                   </a:lnTo>
                   <a:lnTo>
                     <a:pt x="4941954" y="719679"/>
                   </a:lnTo>
                   <a:lnTo>
-                    <a:pt x="5013576" y="726547"/>
-                  </a:lnTo>
-                  <a:lnTo>
-                    <a:pt x="5085199" y="733338"/>
-                  </a:lnTo>
-                  <a:lnTo>
-                    <a:pt x="5156821" y="740053"/>
-                  </a:lnTo>
-                  <a:lnTo>
-                    <a:pt x="5228444" y="746693"/>
+                    <a:pt x="5013576" y="726546"/>
+                  </a:lnTo>
+                  <a:lnTo>
+                    <a:pt x="5085199" y="733337"/>
+                  </a:lnTo>
+                  <a:lnTo>
+                    <a:pt x="5156821" y="740052"/>
+                  </a:lnTo>
+                  <a:lnTo>
+                    <a:pt x="5228444" y="746692"/>
                   </a:lnTo>
                   <a:lnTo>
                     <a:pt x="5300066" y="753258"/>
                   </a:lnTo>
                   <a:lnTo>
-                    <a:pt x="5371689" y="759751"/>
-                  </a:lnTo>
-                  <a:lnTo>
-                    <a:pt x="5443311" y="766171"/>
-                  </a:lnTo>
-                  <a:lnTo>
-                    <a:pt x="5514934" y="772519"/>
+                    <a:pt x="5371689" y="759750"/>
+                  </a:lnTo>
+                  <a:lnTo>
+                    <a:pt x="5443311" y="766170"/>
+                  </a:lnTo>
+                  <a:lnTo>
+                    <a:pt x="5514934" y="772518"/>
                   </a:lnTo>
                   <a:lnTo>
                     <a:pt x="5586557" y="778796"/>
                   </a:lnTo>
                   <a:lnTo>
-                    <a:pt x="5658179" y="785004"/>
-                  </a:lnTo>
-                  <a:lnTo>
-                    <a:pt x="5729802" y="791142"/>
-                  </a:lnTo>
-                  <a:lnTo>
-                    <a:pt x="5801424" y="797211"/>
-                  </a:lnTo>
-                  <a:lnTo>
-                    <a:pt x="5873047" y="803213"/>
-                  </a:lnTo>
-                  <a:lnTo>
-                    <a:pt x="5944669" y="809148"/>
-                  </a:lnTo>
-                  <a:lnTo>
-                    <a:pt x="6016292" y="815016"/>
-                  </a:lnTo>
-                  <a:lnTo>
-                    <a:pt x="6087914" y="820819"/>
-                  </a:lnTo>
-                  <a:lnTo>
-                    <a:pt x="6159537" y="826557"/>
-                  </a:lnTo>
-                  <a:lnTo>
-                    <a:pt x="6231159" y="832231"/>
+                    <a:pt x="5658179" y="785003"/>
+                  </a:lnTo>
+                  <a:lnTo>
+                    <a:pt x="5729802" y="791141"/>
+                  </a:lnTo>
+                  <a:lnTo>
+                    <a:pt x="5801424" y="797210"/>
+                  </a:lnTo>
+                  <a:lnTo>
+                    <a:pt x="5873047" y="803212"/>
+                  </a:lnTo>
+                  <a:lnTo>
+                    <a:pt x="5944669" y="809147"/>
+                  </a:lnTo>
+                  <a:lnTo>
+                    <a:pt x="6016292" y="815015"/>
+                  </a:lnTo>
+                  <a:lnTo>
+                    <a:pt x="6087914" y="820818"/>
+                  </a:lnTo>
+                  <a:lnTo>
+                    <a:pt x="6159537" y="826556"/>
+                  </a:lnTo>
+                  <a:lnTo>
+                    <a:pt x="6231159" y="832230"/>
                   </a:lnTo>
                   <a:lnTo>
                     <a:pt x="6302782" y="837841"/>
@@ -4607,31 +4607,31 @@
                     <a:pt x="6446027" y="848875"/>
                   </a:lnTo>
                   <a:lnTo>
-                    <a:pt x="6517649" y="854300"/>
+                    <a:pt x="6517649" y="854299"/>
                   </a:lnTo>
                   <a:lnTo>
                     <a:pt x="6589272" y="859664"/>
                   </a:lnTo>
                   <a:lnTo>
-                    <a:pt x="6660894" y="864969"/>
-                  </a:lnTo>
-                  <a:lnTo>
-                    <a:pt x="6732517" y="870214"/>
-                  </a:lnTo>
-                  <a:lnTo>
-                    <a:pt x="6804139" y="875400"/>
-                  </a:lnTo>
-                  <a:lnTo>
-                    <a:pt x="6875762" y="880529"/>
-                  </a:lnTo>
-                  <a:lnTo>
-                    <a:pt x="6947385" y="885600"/>
-                  </a:lnTo>
-                  <a:lnTo>
-                    <a:pt x="7019007" y="890615"/>
-                  </a:lnTo>
-                  <a:lnTo>
-                    <a:pt x="7090630" y="895574"/>
+                    <a:pt x="6660894" y="864968"/>
+                  </a:lnTo>
+                  <a:lnTo>
+                    <a:pt x="6732517" y="870213"/>
+                  </a:lnTo>
+                  <a:lnTo>
+                    <a:pt x="6804139" y="875399"/>
+                  </a:lnTo>
+                  <a:lnTo>
+                    <a:pt x="6875762" y="880528"/>
+                  </a:lnTo>
+                  <a:lnTo>
+                    <a:pt x="6947385" y="885599"/>
+                  </a:lnTo>
+                  <a:lnTo>
+                    <a:pt x="7019007" y="890614"/>
+                  </a:lnTo>
+                  <a:lnTo>
+                    <a:pt x="7090630" y="895573"/>
                   </a:lnTo>
                 </a:path>
               </a:pathLst>
@@ -5062,8 +5062,8 @@
           </p:nvSpPr>
           <p:spPr>
             <a:xfrm>
-              <a:off x="1980137" y="5785772"/>
-              <a:ext cx="155356" cy="80101"/>
+              <a:off x="1977028" y="5785772"/>
+              <a:ext cx="161574" cy="80101"/>
             </a:xfrm>
             <a:prstGeom prst="rect">
               <a:avLst/>
@@ -5095,7 +5095,7 @@
                   <a:latin typeface="Helvetica"/>
                   <a:cs typeface="Helvetica"/>
                 </a:rPr>
-                <a:t>0.6</a:t>
+                <a:t>-40</a:t>
               </a:r>
             </a:p>
           </p:txBody>
@@ -5108,8 +5108,8 @@
           </p:nvSpPr>
           <p:spPr>
             <a:xfrm>
-              <a:off x="3731922" y="5785772"/>
-              <a:ext cx="155356" cy="80101"/>
+              <a:off x="3728813" y="5785772"/>
+              <a:ext cx="161574" cy="80101"/>
             </a:xfrm>
             <a:prstGeom prst="rect">
               <a:avLst/>
@@ -5141,7 +5141,7 @@
                   <a:latin typeface="Helvetica"/>
                   <a:cs typeface="Helvetica"/>
                 </a:rPr>
-                <a:t>0.8</a:t>
+                <a:t>-20</a:t>
               </a:r>
             </a:p>
           </p:txBody>
@@ -5154,8 +5154,8 @@
           </p:nvSpPr>
           <p:spPr>
             <a:xfrm>
-              <a:off x="5483707" y="5785772"/>
-              <a:ext cx="155356" cy="80101"/>
+              <a:off x="5530296" y="5785772"/>
+              <a:ext cx="62179" cy="80101"/>
             </a:xfrm>
             <a:prstGeom prst="rect">
               <a:avLst/>
@@ -5187,7 +5187,7 @@
                   <a:latin typeface="Helvetica"/>
                   <a:cs typeface="Helvetica"/>
                 </a:rPr>
-                <a:t>1.0</a:t>
+                <a:t>0</a:t>
               </a:r>
             </a:p>
           </p:txBody>
@@ -5200,8 +5200,8 @@
           </p:nvSpPr>
           <p:spPr>
             <a:xfrm>
-              <a:off x="7235493" y="5785772"/>
-              <a:ext cx="155356" cy="80101"/>
+              <a:off x="7250992" y="5785772"/>
+              <a:ext cx="124358" cy="80101"/>
             </a:xfrm>
             <a:prstGeom prst="rect">
               <a:avLst/>
@@ -5233,7 +5233,7 @@
                   <a:latin typeface="Helvetica"/>
                   <a:cs typeface="Helvetica"/>
                 </a:rPr>
-                <a:t>1.2</a:t>
+                <a:t>20</a:t>
               </a:r>
             </a:p>
           </p:txBody>
@@ -5246,8 +5246,8 @@
           </p:nvSpPr>
           <p:spPr>
             <a:xfrm>
-              <a:off x="2691419" y="5925448"/>
-              <a:ext cx="4051889" cy="100218"/>
+              <a:off x="1561815" y="5925448"/>
+              <a:ext cx="6311097" cy="100218"/>
             </a:xfrm>
             <a:prstGeom prst="rect">
               <a:avLst/>
@@ -5279,7 +5279,7 @@
                   <a:latin typeface="Helvetica"/>
                   <a:cs typeface="Helvetica"/>
                 </a:rPr>
-                <a:t>Sensitivity eGFR Ratio (CKD-EPI 2012 CysC / CKD-EPI 2021 Cr)</a:t>
+                <a:t>Sensitivity eGFR Difference (%): 100 × (CKD-EPI 2012 CysC − CKD-EPI 2021 Cr) / CKD-EPI 2021 Cr</a:t>
               </a:r>
             </a:p>
           </p:txBody>
@@ -5339,7 +5339,7 @@
           <p:spPr>
             <a:xfrm>
               <a:off x="817517" y="1896563"/>
-              <a:ext cx="6899879" cy="82021"/>
+              <a:ext cx="7026615" cy="82021"/>
             </a:xfrm>
             <a:prstGeom prst="rect">
               <a:avLst/>
@@ -5371,7 +5371,7 @@
                   <a:latin typeface="Helvetica"/>
                   <a:cs typeface="Helvetica"/>
                 </a:rPr>
-                <a:t>subHR per 0.1 ratio decline: 1.15 (1.09-1.21), p_Bonf = &lt;0.001 (n = 6)  |  per IQR decline (Δ = 0.27): 1.46 (1.26-1.68)  |  IQR: [0.71, 0.98]</a:t>
+                <a:t>subHR per 10 % decline: 1.15 (1.09-1.21), p_Bonf = &lt;0.001 (n = 6)  |  per IQR decline (Δ = 27.5 %): 1.46 (1.26-1.68)  |  IQR: [-29.1, -1.6] %</a:t>
               </a:r>
             </a:p>
           </p:txBody>

--- a/docs/pptx/whole/jx-linsubhr-sens-grade2.pptx
+++ b/docs/pptx/whole/jx-linsubhr-sens-grade2.pptx
@@ -2265,34 +2265,26 @@
         </p:sp>
         <p:sp>
           <p:nvSpPr>
-            <p:cNvPr id="4" name="pl4"/>
+            <p:cNvPr id="4" name="rc4"/>
             <p:cNvSpPr/>
             <p:nvPr/>
           </p:nvSpPr>
           <p:spPr>
             <a:xfrm>
-              <a:off x="817517" y="5142518"/>
-              <a:ext cx="7799693" cy="0"/>
+              <a:off x="457200" y="1600200"/>
+              <a:ext cx="8229600" cy="4525962"/>
             </a:xfrm>
-            <a:custGeom>
+            <a:prstGeom prst="rect">
               <a:avLst/>
-              <a:pathLst>
-                <a:path w="7799693" h="0">
-                  <a:moveTo>
-                    <a:pt x="0" y="0"/>
-                  </a:moveTo>
-                  <a:lnTo>
-                    <a:pt x="7799693" y="0"/>
-                  </a:lnTo>
-                  <a:lnTo>
-                    <a:pt x="7799693" y="0"/>
-                  </a:lnTo>
-                </a:path>
-              </a:pathLst>
-            </a:custGeom>
-            <a:ln w="6775" cap="flat">
+            </a:prstGeom>
+            <a:solidFill>
+              <a:srgbClr val="FFFFFF">
+                <a:alpha val="100000"/>
+              </a:srgbClr>
+            </a:solidFill>
+            <a:ln w="13550" cap="rnd">
               <a:solidFill>
-                <a:srgbClr val="EBEBEB">
+                <a:srgbClr val="FFFFFF">
                   <a:alpha val="100000"/>
                 </a:srgbClr>
               </a:solidFill>
@@ -2314,21 +2306,21 @@
           </p:nvSpPr>
           <p:spPr>
             <a:xfrm>
-              <a:off x="817517" y="4313054"/>
-              <a:ext cx="7799693" cy="0"/>
+              <a:off x="887106" y="3250627"/>
+              <a:ext cx="7660515" cy="0"/>
             </a:xfrm>
             <a:custGeom>
               <a:avLst/>
               <a:pathLst>
-                <a:path w="7799693" h="0">
+                <a:path w="7660515" h="0">
                   <a:moveTo>
                     <a:pt x="0" y="0"/>
                   </a:moveTo>
                   <a:lnTo>
-                    <a:pt x="7799693" y="0"/>
-                  </a:lnTo>
-                  <a:lnTo>
-                    <a:pt x="7799693" y="0"/>
+                    <a:pt x="7660515" y="0"/>
+                  </a:lnTo>
+                  <a:lnTo>
+                    <a:pt x="7660515" y="0"/>
                   </a:lnTo>
                 </a:path>
               </a:pathLst>
@@ -2357,21 +2349,21 @@
           </p:nvSpPr>
           <p:spPr>
             <a:xfrm>
-              <a:off x="817517" y="3483591"/>
-              <a:ext cx="7799693" cy="0"/>
+              <a:off x="887106" y="2951293"/>
+              <a:ext cx="7660515" cy="0"/>
             </a:xfrm>
             <a:custGeom>
               <a:avLst/>
               <a:pathLst>
-                <a:path w="7799693" h="0">
+                <a:path w="7660515" h="0">
                   <a:moveTo>
                     <a:pt x="0" y="0"/>
                   </a:moveTo>
                   <a:lnTo>
-                    <a:pt x="7799693" y="0"/>
-                  </a:lnTo>
-                  <a:lnTo>
-                    <a:pt x="7799693" y="0"/>
+                    <a:pt x="7660515" y="0"/>
+                  </a:lnTo>
+                  <a:lnTo>
+                    <a:pt x="7660515" y="0"/>
                   </a:lnTo>
                 </a:path>
               </a:pathLst>
@@ -2400,21 +2392,21 @@
           </p:nvSpPr>
           <p:spPr>
             <a:xfrm>
-              <a:off x="817517" y="2654127"/>
-              <a:ext cx="7799693" cy="0"/>
+              <a:off x="887106" y="2651959"/>
+              <a:ext cx="7660515" cy="0"/>
             </a:xfrm>
             <a:custGeom>
               <a:avLst/>
               <a:pathLst>
-                <a:path w="7799693" h="0">
+                <a:path w="7660515" h="0">
                   <a:moveTo>
                     <a:pt x="0" y="0"/>
                   </a:moveTo>
                   <a:lnTo>
-                    <a:pt x="7799693" y="0"/>
-                  </a:lnTo>
-                  <a:lnTo>
-                    <a:pt x="7799693" y="0"/>
+                    <a:pt x="7660515" y="0"/>
+                  </a:lnTo>
+                  <a:lnTo>
+                    <a:pt x="7660515" y="0"/>
                   </a:lnTo>
                 </a:path>
               </a:pathLst>
@@ -2443,21 +2435,21 @@
           </p:nvSpPr>
           <p:spPr>
             <a:xfrm>
-              <a:off x="1181923" y="2073503"/>
-              <a:ext cx="0" cy="3649639"/>
+              <a:off x="887106" y="2352625"/>
+              <a:ext cx="7660515" cy="0"/>
             </a:xfrm>
             <a:custGeom>
               <a:avLst/>
               <a:pathLst>
-                <a:path w="0" h="3649639">
+                <a:path w="7660515" h="0">
                   <a:moveTo>
-                    <a:pt x="0" y="3649639"/>
+                    <a:pt x="0" y="0"/>
                   </a:moveTo>
                   <a:lnTo>
-                    <a:pt x="0" y="0"/>
-                  </a:lnTo>
-                  <a:lnTo>
-                    <a:pt x="0" y="0"/>
+                    <a:pt x="7660515" y="0"/>
+                  </a:lnTo>
+                  <a:lnTo>
+                    <a:pt x="7660515" y="0"/>
                   </a:lnTo>
                 </a:path>
               </a:pathLst>
@@ -2486,15 +2478,15 @@
           </p:nvSpPr>
           <p:spPr>
             <a:xfrm>
-              <a:off x="2933708" y="2073503"/>
-              <a:ext cx="0" cy="3649639"/>
+              <a:off x="1245010" y="2143092"/>
+              <a:ext cx="0" cy="1317069"/>
             </a:xfrm>
             <a:custGeom>
               <a:avLst/>
               <a:pathLst>
-                <a:path w="0" h="3649639">
+                <a:path w="0" h="1317069">
                   <a:moveTo>
-                    <a:pt x="0" y="3649639"/>
+                    <a:pt x="0" y="1317069"/>
                   </a:moveTo>
                   <a:lnTo>
                     <a:pt x="0" y="0"/>
@@ -2529,15 +2521,15 @@
           </p:nvSpPr>
           <p:spPr>
             <a:xfrm>
-              <a:off x="4685493" y="2073503"/>
-              <a:ext cx="0" cy="3649639"/>
+              <a:off x="2965536" y="2143092"/>
+              <a:ext cx="0" cy="1317069"/>
             </a:xfrm>
             <a:custGeom>
               <a:avLst/>
               <a:pathLst>
-                <a:path w="0" h="3649639">
+                <a:path w="0" h="1317069">
                   <a:moveTo>
-                    <a:pt x="0" y="3649639"/>
+                    <a:pt x="0" y="1317069"/>
                   </a:moveTo>
                   <a:lnTo>
                     <a:pt x="0" y="0"/>
@@ -2572,15 +2564,15 @@
           </p:nvSpPr>
           <p:spPr>
             <a:xfrm>
-              <a:off x="6437278" y="2073503"/>
-              <a:ext cx="0" cy="3649639"/>
+              <a:off x="4686062" y="2143092"/>
+              <a:ext cx="0" cy="1317069"/>
             </a:xfrm>
             <a:custGeom>
               <a:avLst/>
               <a:pathLst>
-                <a:path w="0" h="3649639">
+                <a:path w="0" h="1317069">
                   <a:moveTo>
-                    <a:pt x="0" y="3649639"/>
+                    <a:pt x="0" y="1317069"/>
                   </a:moveTo>
                   <a:lnTo>
                     <a:pt x="0" y="0"/>
@@ -2615,15 +2607,15 @@
           </p:nvSpPr>
           <p:spPr>
             <a:xfrm>
-              <a:off x="8189063" y="2073503"/>
-              <a:ext cx="0" cy="3649639"/>
+              <a:off x="6406588" y="2143092"/>
+              <a:ext cx="0" cy="1317069"/>
             </a:xfrm>
             <a:custGeom>
               <a:avLst/>
               <a:pathLst>
-                <a:path w="0" h="3649639">
+                <a:path w="0" h="1317069">
                   <a:moveTo>
-                    <a:pt x="0" y="3649639"/>
+                    <a:pt x="0" y="1317069"/>
                   </a:moveTo>
                   <a:lnTo>
                     <a:pt x="0" y="0"/>
@@ -2658,26 +2650,26 @@
           </p:nvSpPr>
           <p:spPr>
             <a:xfrm>
-              <a:off x="817517" y="5557249"/>
-              <a:ext cx="7799693" cy="0"/>
+              <a:off x="8127114" y="2143092"/>
+              <a:ext cx="0" cy="1317069"/>
             </a:xfrm>
             <a:custGeom>
               <a:avLst/>
               <a:pathLst>
-                <a:path w="7799693" h="0">
+                <a:path w="0" h="1317069">
                   <a:moveTo>
+                    <a:pt x="0" y="1317069"/>
+                  </a:moveTo>
+                  <a:lnTo>
                     <a:pt x="0" y="0"/>
-                  </a:moveTo>
-                  <a:lnTo>
-                    <a:pt x="7799693" y="0"/>
-                  </a:lnTo>
-                  <a:lnTo>
-                    <a:pt x="7799693" y="0"/>
+                  </a:lnTo>
+                  <a:lnTo>
+                    <a:pt x="0" y="0"/>
                   </a:lnTo>
                 </a:path>
               </a:pathLst>
             </a:custGeom>
-            <a:ln w="13550" cap="flat">
+            <a:ln w="6775" cap="flat">
               <a:solidFill>
                 <a:srgbClr val="EBEBEB">
                   <a:alpha val="100000"/>
@@ -2701,21 +2693,21 @@
           </p:nvSpPr>
           <p:spPr>
             <a:xfrm>
-              <a:off x="817517" y="4727786"/>
-              <a:ext cx="7799693" cy="0"/>
+              <a:off x="887106" y="3400294"/>
+              <a:ext cx="7660515" cy="0"/>
             </a:xfrm>
             <a:custGeom>
               <a:avLst/>
               <a:pathLst>
-                <a:path w="7799693" h="0">
+                <a:path w="7660515" h="0">
                   <a:moveTo>
                     <a:pt x="0" y="0"/>
                   </a:moveTo>
                   <a:lnTo>
-                    <a:pt x="7799693" y="0"/>
-                  </a:lnTo>
-                  <a:lnTo>
-                    <a:pt x="7799693" y="0"/>
+                    <a:pt x="7660515" y="0"/>
+                  </a:lnTo>
+                  <a:lnTo>
+                    <a:pt x="7660515" y="0"/>
                   </a:lnTo>
                 </a:path>
               </a:pathLst>
@@ -2744,21 +2736,21 @@
           </p:nvSpPr>
           <p:spPr>
             <a:xfrm>
-              <a:off x="817517" y="3898322"/>
-              <a:ext cx="7799693" cy="0"/>
+              <a:off x="887106" y="3100960"/>
+              <a:ext cx="7660515" cy="0"/>
             </a:xfrm>
             <a:custGeom>
               <a:avLst/>
               <a:pathLst>
-                <a:path w="7799693" h="0">
+                <a:path w="7660515" h="0">
                   <a:moveTo>
                     <a:pt x="0" y="0"/>
                   </a:moveTo>
                   <a:lnTo>
-                    <a:pt x="7799693" y="0"/>
-                  </a:lnTo>
-                  <a:lnTo>
-                    <a:pt x="7799693" y="0"/>
+                    <a:pt x="7660515" y="0"/>
+                  </a:lnTo>
+                  <a:lnTo>
+                    <a:pt x="7660515" y="0"/>
                   </a:lnTo>
                 </a:path>
               </a:pathLst>
@@ -2787,21 +2779,21 @@
           </p:nvSpPr>
           <p:spPr>
             <a:xfrm>
-              <a:off x="817517" y="3068859"/>
-              <a:ext cx="7799693" cy="0"/>
+              <a:off x="887106" y="2801626"/>
+              <a:ext cx="7660515" cy="0"/>
             </a:xfrm>
             <a:custGeom>
               <a:avLst/>
               <a:pathLst>
-                <a:path w="7799693" h="0">
+                <a:path w="7660515" h="0">
                   <a:moveTo>
                     <a:pt x="0" y="0"/>
                   </a:moveTo>
                   <a:lnTo>
-                    <a:pt x="7799693" y="0"/>
-                  </a:lnTo>
-                  <a:lnTo>
-                    <a:pt x="7799693" y="0"/>
+                    <a:pt x="7660515" y="0"/>
+                  </a:lnTo>
+                  <a:lnTo>
+                    <a:pt x="7660515" y="0"/>
                   </a:lnTo>
                 </a:path>
               </a:pathLst>
@@ -2830,21 +2822,21 @@
           </p:nvSpPr>
           <p:spPr>
             <a:xfrm>
-              <a:off x="817517" y="2239395"/>
-              <a:ext cx="7799693" cy="0"/>
+              <a:off x="887106" y="2502292"/>
+              <a:ext cx="7660515" cy="0"/>
             </a:xfrm>
             <a:custGeom>
               <a:avLst/>
               <a:pathLst>
-                <a:path w="7799693" h="0">
+                <a:path w="7660515" h="0">
                   <a:moveTo>
                     <a:pt x="0" y="0"/>
                   </a:moveTo>
                   <a:lnTo>
-                    <a:pt x="7799693" y="0"/>
-                  </a:lnTo>
-                  <a:lnTo>
-                    <a:pt x="7799693" y="0"/>
+                    <a:pt x="7660515" y="0"/>
+                  </a:lnTo>
+                  <a:lnTo>
+                    <a:pt x="7660515" y="0"/>
                   </a:lnTo>
                 </a:path>
               </a:pathLst>
@@ -2873,21 +2865,21 @@
           </p:nvSpPr>
           <p:spPr>
             <a:xfrm>
-              <a:off x="2057816" y="2073503"/>
-              <a:ext cx="0" cy="3649639"/>
+              <a:off x="887106" y="2202958"/>
+              <a:ext cx="7660515" cy="0"/>
             </a:xfrm>
             <a:custGeom>
               <a:avLst/>
               <a:pathLst>
-                <a:path w="0" h="3649639">
+                <a:path w="7660515" h="0">
                   <a:moveTo>
-                    <a:pt x="0" y="3649639"/>
+                    <a:pt x="0" y="0"/>
                   </a:moveTo>
                   <a:lnTo>
-                    <a:pt x="0" y="0"/>
-                  </a:lnTo>
-                  <a:lnTo>
-                    <a:pt x="0" y="0"/>
+                    <a:pt x="7660515" y="0"/>
+                  </a:lnTo>
+                  <a:lnTo>
+                    <a:pt x="7660515" y="0"/>
                   </a:lnTo>
                 </a:path>
               </a:pathLst>
@@ -2916,15 +2908,15 @@
           </p:nvSpPr>
           <p:spPr>
             <a:xfrm>
-              <a:off x="3809601" y="2073503"/>
-              <a:ext cx="0" cy="3649639"/>
+              <a:off x="2105273" y="2143092"/>
+              <a:ext cx="0" cy="1317069"/>
             </a:xfrm>
             <a:custGeom>
               <a:avLst/>
               <a:pathLst>
-                <a:path w="0" h="3649639">
+                <a:path w="0" h="1317069">
                   <a:moveTo>
-                    <a:pt x="0" y="3649639"/>
+                    <a:pt x="0" y="1317069"/>
                   </a:moveTo>
                   <a:lnTo>
                     <a:pt x="0" y="0"/>
@@ -2959,15 +2951,15 @@
           </p:nvSpPr>
           <p:spPr>
             <a:xfrm>
-              <a:off x="5561386" y="2073503"/>
-              <a:ext cx="0" cy="3649639"/>
+              <a:off x="3825799" y="2143092"/>
+              <a:ext cx="0" cy="1317069"/>
             </a:xfrm>
             <a:custGeom>
               <a:avLst/>
               <a:pathLst>
-                <a:path w="0" h="3649639">
+                <a:path w="0" h="1317069">
                   <a:moveTo>
-                    <a:pt x="0" y="3649639"/>
+                    <a:pt x="0" y="1317069"/>
                   </a:moveTo>
                   <a:lnTo>
                     <a:pt x="0" y="0"/>
@@ -3002,15 +2994,15 @@
           </p:nvSpPr>
           <p:spPr>
             <a:xfrm>
-              <a:off x="7313171" y="2073503"/>
-              <a:ext cx="0" cy="3649639"/>
+              <a:off x="5546325" y="2143092"/>
+              <a:ext cx="0" cy="1317069"/>
             </a:xfrm>
             <a:custGeom>
               <a:avLst/>
               <a:pathLst>
-                <a:path w="0" h="3649639">
+                <a:path w="0" h="1317069">
                   <a:moveTo>
-                    <a:pt x="0" y="3649639"/>
+                    <a:pt x="0" y="1317069"/>
                   </a:moveTo>
                   <a:lnTo>
                     <a:pt x="0" y="0"/>
@@ -3039,618 +3031,661 @@
         </p:sp>
         <p:sp>
           <p:nvSpPr>
-            <p:cNvPr id="22" name="pg22"/>
+            <p:cNvPr id="22" name="pl22"/>
             <p:cNvSpPr/>
             <p:nvPr/>
           </p:nvSpPr>
           <p:spPr>
             <a:xfrm>
-              <a:off x="1172049" y="3959602"/>
-              <a:ext cx="7090630" cy="1252390"/>
+              <a:off x="7266851" y="2143092"/>
+              <a:ext cx="0" cy="1317069"/>
             </a:xfrm>
             <a:custGeom>
               <a:avLst/>
               <a:pathLst>
-                <a:path w="7090630" h="1252390">
+                <a:path w="0" h="1317069">
+                  <a:moveTo>
+                    <a:pt x="0" y="1317069"/>
+                  </a:moveTo>
+                  <a:lnTo>
+                    <a:pt x="0" y="0"/>
+                  </a:lnTo>
+                  <a:lnTo>
+                    <a:pt x="0" y="0"/>
+                  </a:lnTo>
+                </a:path>
+              </a:pathLst>
+            </a:custGeom>
+            <a:ln w="13550" cap="flat">
+              <a:solidFill>
+                <a:srgbClr val="EBEBEB">
+                  <a:alpha val="100000"/>
+                </a:srgbClr>
+              </a:solidFill>
+              <a:prstDash val="solid"/>
+              <a:round/>
+            </a:ln>
+          </p:spPr>
+          <p:txBody>
+            <a:bodyPr/>
+            <a:lstStyle/>
+            <a:p/>
+          </p:txBody>
+        </p:sp>
+        <p:sp>
+          <p:nvSpPr>
+            <p:cNvPr id="23" name="pg23"/>
+            <p:cNvSpPr/>
+            <p:nvPr/>
+          </p:nvSpPr>
+          <p:spPr>
+            <a:xfrm>
+              <a:off x="1235312" y="2823740"/>
+              <a:ext cx="6964104" cy="451958"/>
+            </a:xfrm>
+            <a:custGeom>
+              <a:avLst/>
+              <a:pathLst>
+                <a:path w="6964104" h="451958">
                   <a:moveTo>
                     <a:pt x="0" y="0"/>
                   </a:moveTo>
                   <a:lnTo>
-                    <a:pt x="71622" y="24532"/>
-                  </a:lnTo>
-                  <a:lnTo>
-                    <a:pt x="143245" y="48688"/>
-                  </a:lnTo>
-                  <a:lnTo>
-                    <a:pt x="214867" y="72474"/>
-                  </a:lnTo>
-                  <a:lnTo>
-                    <a:pt x="286490" y="95894"/>
-                  </a:lnTo>
-                  <a:lnTo>
-                    <a:pt x="358112" y="118954"/>
-                  </a:lnTo>
-                  <a:lnTo>
-                    <a:pt x="429735" y="141660"/>
-                  </a:lnTo>
-                  <a:lnTo>
-                    <a:pt x="501357" y="164018"/>
-                  </a:lnTo>
-                  <a:lnTo>
-                    <a:pt x="572980" y="186032"/>
-                  </a:lnTo>
-                  <a:lnTo>
-                    <a:pt x="644602" y="207708"/>
-                  </a:lnTo>
-                  <a:lnTo>
-                    <a:pt x="716225" y="229052"/>
-                  </a:lnTo>
-                  <a:lnTo>
-                    <a:pt x="787847" y="250067"/>
-                  </a:lnTo>
-                  <a:lnTo>
-                    <a:pt x="859470" y="270760"/>
-                  </a:lnTo>
-                  <a:lnTo>
-                    <a:pt x="931092" y="291135"/>
-                  </a:lnTo>
-                  <a:lnTo>
-                    <a:pt x="1002715" y="311198"/>
-                  </a:lnTo>
-                  <a:lnTo>
-                    <a:pt x="1074337" y="330952"/>
-                  </a:lnTo>
-                  <a:lnTo>
-                    <a:pt x="1145960" y="350403"/>
-                  </a:lnTo>
-                  <a:lnTo>
-                    <a:pt x="1217582" y="369555"/>
-                  </a:lnTo>
-                  <a:lnTo>
-                    <a:pt x="1289205" y="388413"/>
-                  </a:lnTo>
-                  <a:lnTo>
-                    <a:pt x="1360827" y="406982"/>
-                  </a:lnTo>
-                  <a:lnTo>
-                    <a:pt x="1432450" y="425265"/>
-                  </a:lnTo>
-                  <a:lnTo>
-                    <a:pt x="1504073" y="443268"/>
-                  </a:lnTo>
-                  <a:lnTo>
-                    <a:pt x="1575695" y="460994"/>
-                  </a:lnTo>
-                  <a:lnTo>
-                    <a:pt x="1647318" y="478448"/>
-                  </a:lnTo>
-                  <a:lnTo>
-                    <a:pt x="1718940" y="495634"/>
-                  </a:lnTo>
-                  <a:lnTo>
-                    <a:pt x="1790563" y="512556"/>
-                  </a:lnTo>
-                  <a:lnTo>
-                    <a:pt x="1862185" y="529218"/>
-                  </a:lnTo>
-                  <a:lnTo>
-                    <a:pt x="1933808" y="545625"/>
-                  </a:lnTo>
-                  <a:lnTo>
-                    <a:pt x="2005430" y="561779"/>
-                  </a:lnTo>
-                  <a:lnTo>
-                    <a:pt x="2077053" y="577685"/>
-                  </a:lnTo>
-                  <a:lnTo>
-                    <a:pt x="2148675" y="593348"/>
-                  </a:lnTo>
-                  <a:lnTo>
-                    <a:pt x="2220298" y="608769"/>
-                  </a:lnTo>
-                  <a:lnTo>
-                    <a:pt x="2291920" y="623954"/>
-                  </a:lnTo>
-                  <a:lnTo>
-                    <a:pt x="2363543" y="638906"/>
-                  </a:lnTo>
-                  <a:lnTo>
-                    <a:pt x="2435165" y="653628"/>
-                  </a:lnTo>
-                  <a:lnTo>
-                    <a:pt x="2506788" y="668124"/>
-                  </a:lnTo>
-                  <a:lnTo>
-                    <a:pt x="2578410" y="682397"/>
-                  </a:lnTo>
-                  <a:lnTo>
-                    <a:pt x="2650033" y="696451"/>
-                  </a:lnTo>
-                  <a:lnTo>
-                    <a:pt x="2721655" y="710290"/>
-                  </a:lnTo>
-                  <a:lnTo>
-                    <a:pt x="2793278" y="723916"/>
-                  </a:lnTo>
-                  <a:lnTo>
-                    <a:pt x="2864901" y="737332"/>
-                  </a:lnTo>
-                  <a:lnTo>
-                    <a:pt x="2936523" y="750543"/>
-                  </a:lnTo>
-                  <a:lnTo>
-                    <a:pt x="3008146" y="763551"/>
-                  </a:lnTo>
-                  <a:lnTo>
-                    <a:pt x="3079768" y="771883"/>
-                  </a:lnTo>
-                  <a:lnTo>
-                    <a:pt x="3151391" y="777630"/>
-                  </a:lnTo>
-                  <a:lnTo>
-                    <a:pt x="3223013" y="783337"/>
-                  </a:lnTo>
-                  <a:lnTo>
-                    <a:pt x="3294636" y="789004"/>
-                  </a:lnTo>
-                  <a:lnTo>
-                    <a:pt x="3366258" y="794632"/>
-                  </a:lnTo>
-                  <a:lnTo>
-                    <a:pt x="3437881" y="800221"/>
-                  </a:lnTo>
-                  <a:lnTo>
-                    <a:pt x="3509503" y="805770"/>
-                  </a:lnTo>
-                  <a:lnTo>
-                    <a:pt x="3581126" y="811281"/>
-                  </a:lnTo>
-                  <a:lnTo>
-                    <a:pt x="3652748" y="816754"/>
-                  </a:lnTo>
-                  <a:lnTo>
-                    <a:pt x="3724371" y="822189"/>
-                  </a:lnTo>
-                  <a:lnTo>
-                    <a:pt x="3795993" y="827585"/>
-                  </a:lnTo>
-                  <a:lnTo>
-                    <a:pt x="3867616" y="832945"/>
-                  </a:lnTo>
-                  <a:lnTo>
-                    <a:pt x="3939238" y="838266"/>
-                  </a:lnTo>
-                  <a:lnTo>
-                    <a:pt x="4010861" y="843551"/>
-                  </a:lnTo>
-                  <a:lnTo>
-                    <a:pt x="4082483" y="848799"/>
-                  </a:lnTo>
-                  <a:lnTo>
-                    <a:pt x="4154106" y="854011"/>
-                  </a:lnTo>
-                  <a:lnTo>
-                    <a:pt x="4225729" y="859186"/>
-                  </a:lnTo>
-                  <a:lnTo>
-                    <a:pt x="4297351" y="864326"/>
-                  </a:lnTo>
-                  <a:lnTo>
-                    <a:pt x="4368974" y="869429"/>
-                  </a:lnTo>
-                  <a:lnTo>
-                    <a:pt x="4440596" y="874497"/>
-                  </a:lnTo>
-                  <a:lnTo>
-                    <a:pt x="4512219" y="879530"/>
-                  </a:lnTo>
-                  <a:lnTo>
-                    <a:pt x="4583841" y="884528"/>
-                  </a:lnTo>
-                  <a:lnTo>
-                    <a:pt x="4655464" y="889491"/>
-                  </a:lnTo>
-                  <a:lnTo>
-                    <a:pt x="4727086" y="894419"/>
-                  </a:lnTo>
-                  <a:lnTo>
-                    <a:pt x="4798709" y="899313"/>
-                  </a:lnTo>
-                  <a:lnTo>
-                    <a:pt x="4870331" y="904173"/>
-                  </a:lnTo>
-                  <a:lnTo>
-                    <a:pt x="4941954" y="908999"/>
-                  </a:lnTo>
-                  <a:lnTo>
-                    <a:pt x="5013576" y="913792"/>
-                  </a:lnTo>
-                  <a:lnTo>
-                    <a:pt x="5085199" y="918551"/>
-                  </a:lnTo>
-                  <a:lnTo>
-                    <a:pt x="5156821" y="923277"/>
-                  </a:lnTo>
-                  <a:lnTo>
-                    <a:pt x="5228444" y="927971"/>
-                  </a:lnTo>
-                  <a:lnTo>
-                    <a:pt x="5300066" y="932631"/>
-                  </a:lnTo>
-                  <a:lnTo>
-                    <a:pt x="5371689" y="937259"/>
-                  </a:lnTo>
-                  <a:lnTo>
-                    <a:pt x="5443311" y="941855"/>
-                  </a:lnTo>
-                  <a:lnTo>
-                    <a:pt x="5514934" y="946419"/>
-                  </a:lnTo>
-                  <a:lnTo>
-                    <a:pt x="5586557" y="950952"/>
-                  </a:lnTo>
-                  <a:lnTo>
-                    <a:pt x="5658179" y="955452"/>
-                  </a:lnTo>
-                  <a:lnTo>
-                    <a:pt x="5729802" y="959922"/>
-                  </a:lnTo>
-                  <a:lnTo>
-                    <a:pt x="5801424" y="964360"/>
-                  </a:lnTo>
-                  <a:lnTo>
-                    <a:pt x="5873047" y="968767"/>
-                  </a:lnTo>
-                  <a:lnTo>
-                    <a:pt x="5944669" y="973144"/>
-                  </a:lnTo>
-                  <a:lnTo>
-                    <a:pt x="6016292" y="977490"/>
-                  </a:lnTo>
-                  <a:lnTo>
-                    <a:pt x="6087914" y="981806"/>
-                  </a:lnTo>
-                  <a:lnTo>
-                    <a:pt x="6159537" y="986092"/>
-                  </a:lnTo>
-                  <a:lnTo>
-                    <a:pt x="6231159" y="990348"/>
-                  </a:lnTo>
-                  <a:lnTo>
-                    <a:pt x="6302782" y="994575"/>
-                  </a:lnTo>
-                  <a:lnTo>
-                    <a:pt x="6374404" y="998772"/>
-                  </a:lnTo>
-                  <a:lnTo>
-                    <a:pt x="6446027" y="1002939"/>
-                  </a:lnTo>
-                  <a:lnTo>
-                    <a:pt x="6517649" y="1007078"/>
-                  </a:lnTo>
-                  <a:lnTo>
-                    <a:pt x="6589272" y="1011188"/>
-                  </a:lnTo>
-                  <a:lnTo>
-                    <a:pt x="6660894" y="1015270"/>
-                  </a:lnTo>
-                  <a:lnTo>
-                    <a:pt x="6732517" y="1019323"/>
-                  </a:lnTo>
-                  <a:lnTo>
-                    <a:pt x="6804139" y="1023348"/>
-                  </a:lnTo>
-                  <a:lnTo>
-                    <a:pt x="6875762" y="1027345"/>
-                  </a:lnTo>
-                  <a:lnTo>
-                    <a:pt x="6947385" y="1031314"/>
-                  </a:lnTo>
-                  <a:lnTo>
-                    <a:pt x="7019007" y="1035255"/>
-                  </a:lnTo>
-                  <a:lnTo>
-                    <a:pt x="7090630" y="1039169"/>
-                  </a:lnTo>
-                  <a:lnTo>
-                    <a:pt x="7090630" y="1252390"/>
-                  </a:lnTo>
-                  <a:lnTo>
-                    <a:pt x="7019007" y="1247006"/>
-                  </a:lnTo>
-                  <a:lnTo>
-                    <a:pt x="6947385" y="1241538"/>
-                  </a:lnTo>
-                  <a:lnTo>
-                    <a:pt x="6875762" y="1235984"/>
-                  </a:lnTo>
-                  <a:lnTo>
-                    <a:pt x="6804139" y="1230344"/>
-                  </a:lnTo>
-                  <a:lnTo>
-                    <a:pt x="6732517" y="1224616"/>
-                  </a:lnTo>
-                  <a:lnTo>
-                    <a:pt x="6660894" y="1218798"/>
-                  </a:lnTo>
-                  <a:lnTo>
-                    <a:pt x="6589272" y="1212890"/>
-                  </a:lnTo>
-                  <a:lnTo>
-                    <a:pt x="6517649" y="1206890"/>
-                  </a:lnTo>
-                  <a:lnTo>
-                    <a:pt x="6446027" y="1200796"/>
-                  </a:lnTo>
-                  <a:lnTo>
-                    <a:pt x="6374404" y="1194607"/>
-                  </a:lnTo>
-                  <a:lnTo>
-                    <a:pt x="6302782" y="1188321"/>
-                  </a:lnTo>
-                  <a:lnTo>
-                    <a:pt x="6231159" y="1181938"/>
-                  </a:lnTo>
-                  <a:lnTo>
-                    <a:pt x="6159537" y="1175455"/>
-                  </a:lnTo>
-                  <a:lnTo>
-                    <a:pt x="6087914" y="1168871"/>
-                  </a:lnTo>
-                  <a:lnTo>
-                    <a:pt x="6016292" y="1162184"/>
-                  </a:lnTo>
-                  <a:lnTo>
-                    <a:pt x="5944669" y="1155393"/>
-                  </a:lnTo>
-                  <a:lnTo>
-                    <a:pt x="5873047" y="1148496"/>
-                  </a:lnTo>
-                  <a:lnTo>
-                    <a:pt x="5801424" y="1141491"/>
-                  </a:lnTo>
-                  <a:lnTo>
-                    <a:pt x="5729802" y="1134378"/>
-                  </a:lnTo>
-                  <a:lnTo>
-                    <a:pt x="5658179" y="1127153"/>
-                  </a:lnTo>
-                  <a:lnTo>
-                    <a:pt x="5586557" y="1119816"/>
-                  </a:lnTo>
-                  <a:lnTo>
-                    <a:pt x="5514934" y="1112364"/>
-                  </a:lnTo>
-                  <a:lnTo>
-                    <a:pt x="5443311" y="1104796"/>
-                  </a:lnTo>
-                  <a:lnTo>
-                    <a:pt x="5371689" y="1097110"/>
-                  </a:lnTo>
-                  <a:lnTo>
-                    <a:pt x="5300066" y="1089304"/>
-                  </a:lnTo>
-                  <a:lnTo>
-                    <a:pt x="5228444" y="1081376"/>
-                  </a:lnTo>
-                  <a:lnTo>
-                    <a:pt x="5156821" y="1073325"/>
-                  </a:lnTo>
-                  <a:lnTo>
-                    <a:pt x="5085199" y="1065148"/>
-                  </a:lnTo>
-                  <a:lnTo>
-                    <a:pt x="5013576" y="1056843"/>
-                  </a:lnTo>
-                  <a:lnTo>
-                    <a:pt x="4941954" y="1048410"/>
-                  </a:lnTo>
-                  <a:lnTo>
-                    <a:pt x="4870331" y="1039844"/>
-                  </a:lnTo>
-                  <a:lnTo>
-                    <a:pt x="4798709" y="1031145"/>
-                  </a:lnTo>
-                  <a:lnTo>
-                    <a:pt x="4727086" y="1022311"/>
-                  </a:lnTo>
-                  <a:lnTo>
-                    <a:pt x="4655464" y="1013338"/>
-                  </a:lnTo>
-                  <a:lnTo>
-                    <a:pt x="4583841" y="1004226"/>
-                  </a:lnTo>
-                  <a:lnTo>
-                    <a:pt x="4512219" y="994971"/>
-                  </a:lnTo>
-                  <a:lnTo>
-                    <a:pt x="4440596" y="985573"/>
-                  </a:lnTo>
-                  <a:lnTo>
-                    <a:pt x="4368974" y="976027"/>
-                  </a:lnTo>
-                  <a:lnTo>
-                    <a:pt x="4297351" y="966333"/>
-                  </a:lnTo>
-                  <a:lnTo>
-                    <a:pt x="4225729" y="956488"/>
-                  </a:lnTo>
-                  <a:lnTo>
-                    <a:pt x="4154106" y="946489"/>
-                  </a:lnTo>
-                  <a:lnTo>
-                    <a:pt x="4082483" y="936334"/>
-                  </a:lnTo>
-                  <a:lnTo>
-                    <a:pt x="4010861" y="926020"/>
-                  </a:lnTo>
-                  <a:lnTo>
-                    <a:pt x="3939238" y="915546"/>
-                  </a:lnTo>
-                  <a:lnTo>
-                    <a:pt x="3867616" y="904909"/>
-                  </a:lnTo>
-                  <a:lnTo>
-                    <a:pt x="3795993" y="894106"/>
-                  </a:lnTo>
-                  <a:lnTo>
-                    <a:pt x="3724371" y="883134"/>
-                  </a:lnTo>
-                  <a:lnTo>
-                    <a:pt x="3652748" y="871991"/>
-                  </a:lnTo>
-                  <a:lnTo>
-                    <a:pt x="3581126" y="860674"/>
-                  </a:lnTo>
-                  <a:lnTo>
-                    <a:pt x="3509503" y="849181"/>
-                  </a:lnTo>
-                  <a:lnTo>
-                    <a:pt x="3437881" y="837509"/>
-                  </a:lnTo>
-                  <a:lnTo>
-                    <a:pt x="3366258" y="825654"/>
-                  </a:lnTo>
-                  <a:lnTo>
-                    <a:pt x="3294636" y="813615"/>
-                  </a:lnTo>
-                  <a:lnTo>
-                    <a:pt x="3223013" y="801388"/>
-                  </a:lnTo>
-                  <a:lnTo>
-                    <a:pt x="3151391" y="788970"/>
-                  </a:lnTo>
-                  <a:lnTo>
-                    <a:pt x="3079768" y="776359"/>
-                  </a:lnTo>
-                  <a:lnTo>
-                    <a:pt x="3008146" y="766096"/>
-                  </a:lnTo>
-                  <a:lnTo>
-                    <a:pt x="2936523" y="760268"/>
-                  </a:lnTo>
-                  <a:lnTo>
-                    <a:pt x="2864901" y="754400"/>
-                  </a:lnTo>
-                  <a:lnTo>
-                    <a:pt x="2793278" y="748490"/>
-                  </a:lnTo>
-                  <a:lnTo>
-                    <a:pt x="2721655" y="742539"/>
-                  </a:lnTo>
-                  <a:lnTo>
-                    <a:pt x="2650033" y="736546"/>
-                  </a:lnTo>
-                  <a:lnTo>
-                    <a:pt x="2578410" y="730511"/>
-                  </a:lnTo>
-                  <a:lnTo>
-                    <a:pt x="2506788" y="724434"/>
-                  </a:lnTo>
-                  <a:lnTo>
-                    <a:pt x="2435165" y="718315"/>
-                  </a:lnTo>
-                  <a:lnTo>
-                    <a:pt x="2363543" y="712152"/>
-                  </a:lnTo>
-                  <a:lnTo>
-                    <a:pt x="2291920" y="705946"/>
-                  </a:lnTo>
-                  <a:lnTo>
-                    <a:pt x="2220298" y="699697"/>
-                  </a:lnTo>
-                  <a:lnTo>
-                    <a:pt x="2148675" y="693404"/>
-                  </a:lnTo>
-                  <a:lnTo>
-                    <a:pt x="2077053" y="687067"/>
-                  </a:lnTo>
-                  <a:lnTo>
-                    <a:pt x="2005430" y="680685"/>
-                  </a:lnTo>
-                  <a:lnTo>
-                    <a:pt x="1933808" y="674259"/>
-                  </a:lnTo>
-                  <a:lnTo>
-                    <a:pt x="1862185" y="667788"/>
-                  </a:lnTo>
-                  <a:lnTo>
-                    <a:pt x="1790563" y="661271"/>
-                  </a:lnTo>
-                  <a:lnTo>
-                    <a:pt x="1718940" y="654709"/>
-                  </a:lnTo>
-                  <a:lnTo>
-                    <a:pt x="1647318" y="648100"/>
-                  </a:lnTo>
-                  <a:lnTo>
-                    <a:pt x="1575695" y="641446"/>
-                  </a:lnTo>
-                  <a:lnTo>
-                    <a:pt x="1504073" y="634744"/>
-                  </a:lnTo>
-                  <a:lnTo>
-                    <a:pt x="1432450" y="627996"/>
-                  </a:lnTo>
-                  <a:lnTo>
-                    <a:pt x="1360827" y="621200"/>
-                  </a:lnTo>
-                  <a:lnTo>
-                    <a:pt x="1289205" y="614357"/>
-                  </a:lnTo>
-                  <a:lnTo>
-                    <a:pt x="1217582" y="607466"/>
-                  </a:lnTo>
-                  <a:lnTo>
-                    <a:pt x="1145960" y="600527"/>
-                  </a:lnTo>
-                  <a:lnTo>
-                    <a:pt x="1074337" y="593539"/>
-                  </a:lnTo>
-                  <a:lnTo>
-                    <a:pt x="1002715" y="586502"/>
-                  </a:lnTo>
-                  <a:lnTo>
-                    <a:pt x="931092" y="579415"/>
-                  </a:lnTo>
-                  <a:lnTo>
-                    <a:pt x="859470" y="572279"/>
-                  </a:lnTo>
-                  <a:lnTo>
-                    <a:pt x="787847" y="565093"/>
-                  </a:lnTo>
-                  <a:lnTo>
-                    <a:pt x="716225" y="557857"/>
-                  </a:lnTo>
-                  <a:lnTo>
-                    <a:pt x="644602" y="550570"/>
-                  </a:lnTo>
-                  <a:lnTo>
-                    <a:pt x="572980" y="543231"/>
-                  </a:lnTo>
-                  <a:lnTo>
-                    <a:pt x="501357" y="535842"/>
-                  </a:lnTo>
-                  <a:lnTo>
-                    <a:pt x="429735" y="528400"/>
-                  </a:lnTo>
-                  <a:lnTo>
-                    <a:pt x="358112" y="520907"/>
-                  </a:lnTo>
-                  <a:lnTo>
-                    <a:pt x="286490" y="513361"/>
-                  </a:lnTo>
-                  <a:lnTo>
-                    <a:pt x="214867" y="505762"/>
-                  </a:lnTo>
-                  <a:lnTo>
-                    <a:pt x="143245" y="498110"/>
-                  </a:lnTo>
-                  <a:lnTo>
-                    <a:pt x="71622" y="490404"/>
-                  </a:lnTo>
-                  <a:lnTo>
-                    <a:pt x="0" y="482644"/>
+                    <a:pt x="70344" y="8853"/>
+                  </a:lnTo>
+                  <a:lnTo>
+                    <a:pt x="140688" y="17570"/>
+                  </a:lnTo>
+                  <a:lnTo>
+                    <a:pt x="211033" y="26154"/>
+                  </a:lnTo>
+                  <a:lnTo>
+                    <a:pt x="281377" y="34605"/>
+                  </a:lnTo>
+                  <a:lnTo>
+                    <a:pt x="351722" y="42927"/>
+                  </a:lnTo>
+                  <a:lnTo>
+                    <a:pt x="422066" y="51122"/>
+                  </a:lnTo>
+                  <a:lnTo>
+                    <a:pt x="492411" y="59190"/>
+                  </a:lnTo>
+                  <a:lnTo>
+                    <a:pt x="562755" y="67134"/>
+                  </a:lnTo>
+                  <a:lnTo>
+                    <a:pt x="633100" y="74957"/>
+                  </a:lnTo>
+                  <a:lnTo>
+                    <a:pt x="703444" y="82659"/>
+                  </a:lnTo>
+                  <a:lnTo>
+                    <a:pt x="773789" y="90243"/>
+                  </a:lnTo>
+                  <a:lnTo>
+                    <a:pt x="844133" y="97711"/>
+                  </a:lnTo>
+                  <a:lnTo>
+                    <a:pt x="914478" y="105064"/>
+                  </a:lnTo>
+                  <a:lnTo>
+                    <a:pt x="984822" y="112304"/>
+                  </a:lnTo>
+                  <a:lnTo>
+                    <a:pt x="1055167" y="119432"/>
+                  </a:lnTo>
+                  <a:lnTo>
+                    <a:pt x="1125511" y="126452"/>
+                  </a:lnTo>
+                  <a:lnTo>
+                    <a:pt x="1195856" y="133363"/>
+                  </a:lnTo>
+                  <a:lnTo>
+                    <a:pt x="1266200" y="140169"/>
+                  </a:lnTo>
+                  <a:lnTo>
+                    <a:pt x="1336545" y="146870"/>
+                  </a:lnTo>
+                  <a:lnTo>
+                    <a:pt x="1406889" y="153468"/>
+                  </a:lnTo>
+                  <a:lnTo>
+                    <a:pt x="1477234" y="159965"/>
+                  </a:lnTo>
+                  <a:lnTo>
+                    <a:pt x="1547578" y="166362"/>
+                  </a:lnTo>
+                  <a:lnTo>
+                    <a:pt x="1617923" y="172660"/>
+                  </a:lnTo>
+                  <a:lnTo>
+                    <a:pt x="1688267" y="178862"/>
+                  </a:lnTo>
+                  <a:lnTo>
+                    <a:pt x="1758612" y="184969"/>
+                  </a:lnTo>
+                  <a:lnTo>
+                    <a:pt x="1828956" y="190982"/>
+                  </a:lnTo>
+                  <a:lnTo>
+                    <a:pt x="1899301" y="196903"/>
+                  </a:lnTo>
+                  <a:lnTo>
+                    <a:pt x="1969645" y="202733"/>
+                  </a:lnTo>
+                  <a:lnTo>
+                    <a:pt x="2039990" y="208473"/>
+                  </a:lnTo>
+                  <a:lnTo>
+                    <a:pt x="2110334" y="214125"/>
+                  </a:lnTo>
+                  <a:lnTo>
+                    <a:pt x="2180679" y="219690"/>
+                  </a:lnTo>
+                  <a:lnTo>
+                    <a:pt x="2251023" y="225170"/>
+                  </a:lnTo>
+                  <a:lnTo>
+                    <a:pt x="2321368" y="230566"/>
+                  </a:lnTo>
+                  <a:lnTo>
+                    <a:pt x="2391712" y="235879"/>
+                  </a:lnTo>
+                  <a:lnTo>
+                    <a:pt x="2462057" y="241110"/>
+                  </a:lnTo>
+                  <a:lnTo>
+                    <a:pt x="2532401" y="246261"/>
+                  </a:lnTo>
+                  <a:lnTo>
+                    <a:pt x="2602746" y="251333"/>
+                  </a:lnTo>
+                  <a:lnTo>
+                    <a:pt x="2673090" y="256327"/>
+                  </a:lnTo>
+                  <a:lnTo>
+                    <a:pt x="2743435" y="261244"/>
+                  </a:lnTo>
+                  <a:lnTo>
+                    <a:pt x="2813779" y="266086"/>
+                  </a:lnTo>
+                  <a:lnTo>
+                    <a:pt x="2884124" y="270853"/>
+                  </a:lnTo>
+                  <a:lnTo>
+                    <a:pt x="2954468" y="275547"/>
+                  </a:lnTo>
+                  <a:lnTo>
+                    <a:pt x="3024813" y="278554"/>
+                  </a:lnTo>
+                  <a:lnTo>
+                    <a:pt x="3095157" y="280628"/>
+                  </a:lnTo>
+                  <a:lnTo>
+                    <a:pt x="3165502" y="282688"/>
+                  </a:lnTo>
+                  <a:lnTo>
+                    <a:pt x="3235846" y="284733"/>
+                  </a:lnTo>
+                  <a:lnTo>
+                    <a:pt x="3306191" y="286764"/>
+                  </a:lnTo>
+                  <a:lnTo>
+                    <a:pt x="3376535" y="288780"/>
+                  </a:lnTo>
+                  <a:lnTo>
+                    <a:pt x="3446880" y="290783"/>
+                  </a:lnTo>
+                  <a:lnTo>
+                    <a:pt x="3517224" y="292772"/>
+                  </a:lnTo>
+                  <a:lnTo>
+                    <a:pt x="3587569" y="294747"/>
+                  </a:lnTo>
+                  <a:lnTo>
+                    <a:pt x="3657913" y="296708"/>
+                  </a:lnTo>
+                  <a:lnTo>
+                    <a:pt x="3728257" y="298656"/>
+                  </a:lnTo>
+                  <a:lnTo>
+                    <a:pt x="3798602" y="300590"/>
+                  </a:lnTo>
+                  <a:lnTo>
+                    <a:pt x="3868946" y="302510"/>
+                  </a:lnTo>
+                  <a:lnTo>
+                    <a:pt x="3939291" y="304418"/>
+                  </a:lnTo>
+                  <a:lnTo>
+                    <a:pt x="4009635" y="306311"/>
+                  </a:lnTo>
+                  <a:lnTo>
+                    <a:pt x="4079980" y="308192"/>
+                  </a:lnTo>
+                  <a:lnTo>
+                    <a:pt x="4150324" y="310060"/>
+                  </a:lnTo>
+                  <a:lnTo>
+                    <a:pt x="4220669" y="311914"/>
+                  </a:lnTo>
+                  <a:lnTo>
+                    <a:pt x="4291013" y="313756"/>
+                  </a:lnTo>
+                  <a:lnTo>
+                    <a:pt x="4361358" y="315585"/>
+                  </a:lnTo>
+                  <a:lnTo>
+                    <a:pt x="4431702" y="317401"/>
+                  </a:lnTo>
+                  <a:lnTo>
+                    <a:pt x="4502047" y="319205"/>
+                  </a:lnTo>
+                  <a:lnTo>
+                    <a:pt x="4572391" y="320996"/>
+                  </a:lnTo>
+                  <a:lnTo>
+                    <a:pt x="4642736" y="322774"/>
+                  </a:lnTo>
+                  <a:lnTo>
+                    <a:pt x="4713080" y="324541"/>
+                  </a:lnTo>
+                  <a:lnTo>
+                    <a:pt x="4783425" y="326295"/>
+                  </a:lnTo>
+                  <a:lnTo>
+                    <a:pt x="4853769" y="328036"/>
+                  </a:lnTo>
+                  <a:lnTo>
+                    <a:pt x="4924114" y="329766"/>
+                  </a:lnTo>
+                  <a:lnTo>
+                    <a:pt x="4994458" y="331483"/>
+                  </a:lnTo>
+                  <a:lnTo>
+                    <a:pt x="5064803" y="333189"/>
+                  </a:lnTo>
+                  <a:lnTo>
+                    <a:pt x="5135147" y="334882"/>
+                  </a:lnTo>
+                  <a:lnTo>
+                    <a:pt x="5205492" y="336564"/>
+                  </a:lnTo>
+                  <a:lnTo>
+                    <a:pt x="5275836" y="338235"/>
+                  </a:lnTo>
+                  <a:lnTo>
+                    <a:pt x="5346181" y="339893"/>
+                  </a:lnTo>
+                  <a:lnTo>
+                    <a:pt x="5416525" y="341540"/>
+                  </a:lnTo>
+                  <a:lnTo>
+                    <a:pt x="5486870" y="343176"/>
+                  </a:lnTo>
+                  <a:lnTo>
+                    <a:pt x="5557214" y="344800"/>
+                  </a:lnTo>
+                  <a:lnTo>
+                    <a:pt x="5627559" y="346413"/>
+                  </a:lnTo>
+                  <a:lnTo>
+                    <a:pt x="5697903" y="348014"/>
+                  </a:lnTo>
+                  <a:lnTo>
+                    <a:pt x="5768248" y="349605"/>
+                  </a:lnTo>
+                  <a:lnTo>
+                    <a:pt x="5838592" y="351184"/>
+                  </a:lnTo>
+                  <a:lnTo>
+                    <a:pt x="5908937" y="352753"/>
+                  </a:lnTo>
+                  <a:lnTo>
+                    <a:pt x="5979281" y="354310"/>
+                  </a:lnTo>
+                  <a:lnTo>
+                    <a:pt x="6049626" y="355857"/>
+                  </a:lnTo>
+                  <a:lnTo>
+                    <a:pt x="6119970" y="357393"/>
+                  </a:lnTo>
+                  <a:lnTo>
+                    <a:pt x="6190315" y="358918"/>
+                  </a:lnTo>
+                  <a:lnTo>
+                    <a:pt x="6260659" y="360433"/>
+                  </a:lnTo>
+                  <a:lnTo>
+                    <a:pt x="6331004" y="361937"/>
+                  </a:lnTo>
+                  <a:lnTo>
+                    <a:pt x="6401348" y="363431"/>
+                  </a:lnTo>
+                  <a:lnTo>
+                    <a:pt x="6471693" y="364914"/>
+                  </a:lnTo>
+                  <a:lnTo>
+                    <a:pt x="6542037" y="366387"/>
+                  </a:lnTo>
+                  <a:lnTo>
+                    <a:pt x="6612382" y="367849"/>
+                  </a:lnTo>
+                  <a:lnTo>
+                    <a:pt x="6682726" y="369302"/>
+                  </a:lnTo>
+                  <a:lnTo>
+                    <a:pt x="6753071" y="370744"/>
+                  </a:lnTo>
+                  <a:lnTo>
+                    <a:pt x="6823415" y="372176"/>
+                  </a:lnTo>
+                  <a:lnTo>
+                    <a:pt x="6893760" y="373599"/>
+                  </a:lnTo>
+                  <a:lnTo>
+                    <a:pt x="6964104" y="375011"/>
+                  </a:lnTo>
+                  <a:lnTo>
+                    <a:pt x="6964104" y="451958"/>
+                  </a:lnTo>
+                  <a:lnTo>
+                    <a:pt x="6893760" y="450015"/>
+                  </a:lnTo>
+                  <a:lnTo>
+                    <a:pt x="6823415" y="448041"/>
+                  </a:lnTo>
+                  <a:lnTo>
+                    <a:pt x="6753071" y="446037"/>
+                  </a:lnTo>
+                  <a:lnTo>
+                    <a:pt x="6682726" y="444002"/>
+                  </a:lnTo>
+                  <a:lnTo>
+                    <a:pt x="6612382" y="441935"/>
+                  </a:lnTo>
+                  <a:lnTo>
+                    <a:pt x="6542037" y="439835"/>
+                  </a:lnTo>
+                  <a:lnTo>
+                    <a:pt x="6471693" y="437703"/>
+                  </a:lnTo>
+                  <a:lnTo>
+                    <a:pt x="6401348" y="435538"/>
+                  </a:lnTo>
+                  <a:lnTo>
+                    <a:pt x="6331004" y="433339"/>
+                  </a:lnTo>
+                  <a:lnTo>
+                    <a:pt x="6260659" y="431105"/>
+                  </a:lnTo>
+                  <a:lnTo>
+                    <a:pt x="6190315" y="428837"/>
+                  </a:lnTo>
+                  <a:lnTo>
+                    <a:pt x="6119970" y="426533"/>
+                  </a:lnTo>
+                  <a:lnTo>
+                    <a:pt x="6049626" y="424194"/>
+                  </a:lnTo>
+                  <a:lnTo>
+                    <a:pt x="5979281" y="421818"/>
+                  </a:lnTo>
+                  <a:lnTo>
+                    <a:pt x="5908937" y="419405"/>
+                  </a:lnTo>
+                  <a:lnTo>
+                    <a:pt x="5838592" y="416954"/>
+                  </a:lnTo>
+                  <a:lnTo>
+                    <a:pt x="5768248" y="414465"/>
+                  </a:lnTo>
+                  <a:lnTo>
+                    <a:pt x="5697903" y="411937"/>
+                  </a:lnTo>
+                  <a:lnTo>
+                    <a:pt x="5627559" y="409370"/>
+                  </a:lnTo>
+                  <a:lnTo>
+                    <a:pt x="5557214" y="406763"/>
+                  </a:lnTo>
+                  <a:lnTo>
+                    <a:pt x="5486870" y="404115"/>
+                  </a:lnTo>
+                  <a:lnTo>
+                    <a:pt x="5416525" y="401426"/>
+                  </a:lnTo>
+                  <a:lnTo>
+                    <a:pt x="5346181" y="398694"/>
+                  </a:lnTo>
+                  <a:lnTo>
+                    <a:pt x="5275836" y="395921"/>
+                  </a:lnTo>
+                  <a:lnTo>
+                    <a:pt x="5205492" y="393104"/>
+                  </a:lnTo>
+                  <a:lnTo>
+                    <a:pt x="5135147" y="390243"/>
+                  </a:lnTo>
+                  <a:lnTo>
+                    <a:pt x="5064803" y="387337"/>
+                  </a:lnTo>
+                  <a:lnTo>
+                    <a:pt x="4994458" y="384386"/>
+                  </a:lnTo>
+                  <a:lnTo>
+                    <a:pt x="4924114" y="381390"/>
+                  </a:lnTo>
+                  <a:lnTo>
+                    <a:pt x="4853769" y="378346"/>
+                  </a:lnTo>
+                  <a:lnTo>
+                    <a:pt x="4783425" y="375255"/>
+                  </a:lnTo>
+                  <a:lnTo>
+                    <a:pt x="4713080" y="372116"/>
+                  </a:lnTo>
+                  <a:lnTo>
+                    <a:pt x="4642736" y="368928"/>
+                  </a:lnTo>
+                  <a:lnTo>
+                    <a:pt x="4572391" y="365690"/>
+                  </a:lnTo>
+                  <a:lnTo>
+                    <a:pt x="4502047" y="362401"/>
+                  </a:lnTo>
+                  <a:lnTo>
+                    <a:pt x="4431702" y="359061"/>
+                  </a:lnTo>
+                  <a:lnTo>
+                    <a:pt x="4361358" y="355670"/>
+                  </a:lnTo>
+                  <a:lnTo>
+                    <a:pt x="4291013" y="352225"/>
+                  </a:lnTo>
+                  <a:lnTo>
+                    <a:pt x="4220669" y="348727"/>
+                  </a:lnTo>
+                  <a:lnTo>
+                    <a:pt x="4150324" y="345174"/>
+                  </a:lnTo>
+                  <a:lnTo>
+                    <a:pt x="4079980" y="341565"/>
+                  </a:lnTo>
+                  <a:lnTo>
+                    <a:pt x="4009635" y="337900"/>
+                  </a:lnTo>
+                  <a:lnTo>
+                    <a:pt x="3939291" y="334179"/>
+                  </a:lnTo>
+                  <a:lnTo>
+                    <a:pt x="3868946" y="330399"/>
+                  </a:lnTo>
+                  <a:lnTo>
+                    <a:pt x="3798602" y="326560"/>
+                  </a:lnTo>
+                  <a:lnTo>
+                    <a:pt x="3728257" y="322661"/>
+                  </a:lnTo>
+                  <a:lnTo>
+                    <a:pt x="3657913" y="318702"/>
+                  </a:lnTo>
+                  <a:lnTo>
+                    <a:pt x="3587569" y="314681"/>
+                  </a:lnTo>
+                  <a:lnTo>
+                    <a:pt x="3517224" y="310597"/>
+                  </a:lnTo>
+                  <a:lnTo>
+                    <a:pt x="3446880" y="306449"/>
+                  </a:lnTo>
+                  <a:lnTo>
+                    <a:pt x="3376535" y="302237"/>
+                  </a:lnTo>
+                  <a:lnTo>
+                    <a:pt x="3306191" y="297959"/>
+                  </a:lnTo>
+                  <a:lnTo>
+                    <a:pt x="3235846" y="293614"/>
+                  </a:lnTo>
+                  <a:lnTo>
+                    <a:pt x="3165502" y="289202"/>
+                  </a:lnTo>
+                  <a:lnTo>
+                    <a:pt x="3095157" y="284720"/>
+                  </a:lnTo>
+                  <a:lnTo>
+                    <a:pt x="3024813" y="280169"/>
+                  </a:lnTo>
+                  <a:lnTo>
+                    <a:pt x="2954468" y="276466"/>
+                  </a:lnTo>
+                  <a:lnTo>
+                    <a:pt x="2884124" y="274363"/>
+                  </a:lnTo>
+                  <a:lnTo>
+                    <a:pt x="2813779" y="272245"/>
+                  </a:lnTo>
+                  <a:lnTo>
+                    <a:pt x="2743435" y="270112"/>
+                  </a:lnTo>
+                  <a:lnTo>
+                    <a:pt x="2673090" y="267965"/>
+                  </a:lnTo>
+                  <a:lnTo>
+                    <a:pt x="2602746" y="265802"/>
+                  </a:lnTo>
+                  <a:lnTo>
+                    <a:pt x="2532401" y="263624"/>
+                  </a:lnTo>
+                  <a:lnTo>
+                    <a:pt x="2462057" y="261431"/>
+                  </a:lnTo>
+                  <a:lnTo>
+                    <a:pt x="2391712" y="259223"/>
+                  </a:lnTo>
+                  <a:lnTo>
+                    <a:pt x="2321368" y="256999"/>
+                  </a:lnTo>
+                  <a:lnTo>
+                    <a:pt x="2251023" y="254759"/>
+                  </a:lnTo>
+                  <a:lnTo>
+                    <a:pt x="2180679" y="252504"/>
+                  </a:lnTo>
+                  <a:lnTo>
+                    <a:pt x="2110334" y="250233"/>
+                  </a:lnTo>
+                  <a:lnTo>
+                    <a:pt x="2039990" y="247946"/>
+                  </a:lnTo>
+                  <a:lnTo>
+                    <a:pt x="1969645" y="245643"/>
+                  </a:lnTo>
+                  <a:lnTo>
+                    <a:pt x="1899301" y="243324"/>
+                  </a:lnTo>
+                  <a:lnTo>
+                    <a:pt x="1828956" y="240989"/>
+                  </a:lnTo>
+                  <a:lnTo>
+                    <a:pt x="1758612" y="238637"/>
+                  </a:lnTo>
+                  <a:lnTo>
+                    <a:pt x="1688267" y="236269"/>
+                  </a:lnTo>
+                  <a:lnTo>
+                    <a:pt x="1617923" y="233884"/>
+                  </a:lnTo>
+                  <a:lnTo>
+                    <a:pt x="1547578" y="231482"/>
+                  </a:lnTo>
+                  <a:lnTo>
+                    <a:pt x="1477234" y="229064"/>
+                  </a:lnTo>
+                  <a:lnTo>
+                    <a:pt x="1406889" y="226629"/>
+                  </a:lnTo>
+                  <a:lnTo>
+                    <a:pt x="1336545" y="224176"/>
+                  </a:lnTo>
+                  <a:lnTo>
+                    <a:pt x="1266200" y="221707"/>
+                  </a:lnTo>
+                  <a:lnTo>
+                    <a:pt x="1195856" y="219220"/>
+                  </a:lnTo>
+                  <a:lnTo>
+                    <a:pt x="1125511" y="216716"/>
+                  </a:lnTo>
+                  <a:lnTo>
+                    <a:pt x="1055167" y="214194"/>
+                  </a:lnTo>
+                  <a:lnTo>
+                    <a:pt x="984822" y="211654"/>
+                  </a:lnTo>
+                  <a:lnTo>
+                    <a:pt x="914478" y="209097"/>
+                  </a:lnTo>
+                  <a:lnTo>
+                    <a:pt x="844133" y="206522"/>
+                  </a:lnTo>
+                  <a:lnTo>
+                    <a:pt x="773789" y="203929"/>
+                  </a:lnTo>
+                  <a:lnTo>
+                    <a:pt x="703444" y="201317"/>
+                  </a:lnTo>
+                  <a:lnTo>
+                    <a:pt x="633100" y="198687"/>
+                  </a:lnTo>
+                  <a:lnTo>
+                    <a:pt x="562755" y="196039"/>
+                  </a:lnTo>
+                  <a:lnTo>
+                    <a:pt x="492411" y="193372"/>
+                  </a:lnTo>
+                  <a:lnTo>
+                    <a:pt x="422066" y="190687"/>
+                  </a:lnTo>
+                  <a:lnTo>
+                    <a:pt x="351722" y="187983"/>
+                  </a:lnTo>
+                  <a:lnTo>
+                    <a:pt x="281377" y="185260"/>
+                  </a:lnTo>
+                  <a:lnTo>
+                    <a:pt x="211033" y="182517"/>
+                  </a:lnTo>
+                  <a:lnTo>
+                    <a:pt x="140688" y="179756"/>
+                  </a:lnTo>
+                  <a:lnTo>
+                    <a:pt x="70344" y="176975"/>
+                  </a:lnTo>
+                  <a:lnTo>
+                    <a:pt x="0" y="174175"/>
                   </a:lnTo>
                   <a:close/>
                 </a:path>
@@ -3670,643 +3705,318 @@
         </p:sp>
         <p:sp>
           <p:nvSpPr>
-            <p:cNvPr id="23" name="pl23"/>
-            <p:cNvSpPr/>
-            <p:nvPr/>
-          </p:nvSpPr>
-          <p:spPr>
-            <a:xfrm>
-              <a:off x="1172049" y="3959602"/>
-              <a:ext cx="7090630" cy="1039169"/>
-            </a:xfrm>
-            <a:custGeom>
-              <a:avLst/>
-              <a:pathLst>
-                <a:path w="7090630" h="1039169">
-                  <a:moveTo>
-                    <a:pt x="0" y="0"/>
-                  </a:moveTo>
-                  <a:lnTo>
-                    <a:pt x="71622" y="24532"/>
-                  </a:lnTo>
-                  <a:lnTo>
-                    <a:pt x="143245" y="48688"/>
-                  </a:lnTo>
-                  <a:lnTo>
-                    <a:pt x="214867" y="72474"/>
-                  </a:lnTo>
-                  <a:lnTo>
-                    <a:pt x="286490" y="95894"/>
-                  </a:lnTo>
-                  <a:lnTo>
-                    <a:pt x="358112" y="118954"/>
-                  </a:lnTo>
-                  <a:lnTo>
-                    <a:pt x="429735" y="141660"/>
-                  </a:lnTo>
-                  <a:lnTo>
-                    <a:pt x="501357" y="164018"/>
-                  </a:lnTo>
-                  <a:lnTo>
-                    <a:pt x="572980" y="186032"/>
-                  </a:lnTo>
-                  <a:lnTo>
-                    <a:pt x="644602" y="207708"/>
-                  </a:lnTo>
-                  <a:lnTo>
-                    <a:pt x="716225" y="229052"/>
-                  </a:lnTo>
-                  <a:lnTo>
-                    <a:pt x="787847" y="250067"/>
-                  </a:lnTo>
-                  <a:lnTo>
-                    <a:pt x="859470" y="270760"/>
-                  </a:lnTo>
-                  <a:lnTo>
-                    <a:pt x="931092" y="291135"/>
-                  </a:lnTo>
-                  <a:lnTo>
-                    <a:pt x="1002715" y="311198"/>
-                  </a:lnTo>
-                  <a:lnTo>
-                    <a:pt x="1074337" y="330952"/>
-                  </a:lnTo>
-                  <a:lnTo>
-                    <a:pt x="1145960" y="350403"/>
-                  </a:lnTo>
-                  <a:lnTo>
-                    <a:pt x="1217582" y="369555"/>
-                  </a:lnTo>
-                  <a:lnTo>
-                    <a:pt x="1289205" y="388413"/>
-                  </a:lnTo>
-                  <a:lnTo>
-                    <a:pt x="1360827" y="406982"/>
-                  </a:lnTo>
-                  <a:lnTo>
-                    <a:pt x="1432450" y="425265"/>
-                  </a:lnTo>
-                  <a:lnTo>
-                    <a:pt x="1504073" y="443268"/>
-                  </a:lnTo>
-                  <a:lnTo>
-                    <a:pt x="1575695" y="460994"/>
-                  </a:lnTo>
-                  <a:lnTo>
-                    <a:pt x="1647318" y="478448"/>
-                  </a:lnTo>
-                  <a:lnTo>
-                    <a:pt x="1718940" y="495634"/>
-                  </a:lnTo>
-                  <a:lnTo>
-                    <a:pt x="1790563" y="512556"/>
-                  </a:lnTo>
-                  <a:lnTo>
-                    <a:pt x="1862185" y="529218"/>
-                  </a:lnTo>
-                  <a:lnTo>
-                    <a:pt x="1933808" y="545625"/>
-                  </a:lnTo>
-                  <a:lnTo>
-                    <a:pt x="2005430" y="561779"/>
-                  </a:lnTo>
-                  <a:lnTo>
-                    <a:pt x="2077053" y="577685"/>
-                  </a:lnTo>
-                  <a:lnTo>
-                    <a:pt x="2148675" y="593348"/>
-                  </a:lnTo>
-                  <a:lnTo>
-                    <a:pt x="2220298" y="608769"/>
-                  </a:lnTo>
-                  <a:lnTo>
-                    <a:pt x="2291920" y="623954"/>
-                  </a:lnTo>
-                  <a:lnTo>
-                    <a:pt x="2363543" y="638906"/>
-                  </a:lnTo>
-                  <a:lnTo>
-                    <a:pt x="2435165" y="653628"/>
-                  </a:lnTo>
-                  <a:lnTo>
-                    <a:pt x="2506788" y="668124"/>
-                  </a:lnTo>
-                  <a:lnTo>
-                    <a:pt x="2578410" y="682397"/>
-                  </a:lnTo>
-                  <a:lnTo>
-                    <a:pt x="2650033" y="696451"/>
-                  </a:lnTo>
-                  <a:lnTo>
-                    <a:pt x="2721655" y="710290"/>
-                  </a:lnTo>
-                  <a:lnTo>
-                    <a:pt x="2793278" y="723916"/>
-                  </a:lnTo>
-                  <a:lnTo>
-                    <a:pt x="2864901" y="737332"/>
-                  </a:lnTo>
-                  <a:lnTo>
-                    <a:pt x="2936523" y="750543"/>
-                  </a:lnTo>
-                  <a:lnTo>
-                    <a:pt x="3008146" y="763551"/>
-                  </a:lnTo>
-                  <a:lnTo>
-                    <a:pt x="3079768" y="771883"/>
-                  </a:lnTo>
-                  <a:lnTo>
-                    <a:pt x="3151391" y="777630"/>
-                  </a:lnTo>
-                  <a:lnTo>
-                    <a:pt x="3223013" y="783337"/>
-                  </a:lnTo>
-                  <a:lnTo>
-                    <a:pt x="3294636" y="789004"/>
-                  </a:lnTo>
-                  <a:lnTo>
-                    <a:pt x="3366258" y="794632"/>
-                  </a:lnTo>
-                  <a:lnTo>
-                    <a:pt x="3437881" y="800221"/>
-                  </a:lnTo>
-                  <a:lnTo>
-                    <a:pt x="3509503" y="805770"/>
-                  </a:lnTo>
-                  <a:lnTo>
-                    <a:pt x="3581126" y="811281"/>
-                  </a:lnTo>
-                  <a:lnTo>
-                    <a:pt x="3652748" y="816754"/>
-                  </a:lnTo>
-                  <a:lnTo>
-                    <a:pt x="3724371" y="822189"/>
-                  </a:lnTo>
-                  <a:lnTo>
-                    <a:pt x="3795993" y="827585"/>
-                  </a:lnTo>
-                  <a:lnTo>
-                    <a:pt x="3867616" y="832945"/>
-                  </a:lnTo>
-                  <a:lnTo>
-                    <a:pt x="3939238" y="838266"/>
-                  </a:lnTo>
-                  <a:lnTo>
-                    <a:pt x="4010861" y="843551"/>
-                  </a:lnTo>
-                  <a:lnTo>
-                    <a:pt x="4082483" y="848799"/>
-                  </a:lnTo>
-                  <a:lnTo>
-                    <a:pt x="4154106" y="854011"/>
-                  </a:lnTo>
-                  <a:lnTo>
-                    <a:pt x="4225729" y="859186"/>
-                  </a:lnTo>
-                  <a:lnTo>
-                    <a:pt x="4297351" y="864326"/>
-                  </a:lnTo>
-                  <a:lnTo>
-                    <a:pt x="4368974" y="869429"/>
-                  </a:lnTo>
-                  <a:lnTo>
-                    <a:pt x="4440596" y="874497"/>
-                  </a:lnTo>
-                  <a:lnTo>
-                    <a:pt x="4512219" y="879530"/>
-                  </a:lnTo>
-                  <a:lnTo>
-                    <a:pt x="4583841" y="884528"/>
-                  </a:lnTo>
-                  <a:lnTo>
-                    <a:pt x="4655464" y="889491"/>
-                  </a:lnTo>
-                  <a:lnTo>
-                    <a:pt x="4727086" y="894419"/>
-                  </a:lnTo>
-                  <a:lnTo>
-                    <a:pt x="4798709" y="899313"/>
-                  </a:lnTo>
-                  <a:lnTo>
-                    <a:pt x="4870331" y="904173"/>
-                  </a:lnTo>
-                  <a:lnTo>
-                    <a:pt x="4941954" y="908999"/>
-                  </a:lnTo>
-                  <a:lnTo>
-                    <a:pt x="5013576" y="913792"/>
-                  </a:lnTo>
-                  <a:lnTo>
-                    <a:pt x="5085199" y="918551"/>
-                  </a:lnTo>
-                  <a:lnTo>
-                    <a:pt x="5156821" y="923277"/>
-                  </a:lnTo>
-                  <a:lnTo>
-                    <a:pt x="5228444" y="927971"/>
-                  </a:lnTo>
-                  <a:lnTo>
-                    <a:pt x="5300066" y="932631"/>
-                  </a:lnTo>
-                  <a:lnTo>
-                    <a:pt x="5371689" y="937259"/>
-                  </a:lnTo>
-                  <a:lnTo>
-                    <a:pt x="5443311" y="941855"/>
-                  </a:lnTo>
-                  <a:lnTo>
-                    <a:pt x="5514934" y="946419"/>
-                  </a:lnTo>
-                  <a:lnTo>
-                    <a:pt x="5586557" y="950952"/>
-                  </a:lnTo>
-                  <a:lnTo>
-                    <a:pt x="5658179" y="955452"/>
-                  </a:lnTo>
-                  <a:lnTo>
-                    <a:pt x="5729802" y="959922"/>
-                  </a:lnTo>
-                  <a:lnTo>
-                    <a:pt x="5801424" y="964360"/>
-                  </a:lnTo>
-                  <a:lnTo>
-                    <a:pt x="5873047" y="968767"/>
-                  </a:lnTo>
-                  <a:lnTo>
-                    <a:pt x="5944669" y="973144"/>
-                  </a:lnTo>
-                  <a:lnTo>
-                    <a:pt x="6016292" y="977490"/>
-                  </a:lnTo>
-                  <a:lnTo>
-                    <a:pt x="6087914" y="981806"/>
-                  </a:lnTo>
-                  <a:lnTo>
-                    <a:pt x="6159537" y="986092"/>
-                  </a:lnTo>
-                  <a:lnTo>
-                    <a:pt x="6231159" y="990348"/>
-                  </a:lnTo>
-                  <a:lnTo>
-                    <a:pt x="6302782" y="994575"/>
-                  </a:lnTo>
-                  <a:lnTo>
-                    <a:pt x="6374404" y="998772"/>
-                  </a:lnTo>
-                  <a:lnTo>
-                    <a:pt x="6446027" y="1002939"/>
-                  </a:lnTo>
-                  <a:lnTo>
-                    <a:pt x="6517649" y="1007078"/>
-                  </a:lnTo>
-                  <a:lnTo>
-                    <a:pt x="6589272" y="1011188"/>
-                  </a:lnTo>
-                  <a:lnTo>
-                    <a:pt x="6660894" y="1015270"/>
-                  </a:lnTo>
-                  <a:lnTo>
-                    <a:pt x="6732517" y="1019323"/>
-                  </a:lnTo>
-                  <a:lnTo>
-                    <a:pt x="6804139" y="1023348"/>
-                  </a:lnTo>
-                  <a:lnTo>
-                    <a:pt x="6875762" y="1027345"/>
-                  </a:lnTo>
-                  <a:lnTo>
-                    <a:pt x="6947385" y="1031314"/>
-                  </a:lnTo>
-                  <a:lnTo>
-                    <a:pt x="7019007" y="1035255"/>
-                  </a:lnTo>
-                  <a:lnTo>
-                    <a:pt x="7090630" y="1039169"/>
-                  </a:lnTo>
-                </a:path>
-              </a:pathLst>
-            </a:custGeom>
-          </p:spPr>
-          <p:txBody>
-            <a:bodyPr/>
-            <a:lstStyle/>
-            <a:p/>
-          </p:txBody>
-        </p:sp>
-        <p:sp>
-          <p:nvSpPr>
             <p:cNvPr id="24" name="pl24"/>
             <p:cNvSpPr/>
             <p:nvPr/>
           </p:nvSpPr>
           <p:spPr>
             <a:xfrm>
-              <a:off x="1172049" y="4442246"/>
-              <a:ext cx="7090630" cy="769746"/>
+              <a:off x="1235312" y="2823740"/>
+              <a:ext cx="6964104" cy="375011"/>
             </a:xfrm>
             <a:custGeom>
               <a:avLst/>
               <a:pathLst>
-                <a:path w="7090630" h="769746">
+                <a:path w="6964104" h="375011">
                   <a:moveTo>
-                    <a:pt x="7090630" y="769746"/>
+                    <a:pt x="0" y="0"/>
                   </a:moveTo>
                   <a:lnTo>
-                    <a:pt x="7019007" y="764361"/>
-                  </a:lnTo>
-                  <a:lnTo>
-                    <a:pt x="6947385" y="758893"/>
-                  </a:lnTo>
-                  <a:lnTo>
-                    <a:pt x="6875762" y="753339"/>
-                  </a:lnTo>
-                  <a:lnTo>
-                    <a:pt x="6804139" y="747699"/>
-                  </a:lnTo>
-                  <a:lnTo>
-                    <a:pt x="6732517" y="741971"/>
-                  </a:lnTo>
-                  <a:lnTo>
-                    <a:pt x="6660894" y="736154"/>
-                  </a:lnTo>
-                  <a:lnTo>
-                    <a:pt x="6589272" y="730246"/>
-                  </a:lnTo>
-                  <a:lnTo>
-                    <a:pt x="6517649" y="724245"/>
-                  </a:lnTo>
-                  <a:lnTo>
-                    <a:pt x="6446027" y="718151"/>
-                  </a:lnTo>
-                  <a:lnTo>
-                    <a:pt x="6374404" y="711962"/>
-                  </a:lnTo>
-                  <a:lnTo>
-                    <a:pt x="6302782" y="705677"/>
-                  </a:lnTo>
-                  <a:lnTo>
-                    <a:pt x="6231159" y="699293"/>
-                  </a:lnTo>
-                  <a:lnTo>
-                    <a:pt x="6159537" y="692810"/>
-                  </a:lnTo>
-                  <a:lnTo>
-                    <a:pt x="6087914" y="686226"/>
-                  </a:lnTo>
-                  <a:lnTo>
-                    <a:pt x="6016292" y="679540"/>
-                  </a:lnTo>
-                  <a:lnTo>
-                    <a:pt x="5944669" y="672748"/>
-                  </a:lnTo>
-                  <a:lnTo>
-                    <a:pt x="5873047" y="665851"/>
-                  </a:lnTo>
-                  <a:lnTo>
-                    <a:pt x="5801424" y="658847"/>
-                  </a:lnTo>
-                  <a:lnTo>
-                    <a:pt x="5729802" y="651733"/>
-                  </a:lnTo>
-                  <a:lnTo>
-                    <a:pt x="5658179" y="644508"/>
-                  </a:lnTo>
-                  <a:lnTo>
-                    <a:pt x="5586557" y="637171"/>
-                  </a:lnTo>
-                  <a:lnTo>
-                    <a:pt x="5514934" y="629719"/>
-                  </a:lnTo>
-                  <a:lnTo>
-                    <a:pt x="5443311" y="622151"/>
-                  </a:lnTo>
-                  <a:lnTo>
-                    <a:pt x="5371689" y="614465"/>
-                  </a:lnTo>
-                  <a:lnTo>
-                    <a:pt x="5300066" y="606659"/>
-                  </a:lnTo>
-                  <a:lnTo>
-                    <a:pt x="5228444" y="598731"/>
-                  </a:lnTo>
-                  <a:lnTo>
-                    <a:pt x="5156821" y="590680"/>
-                  </a:lnTo>
-                  <a:lnTo>
-                    <a:pt x="5085199" y="582503"/>
-                  </a:lnTo>
-                  <a:lnTo>
-                    <a:pt x="5013576" y="574199"/>
-                  </a:lnTo>
-                  <a:lnTo>
-                    <a:pt x="4941954" y="565765"/>
-                  </a:lnTo>
-                  <a:lnTo>
-                    <a:pt x="4870331" y="557200"/>
-                  </a:lnTo>
-                  <a:lnTo>
-                    <a:pt x="4798709" y="548501"/>
-                  </a:lnTo>
-                  <a:lnTo>
-                    <a:pt x="4727086" y="539666"/>
-                  </a:lnTo>
-                  <a:lnTo>
-                    <a:pt x="4655464" y="530694"/>
-                  </a:lnTo>
-                  <a:lnTo>
-                    <a:pt x="4583841" y="521581"/>
-                  </a:lnTo>
-                  <a:lnTo>
-                    <a:pt x="4512219" y="512327"/>
-                  </a:lnTo>
-                  <a:lnTo>
-                    <a:pt x="4440596" y="502928"/>
-                  </a:lnTo>
-                  <a:lnTo>
-                    <a:pt x="4368974" y="493383"/>
-                  </a:lnTo>
-                  <a:lnTo>
-                    <a:pt x="4297351" y="483688"/>
-                  </a:lnTo>
-                  <a:lnTo>
-                    <a:pt x="4225729" y="473843"/>
-                  </a:lnTo>
-                  <a:lnTo>
-                    <a:pt x="4154106" y="463844"/>
-                  </a:lnTo>
-                  <a:lnTo>
-                    <a:pt x="4082483" y="453689"/>
-                  </a:lnTo>
-                  <a:lnTo>
-                    <a:pt x="4010861" y="443376"/>
-                  </a:lnTo>
-                  <a:lnTo>
-                    <a:pt x="3939238" y="432902"/>
-                  </a:lnTo>
-                  <a:lnTo>
-                    <a:pt x="3867616" y="422264"/>
-                  </a:lnTo>
-                  <a:lnTo>
-                    <a:pt x="3795993" y="411461"/>
-                  </a:lnTo>
-                  <a:lnTo>
-                    <a:pt x="3724371" y="400489"/>
-                  </a:lnTo>
-                  <a:lnTo>
-                    <a:pt x="3652748" y="389346"/>
-                  </a:lnTo>
-                  <a:lnTo>
-                    <a:pt x="3581126" y="378030"/>
-                  </a:lnTo>
-                  <a:lnTo>
-                    <a:pt x="3509503" y="366537"/>
-                  </a:lnTo>
-                  <a:lnTo>
-                    <a:pt x="3437881" y="354864"/>
-                  </a:lnTo>
-                  <a:lnTo>
-                    <a:pt x="3366258" y="343010"/>
-                  </a:lnTo>
-                  <a:lnTo>
-                    <a:pt x="3294636" y="330971"/>
-                  </a:lnTo>
-                  <a:lnTo>
-                    <a:pt x="3223013" y="318743"/>
-                  </a:lnTo>
-                  <a:lnTo>
-                    <a:pt x="3151391" y="306326"/>
-                  </a:lnTo>
-                  <a:lnTo>
-                    <a:pt x="3079768" y="293714"/>
-                  </a:lnTo>
-                  <a:lnTo>
-                    <a:pt x="3008146" y="283452"/>
-                  </a:lnTo>
-                  <a:lnTo>
-                    <a:pt x="2936523" y="277624"/>
-                  </a:lnTo>
-                  <a:lnTo>
-                    <a:pt x="2864901" y="271755"/>
-                  </a:lnTo>
-                  <a:lnTo>
-                    <a:pt x="2793278" y="265846"/>
-                  </a:lnTo>
-                  <a:lnTo>
-                    <a:pt x="2721655" y="259895"/>
-                  </a:lnTo>
-                  <a:lnTo>
-                    <a:pt x="2650033" y="253902"/>
-                  </a:lnTo>
-                  <a:lnTo>
-                    <a:pt x="2578410" y="247867"/>
-                  </a:lnTo>
-                  <a:lnTo>
-                    <a:pt x="2506788" y="241790"/>
-                  </a:lnTo>
-                  <a:lnTo>
-                    <a:pt x="2435165" y="235670"/>
-                  </a:lnTo>
-                  <a:lnTo>
-                    <a:pt x="2363543" y="229508"/>
-                  </a:lnTo>
-                  <a:lnTo>
-                    <a:pt x="2291920" y="223302"/>
-                  </a:lnTo>
-                  <a:lnTo>
-                    <a:pt x="2220298" y="217052"/>
-                  </a:lnTo>
-                  <a:lnTo>
-                    <a:pt x="2148675" y="210759"/>
-                  </a:lnTo>
-                  <a:lnTo>
-                    <a:pt x="2077053" y="204422"/>
-                  </a:lnTo>
-                  <a:lnTo>
-                    <a:pt x="2005430" y="198041"/>
-                  </a:lnTo>
-                  <a:lnTo>
-                    <a:pt x="1933808" y="191614"/>
-                  </a:lnTo>
-                  <a:lnTo>
-                    <a:pt x="1862185" y="185143"/>
-                  </a:lnTo>
-                  <a:lnTo>
-                    <a:pt x="1790563" y="178626"/>
-                  </a:lnTo>
-                  <a:lnTo>
-                    <a:pt x="1718940" y="172064"/>
-                  </a:lnTo>
-                  <a:lnTo>
-                    <a:pt x="1647318" y="165456"/>
-                  </a:lnTo>
-                  <a:lnTo>
-                    <a:pt x="1575695" y="158801"/>
-                  </a:lnTo>
-                  <a:lnTo>
-                    <a:pt x="1504073" y="152100"/>
-                  </a:lnTo>
-                  <a:lnTo>
-                    <a:pt x="1432450" y="145351"/>
-                  </a:lnTo>
-                  <a:lnTo>
-                    <a:pt x="1360827" y="138556"/>
-                  </a:lnTo>
-                  <a:lnTo>
-                    <a:pt x="1289205" y="131713"/>
-                  </a:lnTo>
-                  <a:lnTo>
-                    <a:pt x="1217582" y="124822"/>
-                  </a:lnTo>
-                  <a:lnTo>
-                    <a:pt x="1145960" y="117882"/>
-                  </a:lnTo>
-                  <a:lnTo>
-                    <a:pt x="1074337" y="110894"/>
-                  </a:lnTo>
-                  <a:lnTo>
-                    <a:pt x="1002715" y="103857"/>
-                  </a:lnTo>
-                  <a:lnTo>
-                    <a:pt x="931092" y="96771"/>
-                  </a:lnTo>
-                  <a:lnTo>
-                    <a:pt x="859470" y="89635"/>
-                  </a:lnTo>
-                  <a:lnTo>
-                    <a:pt x="787847" y="82449"/>
-                  </a:lnTo>
-                  <a:lnTo>
-                    <a:pt x="716225" y="75212"/>
-                  </a:lnTo>
-                  <a:lnTo>
-                    <a:pt x="644602" y="67925"/>
-                  </a:lnTo>
-                  <a:lnTo>
-                    <a:pt x="572980" y="60587"/>
-                  </a:lnTo>
-                  <a:lnTo>
-                    <a:pt x="501357" y="53197"/>
-                  </a:lnTo>
-                  <a:lnTo>
-                    <a:pt x="429735" y="45756"/>
-                  </a:lnTo>
-                  <a:lnTo>
-                    <a:pt x="358112" y="38262"/>
-                  </a:lnTo>
-                  <a:lnTo>
-                    <a:pt x="286490" y="30716"/>
-                  </a:lnTo>
-                  <a:lnTo>
-                    <a:pt x="214867" y="23117"/>
-                  </a:lnTo>
-                  <a:lnTo>
-                    <a:pt x="143245" y="15465"/>
-                  </a:lnTo>
-                  <a:lnTo>
-                    <a:pt x="71622" y="7759"/>
-                  </a:lnTo>
-                  <a:lnTo>
-                    <a:pt x="0" y="0"/>
+                    <a:pt x="70344" y="8853"/>
+                  </a:lnTo>
+                  <a:lnTo>
+                    <a:pt x="140688" y="17570"/>
+                  </a:lnTo>
+                  <a:lnTo>
+                    <a:pt x="211033" y="26154"/>
+                  </a:lnTo>
+                  <a:lnTo>
+                    <a:pt x="281377" y="34605"/>
+                  </a:lnTo>
+                  <a:lnTo>
+                    <a:pt x="351722" y="42927"/>
+                  </a:lnTo>
+                  <a:lnTo>
+                    <a:pt x="422066" y="51122"/>
+                  </a:lnTo>
+                  <a:lnTo>
+                    <a:pt x="492411" y="59190"/>
+                  </a:lnTo>
+                  <a:lnTo>
+                    <a:pt x="562755" y="67134"/>
+                  </a:lnTo>
+                  <a:lnTo>
+                    <a:pt x="633100" y="74957"/>
+                  </a:lnTo>
+                  <a:lnTo>
+                    <a:pt x="703444" y="82659"/>
+                  </a:lnTo>
+                  <a:lnTo>
+                    <a:pt x="773789" y="90243"/>
+                  </a:lnTo>
+                  <a:lnTo>
+                    <a:pt x="844133" y="97711"/>
+                  </a:lnTo>
+                  <a:lnTo>
+                    <a:pt x="914478" y="105064"/>
+                  </a:lnTo>
+                  <a:lnTo>
+                    <a:pt x="984822" y="112304"/>
+                  </a:lnTo>
+                  <a:lnTo>
+                    <a:pt x="1055167" y="119432"/>
+                  </a:lnTo>
+                  <a:lnTo>
+                    <a:pt x="1125511" y="126452"/>
+                  </a:lnTo>
+                  <a:lnTo>
+                    <a:pt x="1195856" y="133363"/>
+                  </a:lnTo>
+                  <a:lnTo>
+                    <a:pt x="1266200" y="140169"/>
+                  </a:lnTo>
+                  <a:lnTo>
+                    <a:pt x="1336545" y="146870"/>
+                  </a:lnTo>
+                  <a:lnTo>
+                    <a:pt x="1406889" y="153468"/>
+                  </a:lnTo>
+                  <a:lnTo>
+                    <a:pt x="1477234" y="159965"/>
+                  </a:lnTo>
+                  <a:lnTo>
+                    <a:pt x="1547578" y="166362"/>
+                  </a:lnTo>
+                  <a:lnTo>
+                    <a:pt x="1617923" y="172660"/>
+                  </a:lnTo>
+                  <a:lnTo>
+                    <a:pt x="1688267" y="178862"/>
+                  </a:lnTo>
+                  <a:lnTo>
+                    <a:pt x="1758612" y="184969"/>
+                  </a:lnTo>
+                  <a:lnTo>
+                    <a:pt x="1828956" y="190982"/>
+                  </a:lnTo>
+                  <a:lnTo>
+                    <a:pt x="1899301" y="196903"/>
+                  </a:lnTo>
+                  <a:lnTo>
+                    <a:pt x="1969645" y="202733"/>
+                  </a:lnTo>
+                  <a:lnTo>
+                    <a:pt x="2039990" y="208473"/>
+                  </a:lnTo>
+                  <a:lnTo>
+                    <a:pt x="2110334" y="214125"/>
+                  </a:lnTo>
+                  <a:lnTo>
+                    <a:pt x="2180679" y="219690"/>
+                  </a:lnTo>
+                  <a:lnTo>
+                    <a:pt x="2251023" y="225170"/>
+                  </a:lnTo>
+                  <a:lnTo>
+                    <a:pt x="2321368" y="230566"/>
+                  </a:lnTo>
+                  <a:lnTo>
+                    <a:pt x="2391712" y="235879"/>
+                  </a:lnTo>
+                  <a:lnTo>
+                    <a:pt x="2462057" y="241110"/>
+                  </a:lnTo>
+                  <a:lnTo>
+                    <a:pt x="2532401" y="246261"/>
+                  </a:lnTo>
+                  <a:lnTo>
+                    <a:pt x="2602746" y="251333"/>
+                  </a:lnTo>
+                  <a:lnTo>
+                    <a:pt x="2673090" y="256327"/>
+                  </a:lnTo>
+                  <a:lnTo>
+                    <a:pt x="2743435" y="261244"/>
+                  </a:lnTo>
+                  <a:lnTo>
+                    <a:pt x="2813779" y="266086"/>
+                  </a:lnTo>
+                  <a:lnTo>
+                    <a:pt x="2884124" y="270853"/>
+                  </a:lnTo>
+                  <a:lnTo>
+                    <a:pt x="2954468" y="275547"/>
+                  </a:lnTo>
+                  <a:lnTo>
+                    <a:pt x="3024813" y="278554"/>
+                  </a:lnTo>
+                  <a:lnTo>
+                    <a:pt x="3095157" y="280628"/>
+                  </a:lnTo>
+                  <a:lnTo>
+                    <a:pt x="3165502" y="282688"/>
+                  </a:lnTo>
+                  <a:lnTo>
+                    <a:pt x="3235846" y="284733"/>
+                  </a:lnTo>
+                  <a:lnTo>
+                    <a:pt x="3306191" y="286764"/>
+                  </a:lnTo>
+                  <a:lnTo>
+                    <a:pt x="3376535" y="288780"/>
+                  </a:lnTo>
+                  <a:lnTo>
+                    <a:pt x="3446880" y="290783"/>
+                  </a:lnTo>
+                  <a:lnTo>
+                    <a:pt x="3517224" y="292772"/>
+                  </a:lnTo>
+                  <a:lnTo>
+                    <a:pt x="3587569" y="294747"/>
+                  </a:lnTo>
+                  <a:lnTo>
+                    <a:pt x="3657913" y="296708"/>
+                  </a:lnTo>
+                  <a:lnTo>
+                    <a:pt x="3728257" y="298656"/>
+                  </a:lnTo>
+                  <a:lnTo>
+                    <a:pt x="3798602" y="300590"/>
+                  </a:lnTo>
+                  <a:lnTo>
+                    <a:pt x="3868946" y="302510"/>
+                  </a:lnTo>
+                  <a:lnTo>
+                    <a:pt x="3939291" y="304418"/>
+                  </a:lnTo>
+                  <a:lnTo>
+                    <a:pt x="4009635" y="306311"/>
+                  </a:lnTo>
+                  <a:lnTo>
+                    <a:pt x="4079980" y="308192"/>
+                  </a:lnTo>
+                  <a:lnTo>
+                    <a:pt x="4150324" y="310060"/>
+                  </a:lnTo>
+                  <a:lnTo>
+                    <a:pt x="4220669" y="311914"/>
+                  </a:lnTo>
+                  <a:lnTo>
+                    <a:pt x="4291013" y="313756"/>
+                  </a:lnTo>
+                  <a:lnTo>
+                    <a:pt x="4361358" y="315585"/>
+                  </a:lnTo>
+                  <a:lnTo>
+                    <a:pt x="4431702" y="317401"/>
+                  </a:lnTo>
+                  <a:lnTo>
+                    <a:pt x="4502047" y="319205"/>
+                  </a:lnTo>
+                  <a:lnTo>
+                    <a:pt x="4572391" y="320996"/>
+                  </a:lnTo>
+                  <a:lnTo>
+                    <a:pt x="4642736" y="322774"/>
+                  </a:lnTo>
+                  <a:lnTo>
+                    <a:pt x="4713080" y="324541"/>
+                  </a:lnTo>
+                  <a:lnTo>
+                    <a:pt x="4783425" y="326295"/>
+                  </a:lnTo>
+                  <a:lnTo>
+                    <a:pt x="4853769" y="328036"/>
+                  </a:lnTo>
+                  <a:lnTo>
+                    <a:pt x="4924114" y="329766"/>
+                  </a:lnTo>
+                  <a:lnTo>
+                    <a:pt x="4994458" y="331483"/>
+                  </a:lnTo>
+                  <a:lnTo>
+                    <a:pt x="5064803" y="333189"/>
+                  </a:lnTo>
+                  <a:lnTo>
+                    <a:pt x="5135147" y="334882"/>
+                  </a:lnTo>
+                  <a:lnTo>
+                    <a:pt x="5205492" y="336564"/>
+                  </a:lnTo>
+                  <a:lnTo>
+                    <a:pt x="5275836" y="338235"/>
+                  </a:lnTo>
+                  <a:lnTo>
+                    <a:pt x="5346181" y="339893"/>
+                  </a:lnTo>
+                  <a:lnTo>
+                    <a:pt x="5416525" y="341540"/>
+                  </a:lnTo>
+                  <a:lnTo>
+                    <a:pt x="5486870" y="343176"/>
+                  </a:lnTo>
+                  <a:lnTo>
+                    <a:pt x="5557214" y="344800"/>
+                  </a:lnTo>
+                  <a:lnTo>
+                    <a:pt x="5627559" y="346413"/>
+                  </a:lnTo>
+                  <a:lnTo>
+                    <a:pt x="5697903" y="348014"/>
+                  </a:lnTo>
+                  <a:lnTo>
+                    <a:pt x="5768248" y="349605"/>
+                  </a:lnTo>
+                  <a:lnTo>
+                    <a:pt x="5838592" y="351184"/>
+                  </a:lnTo>
+                  <a:lnTo>
+                    <a:pt x="5908937" y="352753"/>
+                  </a:lnTo>
+                  <a:lnTo>
+                    <a:pt x="5979281" y="354310"/>
+                  </a:lnTo>
+                  <a:lnTo>
+                    <a:pt x="6049626" y="355857"/>
+                  </a:lnTo>
+                  <a:lnTo>
+                    <a:pt x="6119970" y="357393"/>
+                  </a:lnTo>
+                  <a:lnTo>
+                    <a:pt x="6190315" y="358918"/>
+                  </a:lnTo>
+                  <a:lnTo>
+                    <a:pt x="6260659" y="360433"/>
+                  </a:lnTo>
+                  <a:lnTo>
+                    <a:pt x="6331004" y="361937"/>
+                  </a:lnTo>
+                  <a:lnTo>
+                    <a:pt x="6401348" y="363431"/>
+                  </a:lnTo>
+                  <a:lnTo>
+                    <a:pt x="6471693" y="364914"/>
+                  </a:lnTo>
+                  <a:lnTo>
+                    <a:pt x="6542037" y="366387"/>
+                  </a:lnTo>
+                  <a:lnTo>
+                    <a:pt x="6612382" y="367849"/>
+                  </a:lnTo>
+                  <a:lnTo>
+                    <a:pt x="6682726" y="369302"/>
+                  </a:lnTo>
+                  <a:lnTo>
+                    <a:pt x="6753071" y="370744"/>
+                  </a:lnTo>
+                  <a:lnTo>
+                    <a:pt x="6823415" y="372176"/>
+                  </a:lnTo>
+                  <a:lnTo>
+                    <a:pt x="6893760" y="373599"/>
+                  </a:lnTo>
+                  <a:lnTo>
+                    <a:pt x="6964104" y="375011"/>
                   </a:lnTo>
                 </a:path>
               </a:pathLst>
@@ -4326,312 +4036,637 @@
           </p:nvSpPr>
           <p:spPr>
             <a:xfrm>
-              <a:off x="1172049" y="4222565"/>
-              <a:ext cx="7090630" cy="895573"/>
+              <a:off x="1235312" y="2997915"/>
+              <a:ext cx="6964104" cy="277783"/>
             </a:xfrm>
             <a:custGeom>
               <a:avLst/>
               <a:pathLst>
-                <a:path w="7090630" h="895573">
+                <a:path w="6964104" h="277783">
+                  <a:moveTo>
+                    <a:pt x="6964104" y="277783"/>
+                  </a:moveTo>
+                  <a:lnTo>
+                    <a:pt x="6893760" y="275840"/>
+                  </a:lnTo>
+                  <a:lnTo>
+                    <a:pt x="6823415" y="273866"/>
+                  </a:lnTo>
+                  <a:lnTo>
+                    <a:pt x="6753071" y="271862"/>
+                  </a:lnTo>
+                  <a:lnTo>
+                    <a:pt x="6682726" y="269827"/>
+                  </a:lnTo>
+                  <a:lnTo>
+                    <a:pt x="6612382" y="267760"/>
+                  </a:lnTo>
+                  <a:lnTo>
+                    <a:pt x="6542037" y="265660"/>
+                  </a:lnTo>
+                  <a:lnTo>
+                    <a:pt x="6471693" y="263528"/>
+                  </a:lnTo>
+                  <a:lnTo>
+                    <a:pt x="6401348" y="261363"/>
+                  </a:lnTo>
+                  <a:lnTo>
+                    <a:pt x="6331004" y="259164"/>
+                  </a:lnTo>
+                  <a:lnTo>
+                    <a:pt x="6260659" y="256930"/>
+                  </a:lnTo>
+                  <a:lnTo>
+                    <a:pt x="6190315" y="254662"/>
+                  </a:lnTo>
+                  <a:lnTo>
+                    <a:pt x="6119970" y="252358"/>
+                  </a:lnTo>
+                  <a:lnTo>
+                    <a:pt x="6049626" y="250019"/>
+                  </a:lnTo>
+                  <a:lnTo>
+                    <a:pt x="5979281" y="247643"/>
+                  </a:lnTo>
+                  <a:lnTo>
+                    <a:pt x="5908937" y="245230"/>
+                  </a:lnTo>
+                  <a:lnTo>
+                    <a:pt x="5838592" y="242779"/>
+                  </a:lnTo>
+                  <a:lnTo>
+                    <a:pt x="5768248" y="240290"/>
+                  </a:lnTo>
+                  <a:lnTo>
+                    <a:pt x="5697903" y="237762"/>
+                  </a:lnTo>
+                  <a:lnTo>
+                    <a:pt x="5627559" y="235195"/>
+                  </a:lnTo>
+                  <a:lnTo>
+                    <a:pt x="5557214" y="232588"/>
+                  </a:lnTo>
+                  <a:lnTo>
+                    <a:pt x="5486870" y="229940"/>
+                  </a:lnTo>
+                  <a:lnTo>
+                    <a:pt x="5416525" y="227251"/>
+                  </a:lnTo>
+                  <a:lnTo>
+                    <a:pt x="5346181" y="224519"/>
+                  </a:lnTo>
+                  <a:lnTo>
+                    <a:pt x="5275836" y="221746"/>
+                  </a:lnTo>
+                  <a:lnTo>
+                    <a:pt x="5205492" y="218929"/>
+                  </a:lnTo>
+                  <a:lnTo>
+                    <a:pt x="5135147" y="216068"/>
+                  </a:lnTo>
+                  <a:lnTo>
+                    <a:pt x="5064803" y="213162"/>
+                  </a:lnTo>
+                  <a:lnTo>
+                    <a:pt x="4994458" y="210211"/>
+                  </a:lnTo>
+                  <a:lnTo>
+                    <a:pt x="4924114" y="207215"/>
+                  </a:lnTo>
+                  <a:lnTo>
+                    <a:pt x="4853769" y="204171"/>
+                  </a:lnTo>
+                  <a:lnTo>
+                    <a:pt x="4783425" y="201080"/>
+                  </a:lnTo>
+                  <a:lnTo>
+                    <a:pt x="4713080" y="197941"/>
+                  </a:lnTo>
+                  <a:lnTo>
+                    <a:pt x="4642736" y="194752"/>
+                  </a:lnTo>
+                  <a:lnTo>
+                    <a:pt x="4572391" y="191515"/>
+                  </a:lnTo>
+                  <a:lnTo>
+                    <a:pt x="4502047" y="188226"/>
+                  </a:lnTo>
+                  <a:lnTo>
+                    <a:pt x="4431702" y="184886"/>
+                  </a:lnTo>
+                  <a:lnTo>
+                    <a:pt x="4361358" y="181495"/>
+                  </a:lnTo>
+                  <a:lnTo>
+                    <a:pt x="4291013" y="178050"/>
+                  </a:lnTo>
+                  <a:lnTo>
+                    <a:pt x="4220669" y="174551"/>
+                  </a:lnTo>
+                  <a:lnTo>
+                    <a:pt x="4150324" y="170998"/>
+                  </a:lnTo>
+                  <a:lnTo>
+                    <a:pt x="4079980" y="167390"/>
+                  </a:lnTo>
+                  <a:lnTo>
+                    <a:pt x="4009635" y="163725"/>
+                  </a:lnTo>
+                  <a:lnTo>
+                    <a:pt x="3939291" y="160004"/>
+                  </a:lnTo>
+                  <a:lnTo>
+                    <a:pt x="3868946" y="156224"/>
+                  </a:lnTo>
+                  <a:lnTo>
+                    <a:pt x="3798602" y="152385"/>
+                  </a:lnTo>
+                  <a:lnTo>
+                    <a:pt x="3728257" y="148486"/>
+                  </a:lnTo>
+                  <a:lnTo>
+                    <a:pt x="3657913" y="144527"/>
+                  </a:lnTo>
+                  <a:lnTo>
+                    <a:pt x="3587569" y="140506"/>
+                  </a:lnTo>
+                  <a:lnTo>
+                    <a:pt x="3517224" y="136422"/>
+                  </a:lnTo>
+                  <a:lnTo>
+                    <a:pt x="3446880" y="132274"/>
+                  </a:lnTo>
+                  <a:lnTo>
+                    <a:pt x="3376535" y="128062"/>
+                  </a:lnTo>
+                  <a:lnTo>
+                    <a:pt x="3306191" y="123784"/>
+                  </a:lnTo>
+                  <a:lnTo>
+                    <a:pt x="3235846" y="119439"/>
+                  </a:lnTo>
+                  <a:lnTo>
+                    <a:pt x="3165502" y="115027"/>
+                  </a:lnTo>
+                  <a:lnTo>
+                    <a:pt x="3095157" y="110545"/>
+                  </a:lnTo>
+                  <a:lnTo>
+                    <a:pt x="3024813" y="105994"/>
+                  </a:lnTo>
+                  <a:lnTo>
+                    <a:pt x="2954468" y="102291"/>
+                  </a:lnTo>
+                  <a:lnTo>
+                    <a:pt x="2884124" y="100188"/>
+                  </a:lnTo>
+                  <a:lnTo>
+                    <a:pt x="2813779" y="98070"/>
+                  </a:lnTo>
+                  <a:lnTo>
+                    <a:pt x="2743435" y="95937"/>
+                  </a:lnTo>
+                  <a:lnTo>
+                    <a:pt x="2673090" y="93789"/>
+                  </a:lnTo>
+                  <a:lnTo>
+                    <a:pt x="2602746" y="91627"/>
+                  </a:lnTo>
+                  <a:lnTo>
+                    <a:pt x="2532401" y="89449"/>
+                  </a:lnTo>
+                  <a:lnTo>
+                    <a:pt x="2462057" y="87256"/>
+                  </a:lnTo>
+                  <a:lnTo>
+                    <a:pt x="2391712" y="85047"/>
+                  </a:lnTo>
+                  <a:lnTo>
+                    <a:pt x="2321368" y="82824"/>
+                  </a:lnTo>
+                  <a:lnTo>
+                    <a:pt x="2251023" y="80584"/>
+                  </a:lnTo>
+                  <a:lnTo>
+                    <a:pt x="2180679" y="78329"/>
+                  </a:lnTo>
+                  <a:lnTo>
+                    <a:pt x="2110334" y="76058"/>
+                  </a:lnTo>
+                  <a:lnTo>
+                    <a:pt x="2039990" y="73771"/>
+                  </a:lnTo>
+                  <a:lnTo>
+                    <a:pt x="1969645" y="71468"/>
+                  </a:lnTo>
+                  <a:lnTo>
+                    <a:pt x="1899301" y="69149"/>
+                  </a:lnTo>
+                  <a:lnTo>
+                    <a:pt x="1828956" y="66813"/>
+                  </a:lnTo>
+                  <a:lnTo>
+                    <a:pt x="1758612" y="64462"/>
+                  </a:lnTo>
+                  <a:lnTo>
+                    <a:pt x="1688267" y="62094"/>
+                  </a:lnTo>
+                  <a:lnTo>
+                    <a:pt x="1617923" y="59709"/>
+                  </a:lnTo>
+                  <a:lnTo>
+                    <a:pt x="1547578" y="57307"/>
+                  </a:lnTo>
+                  <a:lnTo>
+                    <a:pt x="1477234" y="54889"/>
+                  </a:lnTo>
+                  <a:lnTo>
+                    <a:pt x="1406889" y="52454"/>
+                  </a:lnTo>
+                  <a:lnTo>
+                    <a:pt x="1336545" y="50001"/>
+                  </a:lnTo>
+                  <a:lnTo>
+                    <a:pt x="1266200" y="47532"/>
+                  </a:lnTo>
+                  <a:lnTo>
+                    <a:pt x="1195856" y="45045"/>
+                  </a:lnTo>
+                  <a:lnTo>
+                    <a:pt x="1125511" y="42541"/>
+                  </a:lnTo>
+                  <a:lnTo>
+                    <a:pt x="1055167" y="40019"/>
+                  </a:lnTo>
+                  <a:lnTo>
+                    <a:pt x="984822" y="37479"/>
+                  </a:lnTo>
+                  <a:lnTo>
+                    <a:pt x="914478" y="34922"/>
+                  </a:lnTo>
+                  <a:lnTo>
+                    <a:pt x="844133" y="32347"/>
+                  </a:lnTo>
+                  <a:lnTo>
+                    <a:pt x="773789" y="29753"/>
+                  </a:lnTo>
+                  <a:lnTo>
+                    <a:pt x="703444" y="27142"/>
+                  </a:lnTo>
+                  <a:lnTo>
+                    <a:pt x="633100" y="24512"/>
+                  </a:lnTo>
+                  <a:lnTo>
+                    <a:pt x="562755" y="21864"/>
+                  </a:lnTo>
+                  <a:lnTo>
+                    <a:pt x="492411" y="19197"/>
+                  </a:lnTo>
+                  <a:lnTo>
+                    <a:pt x="422066" y="16512"/>
+                  </a:lnTo>
+                  <a:lnTo>
+                    <a:pt x="351722" y="13808"/>
+                  </a:lnTo>
+                  <a:lnTo>
+                    <a:pt x="281377" y="11084"/>
+                  </a:lnTo>
+                  <a:lnTo>
+                    <a:pt x="211033" y="8342"/>
+                  </a:lnTo>
+                  <a:lnTo>
+                    <a:pt x="140688" y="5581"/>
+                  </a:lnTo>
+                  <a:lnTo>
+                    <a:pt x="70344" y="2800"/>
+                  </a:lnTo>
+                  <a:lnTo>
+                    <a:pt x="0" y="0"/>
+                  </a:lnTo>
+                </a:path>
+              </a:pathLst>
+            </a:custGeom>
+          </p:spPr>
+          <p:txBody>
+            <a:bodyPr/>
+            <a:lstStyle/>
+            <a:p/>
+          </p:txBody>
+        </p:sp>
+        <p:sp>
+          <p:nvSpPr>
+            <p:cNvPr id="26" name="pl26"/>
+            <p:cNvSpPr/>
+            <p:nvPr/>
+          </p:nvSpPr>
+          <p:spPr>
+            <a:xfrm>
+              <a:off x="1235312" y="2918638"/>
+              <a:ext cx="6964104" cy="323191"/>
+            </a:xfrm>
+            <a:custGeom>
+              <a:avLst/>
+              <a:pathLst>
+                <a:path w="6964104" h="323191">
                   <a:moveTo>
                     <a:pt x="0" y="0"/>
                   </a:moveTo>
                   <a:lnTo>
-                    <a:pt x="71622" y="14903"/>
-                  </a:lnTo>
-                  <a:lnTo>
-                    <a:pt x="143245" y="29640"/>
-                  </a:lnTo>
-                  <a:lnTo>
-                    <a:pt x="214867" y="44213"/>
-                  </a:lnTo>
-                  <a:lnTo>
-                    <a:pt x="286490" y="58623"/>
-                  </a:lnTo>
-                  <a:lnTo>
-                    <a:pt x="358112" y="72872"/>
-                  </a:lnTo>
-                  <a:lnTo>
-                    <a:pt x="429735" y="86962"/>
-                  </a:lnTo>
-                  <a:lnTo>
-                    <a:pt x="501357" y="100895"/>
-                  </a:lnTo>
-                  <a:lnTo>
-                    <a:pt x="572980" y="114672"/>
-                  </a:lnTo>
-                  <a:lnTo>
-                    <a:pt x="644602" y="128295"/>
-                  </a:lnTo>
-                  <a:lnTo>
-                    <a:pt x="716225" y="141766"/>
-                  </a:lnTo>
-                  <a:lnTo>
-                    <a:pt x="787847" y="155087"/>
-                  </a:lnTo>
-                  <a:lnTo>
-                    <a:pt x="859470" y="168259"/>
-                  </a:lnTo>
-                  <a:lnTo>
-                    <a:pt x="931092" y="181284"/>
-                  </a:lnTo>
-                  <a:lnTo>
-                    <a:pt x="1002715" y="194163"/>
-                  </a:lnTo>
-                  <a:lnTo>
-                    <a:pt x="1074337" y="206899"/>
-                  </a:lnTo>
-                  <a:lnTo>
-                    <a:pt x="1145960" y="219492"/>
-                  </a:lnTo>
-                  <a:lnTo>
-                    <a:pt x="1217582" y="231945"/>
-                  </a:lnTo>
-                  <a:lnTo>
-                    <a:pt x="1289205" y="244258"/>
-                  </a:lnTo>
-                  <a:lnTo>
-                    <a:pt x="1360827" y="256435"/>
-                  </a:lnTo>
-                  <a:lnTo>
-                    <a:pt x="1432450" y="268475"/>
-                  </a:lnTo>
-                  <a:lnTo>
-                    <a:pt x="1504073" y="280381"/>
-                  </a:lnTo>
-                  <a:lnTo>
-                    <a:pt x="1575695" y="292153"/>
-                  </a:lnTo>
-                  <a:lnTo>
-                    <a:pt x="1647318" y="303795"/>
-                  </a:lnTo>
-                  <a:lnTo>
-                    <a:pt x="1718940" y="315306"/>
-                  </a:lnTo>
-                  <a:lnTo>
-                    <a:pt x="1790563" y="326689"/>
-                  </a:lnTo>
-                  <a:lnTo>
-                    <a:pt x="1862185" y="337945"/>
-                  </a:lnTo>
-                  <a:lnTo>
-                    <a:pt x="1933808" y="349075"/>
-                  </a:lnTo>
-                  <a:lnTo>
-                    <a:pt x="2005430" y="360080"/>
-                  </a:lnTo>
-                  <a:lnTo>
-                    <a:pt x="2077053" y="370963"/>
-                  </a:lnTo>
-                  <a:lnTo>
-                    <a:pt x="2148675" y="381725"/>
-                  </a:lnTo>
-                  <a:lnTo>
-                    <a:pt x="2220298" y="392366"/>
-                  </a:lnTo>
-                  <a:lnTo>
-                    <a:pt x="2291920" y="402888"/>
-                  </a:lnTo>
-                  <a:lnTo>
-                    <a:pt x="2363543" y="413293"/>
-                  </a:lnTo>
-                  <a:lnTo>
-                    <a:pt x="2435165" y="423582"/>
-                  </a:lnTo>
-                  <a:lnTo>
-                    <a:pt x="2506788" y="433755"/>
-                  </a:lnTo>
-                  <a:lnTo>
-                    <a:pt x="2578410" y="443816"/>
-                  </a:lnTo>
-                  <a:lnTo>
-                    <a:pt x="2650033" y="453764"/>
-                  </a:lnTo>
-                  <a:lnTo>
-                    <a:pt x="2721655" y="463600"/>
-                  </a:lnTo>
-                  <a:lnTo>
-                    <a:pt x="2793278" y="473327"/>
-                  </a:lnTo>
-                  <a:lnTo>
-                    <a:pt x="2864901" y="482945"/>
-                  </a:lnTo>
-                  <a:lnTo>
-                    <a:pt x="2936523" y="492456"/>
-                  </a:lnTo>
-                  <a:lnTo>
-                    <a:pt x="3008146" y="501861"/>
-                  </a:lnTo>
-                  <a:lnTo>
-                    <a:pt x="3079768" y="511161"/>
-                  </a:lnTo>
-                  <a:lnTo>
-                    <a:pt x="3151391" y="520357"/>
-                  </a:lnTo>
-                  <a:lnTo>
-                    <a:pt x="3223013" y="529450"/>
-                  </a:lnTo>
-                  <a:lnTo>
-                    <a:pt x="3294636" y="538441"/>
-                  </a:lnTo>
-                  <a:lnTo>
-                    <a:pt x="3366258" y="547333"/>
-                  </a:lnTo>
-                  <a:lnTo>
-                    <a:pt x="3437881" y="556124"/>
-                  </a:lnTo>
-                  <a:lnTo>
-                    <a:pt x="3509503" y="564818"/>
-                  </a:lnTo>
-                  <a:lnTo>
-                    <a:pt x="3581126" y="573415"/>
-                  </a:lnTo>
-                  <a:lnTo>
-                    <a:pt x="3652748" y="581916"/>
-                  </a:lnTo>
-                  <a:lnTo>
-                    <a:pt x="3724371" y="590321"/>
-                  </a:lnTo>
-                  <a:lnTo>
-                    <a:pt x="3795993" y="598633"/>
-                  </a:lnTo>
-                  <a:lnTo>
-                    <a:pt x="3867616" y="606852"/>
-                  </a:lnTo>
-                  <a:lnTo>
-                    <a:pt x="3939238" y="614980"/>
-                  </a:lnTo>
-                  <a:lnTo>
-                    <a:pt x="4010861" y="623016"/>
-                  </a:lnTo>
-                  <a:lnTo>
-                    <a:pt x="4082483" y="630963"/>
-                  </a:lnTo>
-                  <a:lnTo>
-                    <a:pt x="4154106" y="638821"/>
-                  </a:lnTo>
-                  <a:lnTo>
-                    <a:pt x="4225729" y="646591"/>
-                  </a:lnTo>
-                  <a:lnTo>
-                    <a:pt x="4297351" y="654275"/>
-                  </a:lnTo>
-                  <a:lnTo>
-                    <a:pt x="4368974" y="661873"/>
-                  </a:lnTo>
-                  <a:lnTo>
-                    <a:pt x="4440596" y="669386"/>
-                  </a:lnTo>
-                  <a:lnTo>
-                    <a:pt x="4512219" y="676815"/>
-                  </a:lnTo>
-                  <a:lnTo>
-                    <a:pt x="4583841" y="684161"/>
-                  </a:lnTo>
-                  <a:lnTo>
-                    <a:pt x="4655464" y="691425"/>
-                  </a:lnTo>
-                  <a:lnTo>
-                    <a:pt x="4727086" y="698608"/>
-                  </a:lnTo>
-                  <a:lnTo>
-                    <a:pt x="4798709" y="705710"/>
-                  </a:lnTo>
-                  <a:lnTo>
-                    <a:pt x="4870331" y="712734"/>
-                  </a:lnTo>
-                  <a:lnTo>
-                    <a:pt x="4941954" y="719679"/>
-                  </a:lnTo>
-                  <a:lnTo>
-                    <a:pt x="5013576" y="726546"/>
-                  </a:lnTo>
-                  <a:lnTo>
-                    <a:pt x="5085199" y="733337"/>
-                  </a:lnTo>
-                  <a:lnTo>
-                    <a:pt x="5156821" y="740052"/>
-                  </a:lnTo>
-                  <a:lnTo>
-                    <a:pt x="5228444" y="746692"/>
-                  </a:lnTo>
-                  <a:lnTo>
-                    <a:pt x="5300066" y="753258"/>
-                  </a:lnTo>
-                  <a:lnTo>
-                    <a:pt x="5371689" y="759750"/>
-                  </a:lnTo>
-                  <a:lnTo>
-                    <a:pt x="5443311" y="766170"/>
-                  </a:lnTo>
-                  <a:lnTo>
-                    <a:pt x="5514934" y="772518"/>
-                  </a:lnTo>
-                  <a:lnTo>
-                    <a:pt x="5586557" y="778796"/>
-                  </a:lnTo>
-                  <a:lnTo>
-                    <a:pt x="5658179" y="785003"/>
-                  </a:lnTo>
-                  <a:lnTo>
-                    <a:pt x="5729802" y="791141"/>
-                  </a:lnTo>
-                  <a:lnTo>
-                    <a:pt x="5801424" y="797210"/>
-                  </a:lnTo>
-                  <a:lnTo>
-                    <a:pt x="5873047" y="803212"/>
-                  </a:lnTo>
-                  <a:lnTo>
-                    <a:pt x="5944669" y="809147"/>
-                  </a:lnTo>
-                  <a:lnTo>
-                    <a:pt x="6016292" y="815015"/>
-                  </a:lnTo>
-                  <a:lnTo>
-                    <a:pt x="6087914" y="820818"/>
-                  </a:lnTo>
-                  <a:lnTo>
-                    <a:pt x="6159537" y="826556"/>
-                  </a:lnTo>
-                  <a:lnTo>
-                    <a:pt x="6231159" y="832230"/>
-                  </a:lnTo>
-                  <a:lnTo>
-                    <a:pt x="6302782" y="837841"/>
-                  </a:lnTo>
-                  <a:lnTo>
-                    <a:pt x="6374404" y="843389"/>
-                  </a:lnTo>
-                  <a:lnTo>
-                    <a:pt x="6446027" y="848875"/>
-                  </a:lnTo>
-                  <a:lnTo>
-                    <a:pt x="6517649" y="854299"/>
-                  </a:lnTo>
-                  <a:lnTo>
-                    <a:pt x="6589272" y="859664"/>
-                  </a:lnTo>
-                  <a:lnTo>
-                    <a:pt x="6660894" y="864968"/>
-                  </a:lnTo>
-                  <a:lnTo>
-                    <a:pt x="6732517" y="870213"/>
-                  </a:lnTo>
-                  <a:lnTo>
-                    <a:pt x="6804139" y="875399"/>
-                  </a:lnTo>
-                  <a:lnTo>
-                    <a:pt x="6875762" y="880528"/>
-                  </a:lnTo>
-                  <a:lnTo>
-                    <a:pt x="6947385" y="885599"/>
-                  </a:lnTo>
-                  <a:lnTo>
-                    <a:pt x="7019007" y="890614"/>
-                  </a:lnTo>
-                  <a:lnTo>
-                    <a:pt x="7090630" y="895573"/>
+                    <a:pt x="70344" y="5378"/>
+                  </a:lnTo>
+                  <a:lnTo>
+                    <a:pt x="140688" y="10696"/>
+                  </a:lnTo>
+                  <a:lnTo>
+                    <a:pt x="211033" y="15955"/>
+                  </a:lnTo>
+                  <a:lnTo>
+                    <a:pt x="281377" y="21155"/>
+                  </a:lnTo>
+                  <a:lnTo>
+                    <a:pt x="351722" y="26298"/>
+                  </a:lnTo>
+                  <a:lnTo>
+                    <a:pt x="422066" y="31382"/>
+                  </a:lnTo>
+                  <a:lnTo>
+                    <a:pt x="492411" y="36410"/>
+                  </a:lnTo>
+                  <a:lnTo>
+                    <a:pt x="562755" y="41382"/>
+                  </a:lnTo>
+                  <a:lnTo>
+                    <a:pt x="633100" y="46298"/>
+                  </a:lnTo>
+                  <a:lnTo>
+                    <a:pt x="703444" y="51160"/>
+                  </a:lnTo>
+                  <a:lnTo>
+                    <a:pt x="773789" y="55967"/>
+                  </a:lnTo>
+                  <a:lnTo>
+                    <a:pt x="844133" y="60720"/>
+                  </a:lnTo>
+                  <a:lnTo>
+                    <a:pt x="914478" y="65421"/>
+                  </a:lnTo>
+                  <a:lnTo>
+                    <a:pt x="984822" y="70069"/>
+                  </a:lnTo>
+                  <a:lnTo>
+                    <a:pt x="1055167" y="74664"/>
+                  </a:lnTo>
+                  <a:lnTo>
+                    <a:pt x="1125511" y="79209"/>
+                  </a:lnTo>
+                  <a:lnTo>
+                    <a:pt x="1195856" y="83703"/>
+                  </a:lnTo>
+                  <a:lnTo>
+                    <a:pt x="1266200" y="88147"/>
+                  </a:lnTo>
+                  <a:lnTo>
+                    <a:pt x="1336545" y="92541"/>
+                  </a:lnTo>
+                  <a:lnTo>
+                    <a:pt x="1406889" y="96886"/>
+                  </a:lnTo>
+                  <a:lnTo>
+                    <a:pt x="1477234" y="101182"/>
+                  </a:lnTo>
+                  <a:lnTo>
+                    <a:pt x="1547578" y="105431"/>
+                  </a:lnTo>
+                  <a:lnTo>
+                    <a:pt x="1617923" y="109632"/>
+                  </a:lnTo>
+                  <a:lnTo>
+                    <a:pt x="1688267" y="113786"/>
+                  </a:lnTo>
+                  <a:lnTo>
+                    <a:pt x="1758612" y="117894"/>
+                  </a:lnTo>
+                  <a:lnTo>
+                    <a:pt x="1828956" y="121956"/>
+                  </a:lnTo>
+                  <a:lnTo>
+                    <a:pt x="1899301" y="125973"/>
+                  </a:lnTo>
+                  <a:lnTo>
+                    <a:pt x="1969645" y="129944"/>
+                  </a:lnTo>
+                  <a:lnTo>
+                    <a:pt x="2039990" y="133872"/>
+                  </a:lnTo>
+                  <a:lnTo>
+                    <a:pt x="2110334" y="137755"/>
+                  </a:lnTo>
+                  <a:lnTo>
+                    <a:pt x="2180679" y="141595"/>
+                  </a:lnTo>
+                  <a:lnTo>
+                    <a:pt x="2251023" y="145393"/>
+                  </a:lnTo>
+                  <a:lnTo>
+                    <a:pt x="2321368" y="149147"/>
+                  </a:lnTo>
+                  <a:lnTo>
+                    <a:pt x="2391712" y="152860"/>
+                  </a:lnTo>
+                  <a:lnTo>
+                    <a:pt x="2462057" y="156532"/>
+                  </a:lnTo>
+                  <a:lnTo>
+                    <a:pt x="2532401" y="160162"/>
+                  </a:lnTo>
+                  <a:lnTo>
+                    <a:pt x="2602746" y="163752"/>
+                  </a:lnTo>
+                  <a:lnTo>
+                    <a:pt x="2673090" y="167302"/>
+                  </a:lnTo>
+                  <a:lnTo>
+                    <a:pt x="2743435" y="170812"/>
+                  </a:lnTo>
+                  <a:lnTo>
+                    <a:pt x="2813779" y="174283"/>
+                  </a:lnTo>
+                  <a:lnTo>
+                    <a:pt x="2884124" y="177716"/>
+                  </a:lnTo>
+                  <a:lnTo>
+                    <a:pt x="2954468" y="181110"/>
+                  </a:lnTo>
+                  <a:lnTo>
+                    <a:pt x="3024813" y="184466"/>
+                  </a:lnTo>
+                  <a:lnTo>
+                    <a:pt x="3095157" y="187784"/>
+                  </a:lnTo>
+                  <a:lnTo>
+                    <a:pt x="3165502" y="191066"/>
+                  </a:lnTo>
+                  <a:lnTo>
+                    <a:pt x="3235846" y="194310"/>
+                  </a:lnTo>
+                  <a:lnTo>
+                    <a:pt x="3306191" y="197519"/>
+                  </a:lnTo>
+                  <a:lnTo>
+                    <a:pt x="3376535" y="200692"/>
+                  </a:lnTo>
+                  <a:lnTo>
+                    <a:pt x="3446880" y="203829"/>
+                  </a:lnTo>
+                  <a:lnTo>
+                    <a:pt x="3517224" y="206932"/>
+                  </a:lnTo>
+                  <a:lnTo>
+                    <a:pt x="3587569" y="209999"/>
+                  </a:lnTo>
+                  <a:lnTo>
+                    <a:pt x="3657913" y="213033"/>
+                  </a:lnTo>
+                  <a:lnTo>
+                    <a:pt x="3728257" y="216032"/>
+                  </a:lnTo>
+                  <a:lnTo>
+                    <a:pt x="3798602" y="218998"/>
+                  </a:lnTo>
+                  <a:lnTo>
+                    <a:pt x="3868946" y="221931"/>
+                  </a:lnTo>
+                  <a:lnTo>
+                    <a:pt x="3939291" y="224832"/>
+                  </a:lnTo>
+                  <a:lnTo>
+                    <a:pt x="4009635" y="227699"/>
+                  </a:lnTo>
+                  <a:lnTo>
+                    <a:pt x="4079980" y="230535"/>
+                  </a:lnTo>
+                  <a:lnTo>
+                    <a:pt x="4150324" y="233339"/>
+                  </a:lnTo>
+                  <a:lnTo>
+                    <a:pt x="4220669" y="236112"/>
+                  </a:lnTo>
+                  <a:lnTo>
+                    <a:pt x="4291013" y="238854"/>
+                  </a:lnTo>
+                  <a:lnTo>
+                    <a:pt x="4361358" y="241565"/>
+                  </a:lnTo>
+                  <a:lnTo>
+                    <a:pt x="4431702" y="244246"/>
+                  </a:lnTo>
+                  <a:lnTo>
+                    <a:pt x="4502047" y="246897"/>
+                  </a:lnTo>
+                  <a:lnTo>
+                    <a:pt x="4572391" y="249519"/>
+                  </a:lnTo>
+                  <a:lnTo>
+                    <a:pt x="4642736" y="252111"/>
+                  </a:lnTo>
+                  <a:lnTo>
+                    <a:pt x="4713080" y="254674"/>
+                  </a:lnTo>
+                  <a:lnTo>
+                    <a:pt x="4783425" y="257209"/>
+                  </a:lnTo>
+                  <a:lnTo>
+                    <a:pt x="4853769" y="259715"/>
+                  </a:lnTo>
+                  <a:lnTo>
+                    <a:pt x="4924114" y="262193"/>
+                  </a:lnTo>
+                  <a:lnTo>
+                    <a:pt x="4994458" y="264644"/>
+                  </a:lnTo>
+                  <a:lnTo>
+                    <a:pt x="5064803" y="267067"/>
+                  </a:lnTo>
+                  <a:lnTo>
+                    <a:pt x="5135147" y="269463"/>
+                  </a:lnTo>
+                  <a:lnTo>
+                    <a:pt x="5205492" y="271833"/>
+                  </a:lnTo>
+                  <a:lnTo>
+                    <a:pt x="5275836" y="274176"/>
+                  </a:lnTo>
+                  <a:lnTo>
+                    <a:pt x="5346181" y="276492"/>
+                  </a:lnTo>
+                  <a:lnTo>
+                    <a:pt x="5416525" y="278783"/>
+                  </a:lnTo>
+                  <a:lnTo>
+                    <a:pt x="5486870" y="281049"/>
+                  </a:lnTo>
+                  <a:lnTo>
+                    <a:pt x="5557214" y="283289"/>
+                  </a:lnTo>
+                  <a:lnTo>
+                    <a:pt x="5627559" y="285504"/>
+                  </a:lnTo>
+                  <a:lnTo>
+                    <a:pt x="5697903" y="287694"/>
+                  </a:lnTo>
+                  <a:lnTo>
+                    <a:pt x="5768248" y="289860"/>
+                  </a:lnTo>
+                  <a:lnTo>
+                    <a:pt x="5838592" y="292002"/>
+                  </a:lnTo>
+                  <a:lnTo>
+                    <a:pt x="5908937" y="294119"/>
+                  </a:lnTo>
+                  <a:lnTo>
+                    <a:pt x="5979281" y="296214"/>
+                  </a:lnTo>
+                  <a:lnTo>
+                    <a:pt x="6049626" y="298284"/>
+                  </a:lnTo>
+                  <a:lnTo>
+                    <a:pt x="6119970" y="300332"/>
+                  </a:lnTo>
+                  <a:lnTo>
+                    <a:pt x="6190315" y="302357"/>
+                  </a:lnTo>
+                  <a:lnTo>
+                    <a:pt x="6260659" y="304359"/>
+                  </a:lnTo>
+                  <a:lnTo>
+                    <a:pt x="6331004" y="306339"/>
+                  </a:lnTo>
+                  <a:lnTo>
+                    <a:pt x="6401348" y="308296"/>
+                  </a:lnTo>
+                  <a:lnTo>
+                    <a:pt x="6471693" y="310232"/>
+                  </a:lnTo>
+                  <a:lnTo>
+                    <a:pt x="6542037" y="312146"/>
+                  </a:lnTo>
+                  <a:lnTo>
+                    <a:pt x="6612382" y="314039"/>
+                  </a:lnTo>
+                  <a:lnTo>
+                    <a:pt x="6682726" y="315911"/>
+                  </a:lnTo>
+                  <a:lnTo>
+                    <a:pt x="6753071" y="317762"/>
+                  </a:lnTo>
+                  <a:lnTo>
+                    <a:pt x="6823415" y="319592"/>
+                  </a:lnTo>
+                  <a:lnTo>
+                    <a:pt x="6893760" y="321401"/>
+                  </a:lnTo>
+                  <a:lnTo>
+                    <a:pt x="6964104" y="323191"/>
                   </a:lnTo>
                 </a:path>
               </a:pathLst>
@@ -4654,27 +4689,27 @@
         </p:sp>
         <p:sp>
           <p:nvSpPr>
-            <p:cNvPr id="26" name="pl26"/>
+            <p:cNvPr id="27" name="pl27"/>
             <p:cNvSpPr/>
             <p:nvPr/>
           </p:nvSpPr>
           <p:spPr>
             <a:xfrm>
-              <a:off x="817517" y="4727786"/>
-              <a:ext cx="7799693" cy="0"/>
+              <a:off x="887106" y="3100960"/>
+              <a:ext cx="7660515" cy="0"/>
             </a:xfrm>
             <a:custGeom>
               <a:avLst/>
               <a:pathLst>
-                <a:path w="7799693" h="0">
+                <a:path w="7660515" h="0">
                   <a:moveTo>
                     <a:pt x="0" y="0"/>
                   </a:moveTo>
                   <a:lnTo>
-                    <a:pt x="7799693" y="0"/>
-                  </a:lnTo>
-                  <a:lnTo>
-                    <a:pt x="7799693" y="0"/>
+                    <a:pt x="7660515" y="0"/>
+                  </a:lnTo>
+                  <a:lnTo>
+                    <a:pt x="7660515" y="0"/>
                   </a:lnTo>
                 </a:path>
               </a:pathLst>
@@ -4697,21 +4732,21 @@
         </p:sp>
         <p:sp>
           <p:nvSpPr>
-            <p:cNvPr id="27" name="pl27"/>
+            <p:cNvPr id="28" name="pl28"/>
             <p:cNvSpPr/>
             <p:nvPr/>
           </p:nvSpPr>
           <p:spPr>
             <a:xfrm>
-              <a:off x="4205975" y="2073503"/>
-              <a:ext cx="0" cy="3649639"/>
+              <a:off x="4215100" y="2143092"/>
+              <a:ext cx="0" cy="1317069"/>
             </a:xfrm>
             <a:custGeom>
               <a:avLst/>
               <a:pathLst>
-                <a:path w="0" h="3649639">
+                <a:path w="0" h="1317069">
                   <a:moveTo>
-                    <a:pt x="0" y="3649639"/>
+                    <a:pt x="0" y="1317069"/>
                   </a:moveTo>
                   <a:lnTo>
                     <a:pt x="0" y="0"/>
@@ -4740,21 +4775,21 @@
         </p:sp>
         <p:sp>
           <p:nvSpPr>
-            <p:cNvPr id="28" name="pl28"/>
+            <p:cNvPr id="29" name="pl29"/>
             <p:cNvSpPr/>
             <p:nvPr/>
           </p:nvSpPr>
           <p:spPr>
             <a:xfrm>
-              <a:off x="3016442" y="2073503"/>
-              <a:ext cx="0" cy="3649639"/>
+              <a:off x="3046793" y="2143092"/>
+              <a:ext cx="0" cy="1317069"/>
             </a:xfrm>
             <a:custGeom>
               <a:avLst/>
               <a:pathLst>
-                <a:path w="0" h="3649639">
+                <a:path w="0" h="1317069">
                   <a:moveTo>
-                    <a:pt x="0" y="3649639"/>
+                    <a:pt x="0" y="1317069"/>
                   </a:moveTo>
                   <a:lnTo>
                     <a:pt x="0" y="0"/>
@@ -4783,21 +4818,21 @@
         </p:sp>
         <p:sp>
           <p:nvSpPr>
-            <p:cNvPr id="29" name="pl29"/>
+            <p:cNvPr id="30" name="pl30"/>
             <p:cNvSpPr/>
             <p:nvPr/>
           </p:nvSpPr>
           <p:spPr>
             <a:xfrm>
-              <a:off x="5421760" y="2073503"/>
-              <a:ext cx="0" cy="3649639"/>
+              <a:off x="5409191" y="2143092"/>
+              <a:ext cx="0" cy="1317069"/>
             </a:xfrm>
             <a:custGeom>
               <a:avLst/>
               <a:pathLst>
-                <a:path w="0" h="3649639">
+                <a:path w="0" h="1317069">
                   <a:moveTo>
-                    <a:pt x="0" y="3649639"/>
+                    <a:pt x="0" y="1317069"/>
                   </a:moveTo>
                   <a:lnTo>
                     <a:pt x="0" y="0"/>
@@ -4826,13 +4861,13 @@
         </p:sp>
         <p:sp>
           <p:nvSpPr>
-            <p:cNvPr id="30" name="tx30"/>
+            <p:cNvPr id="31" name="tx31"/>
             <p:cNvSpPr/>
             <p:nvPr/>
           </p:nvSpPr>
           <p:spPr>
             <a:xfrm>
-              <a:off x="692708" y="5517199"/>
+              <a:off x="762297" y="3360243"/>
               <a:ext cx="62179" cy="80101"/>
             </a:xfrm>
             <a:prstGeom prst="rect">
@@ -4872,13 +4907,13 @@
         </p:sp>
         <p:sp>
           <p:nvSpPr>
-            <p:cNvPr id="31" name="tx31"/>
+            <p:cNvPr id="32" name="tx32"/>
             <p:cNvSpPr/>
             <p:nvPr/>
           </p:nvSpPr>
           <p:spPr>
             <a:xfrm>
-              <a:off x="692708" y="4687735"/>
+              <a:off x="762297" y="3060909"/>
               <a:ext cx="62179" cy="80101"/>
             </a:xfrm>
             <a:prstGeom prst="rect">
@@ -4918,13 +4953,13 @@
         </p:sp>
         <p:sp>
           <p:nvSpPr>
-            <p:cNvPr id="32" name="tx32"/>
+            <p:cNvPr id="33" name="tx33"/>
             <p:cNvSpPr/>
             <p:nvPr/>
           </p:nvSpPr>
           <p:spPr>
             <a:xfrm>
-              <a:off x="692708" y="3858272"/>
+              <a:off x="762297" y="2761575"/>
               <a:ext cx="62179" cy="80101"/>
             </a:xfrm>
             <a:prstGeom prst="rect">
@@ -4964,13 +4999,13 @@
         </p:sp>
         <p:sp>
           <p:nvSpPr>
-            <p:cNvPr id="33" name="tx33"/>
+            <p:cNvPr id="34" name="tx34"/>
             <p:cNvSpPr/>
             <p:nvPr/>
           </p:nvSpPr>
           <p:spPr>
             <a:xfrm>
-              <a:off x="692708" y="3028808"/>
+              <a:off x="762297" y="2462242"/>
               <a:ext cx="62179" cy="80101"/>
             </a:xfrm>
             <a:prstGeom prst="rect">
@@ -5010,13 +5045,13 @@
         </p:sp>
         <p:sp>
           <p:nvSpPr>
-            <p:cNvPr id="34" name="tx34"/>
+            <p:cNvPr id="35" name="tx35"/>
             <p:cNvSpPr/>
             <p:nvPr/>
           </p:nvSpPr>
           <p:spPr>
             <a:xfrm>
-              <a:off x="692708" y="2199345"/>
+              <a:off x="762297" y="2162908"/>
               <a:ext cx="62179" cy="80101"/>
             </a:xfrm>
             <a:prstGeom prst="rect">
@@ -5056,13 +5091,13 @@
         </p:sp>
         <p:sp>
           <p:nvSpPr>
-            <p:cNvPr id="35" name="tx35"/>
+            <p:cNvPr id="36" name="tx36"/>
             <p:cNvSpPr/>
             <p:nvPr/>
           </p:nvSpPr>
           <p:spPr>
             <a:xfrm>
-              <a:off x="1977028" y="5785772"/>
+              <a:off x="2024485" y="3522791"/>
               <a:ext cx="161574" cy="80101"/>
             </a:xfrm>
             <a:prstGeom prst="rect">
@@ -5102,13 +5137,13 @@
         </p:sp>
         <p:sp>
           <p:nvSpPr>
-            <p:cNvPr id="36" name="tx36"/>
+            <p:cNvPr id="37" name="tx37"/>
             <p:cNvSpPr/>
             <p:nvPr/>
           </p:nvSpPr>
           <p:spPr>
             <a:xfrm>
-              <a:off x="3728813" y="5785772"/>
+              <a:off x="3745012" y="3522791"/>
               <a:ext cx="161574" cy="80101"/>
             </a:xfrm>
             <a:prstGeom prst="rect">
@@ -5148,13 +5183,13 @@
         </p:sp>
         <p:sp>
           <p:nvSpPr>
-            <p:cNvPr id="37" name="tx37"/>
+            <p:cNvPr id="38" name="tx38"/>
             <p:cNvSpPr/>
             <p:nvPr/>
           </p:nvSpPr>
           <p:spPr>
             <a:xfrm>
-              <a:off x="5530296" y="5785772"/>
+              <a:off x="5515235" y="3522791"/>
               <a:ext cx="62179" cy="80101"/>
             </a:xfrm>
             <a:prstGeom prst="rect">
@@ -5194,13 +5229,13 @@
         </p:sp>
         <p:sp>
           <p:nvSpPr>
-            <p:cNvPr id="38" name="tx38"/>
+            <p:cNvPr id="39" name="tx39"/>
             <p:cNvSpPr/>
             <p:nvPr/>
           </p:nvSpPr>
           <p:spPr>
             <a:xfrm>
-              <a:off x="7250992" y="5785772"/>
+              <a:off x="7204672" y="3522791"/>
               <a:ext cx="124358" cy="80101"/>
             </a:xfrm>
             <a:prstGeom prst="rect">
@@ -5240,13 +5275,13 @@
         </p:sp>
         <p:sp>
           <p:nvSpPr>
-            <p:cNvPr id="39" name="tx39"/>
+            <p:cNvPr id="40" name="tx40"/>
             <p:cNvSpPr/>
             <p:nvPr/>
           </p:nvSpPr>
           <p:spPr>
             <a:xfrm>
-              <a:off x="1561815" y="5925448"/>
+              <a:off x="1561815" y="3662467"/>
               <a:ext cx="6311097" cy="100218"/>
             </a:xfrm>
             <a:prstGeom prst="rect">
@@ -5286,13 +5321,13 @@
         </p:sp>
         <p:sp>
           <p:nvSpPr>
-            <p:cNvPr id="40" name="tx40"/>
+            <p:cNvPr id="41" name="tx41"/>
             <p:cNvSpPr/>
             <p:nvPr/>
           </p:nvSpPr>
           <p:spPr>
             <a:xfrm rot="-5400000">
-              <a:off x="68446" y="3848213"/>
+              <a:off x="138035" y="2751517"/>
               <a:ext cx="1016904" cy="100218"/>
             </a:xfrm>
             <a:prstGeom prst="rect">
@@ -5332,13 +5367,13 @@
         </p:sp>
         <p:sp>
           <p:nvSpPr>
-            <p:cNvPr id="41" name="tx41"/>
+            <p:cNvPr id="42" name="tx42"/>
             <p:cNvSpPr/>
             <p:nvPr/>
           </p:nvSpPr>
           <p:spPr>
             <a:xfrm>
-              <a:off x="817517" y="1896563"/>
+              <a:off x="887106" y="1966152"/>
               <a:ext cx="7026615" cy="82021"/>
             </a:xfrm>
             <a:prstGeom prst="rect">
@@ -5378,13 +5413,3746 @@
         </p:sp>
         <p:sp>
           <p:nvSpPr>
-            <p:cNvPr id="42" name="tx42"/>
+            <p:cNvPr id="43" name="tx43"/>
             <p:cNvSpPr/>
             <p:nvPr/>
           </p:nvSpPr>
           <p:spPr>
             <a:xfrm>
-              <a:off x="817517" y="1669789"/>
+              <a:off x="887106" y="1739378"/>
+              <a:ext cx="2718602" cy="120152"/>
+            </a:xfrm>
+            <a:prstGeom prst="rect">
+              <a:avLst/>
+            </a:prstGeom>
+            <a:noFill/>
+          </p:spPr>
+          <p:txBody>
+            <a:bodyPr lIns="0" rIns="0" tIns="0" bIns="0" anchorCtr="1" anchor="ctr" wrap="none"/>
+            <a:lstStyle/>
+            <a:p>
+              <a:pPr algn="l" marL="0" marR="0" indent="0">
+                <a:lnSpc>
+                  <a:spcPts val="1320"/>
+                </a:lnSpc>
+                <a:spcBef>
+                  <a:spcPts val="0"/>
+                </a:spcBef>
+                <a:spcAft>
+                  <a:spcPts val="0"/>
+                </a:spcAft>
+              </a:pPr>
+              <a:r>
+                <a:rPr sz="1320">
+                  <a:solidFill>
+                    <a:srgbClr val="000000">
+                      <a:alpha val="100000"/>
+                    </a:srgbClr>
+                  </a:solidFill>
+                  <a:latin typeface="Helvetica"/>
+                  <a:cs typeface="Helvetica"/>
+                </a:rPr>
+                <a:t>Composite Grade 2 AEs (Sensitivity)</a:t>
+              </a:r>
+            </a:p>
+          </p:txBody>
+        </p:sp>
+        <p:sp>
+          <p:nvSpPr>
+            <p:cNvPr id="44" name="pl44"/>
+            <p:cNvSpPr/>
+            <p:nvPr/>
+          </p:nvSpPr>
+          <p:spPr>
+            <a:xfrm>
+              <a:off x="887106" y="5444019"/>
+              <a:ext cx="7660515" cy="0"/>
+            </a:xfrm>
+            <a:custGeom>
+              <a:avLst/>
+              <a:pathLst>
+                <a:path w="7660515" h="0">
+                  <a:moveTo>
+                    <a:pt x="0" y="0"/>
+                  </a:moveTo>
+                  <a:lnTo>
+                    <a:pt x="7660515" y="0"/>
+                  </a:lnTo>
+                  <a:lnTo>
+                    <a:pt x="7660515" y="0"/>
+                  </a:lnTo>
+                </a:path>
+              </a:pathLst>
+            </a:custGeom>
+            <a:ln w="6775" cap="flat">
+              <a:solidFill>
+                <a:srgbClr val="EBEBEB">
+                  <a:alpha val="100000"/>
+                </a:srgbClr>
+              </a:solidFill>
+              <a:prstDash val="solid"/>
+              <a:round/>
+            </a:ln>
+          </p:spPr>
+          <p:txBody>
+            <a:bodyPr/>
+            <a:lstStyle/>
+            <a:p/>
+          </p:txBody>
+        </p:sp>
+        <p:sp>
+          <p:nvSpPr>
+            <p:cNvPr id="45" name="pl45"/>
+            <p:cNvSpPr/>
+            <p:nvPr/>
+          </p:nvSpPr>
+          <p:spPr>
+            <a:xfrm>
+              <a:off x="887106" y="5144686"/>
+              <a:ext cx="7660515" cy="0"/>
+            </a:xfrm>
+            <a:custGeom>
+              <a:avLst/>
+              <a:pathLst>
+                <a:path w="7660515" h="0">
+                  <a:moveTo>
+                    <a:pt x="0" y="0"/>
+                  </a:moveTo>
+                  <a:lnTo>
+                    <a:pt x="7660515" y="0"/>
+                  </a:lnTo>
+                  <a:lnTo>
+                    <a:pt x="7660515" y="0"/>
+                  </a:lnTo>
+                </a:path>
+              </a:pathLst>
+            </a:custGeom>
+            <a:ln w="6775" cap="flat">
+              <a:solidFill>
+                <a:srgbClr val="EBEBEB">
+                  <a:alpha val="100000"/>
+                </a:srgbClr>
+              </a:solidFill>
+              <a:prstDash val="solid"/>
+              <a:round/>
+            </a:ln>
+          </p:spPr>
+          <p:txBody>
+            <a:bodyPr/>
+            <a:lstStyle/>
+            <a:p/>
+          </p:txBody>
+        </p:sp>
+        <p:sp>
+          <p:nvSpPr>
+            <p:cNvPr id="46" name="pl46"/>
+            <p:cNvSpPr/>
+            <p:nvPr/>
+          </p:nvSpPr>
+          <p:spPr>
+            <a:xfrm>
+              <a:off x="887106" y="4845352"/>
+              <a:ext cx="7660515" cy="0"/>
+            </a:xfrm>
+            <a:custGeom>
+              <a:avLst/>
+              <a:pathLst>
+                <a:path w="7660515" h="0">
+                  <a:moveTo>
+                    <a:pt x="0" y="0"/>
+                  </a:moveTo>
+                  <a:lnTo>
+                    <a:pt x="7660515" y="0"/>
+                  </a:lnTo>
+                  <a:lnTo>
+                    <a:pt x="7660515" y="0"/>
+                  </a:lnTo>
+                </a:path>
+              </a:pathLst>
+            </a:custGeom>
+            <a:ln w="6775" cap="flat">
+              <a:solidFill>
+                <a:srgbClr val="EBEBEB">
+                  <a:alpha val="100000"/>
+                </a:srgbClr>
+              </a:solidFill>
+              <a:prstDash val="solid"/>
+              <a:round/>
+            </a:ln>
+          </p:spPr>
+          <p:txBody>
+            <a:bodyPr/>
+            <a:lstStyle/>
+            <a:p/>
+          </p:txBody>
+        </p:sp>
+        <p:sp>
+          <p:nvSpPr>
+            <p:cNvPr id="47" name="pl47"/>
+            <p:cNvSpPr/>
+            <p:nvPr/>
+          </p:nvSpPr>
+          <p:spPr>
+            <a:xfrm>
+              <a:off x="887106" y="4546018"/>
+              <a:ext cx="7660515" cy="0"/>
+            </a:xfrm>
+            <a:custGeom>
+              <a:avLst/>
+              <a:pathLst>
+                <a:path w="7660515" h="0">
+                  <a:moveTo>
+                    <a:pt x="0" y="0"/>
+                  </a:moveTo>
+                  <a:lnTo>
+                    <a:pt x="7660515" y="0"/>
+                  </a:lnTo>
+                  <a:lnTo>
+                    <a:pt x="7660515" y="0"/>
+                  </a:lnTo>
+                </a:path>
+              </a:pathLst>
+            </a:custGeom>
+            <a:ln w="6775" cap="flat">
+              <a:solidFill>
+                <a:srgbClr val="EBEBEB">
+                  <a:alpha val="100000"/>
+                </a:srgbClr>
+              </a:solidFill>
+              <a:prstDash val="solid"/>
+              <a:round/>
+            </a:ln>
+          </p:spPr>
+          <p:txBody>
+            <a:bodyPr/>
+            <a:lstStyle/>
+            <a:p/>
+          </p:txBody>
+        </p:sp>
+        <p:sp>
+          <p:nvSpPr>
+            <p:cNvPr id="48" name="pl48"/>
+            <p:cNvSpPr/>
+            <p:nvPr/>
+          </p:nvSpPr>
+          <p:spPr>
+            <a:xfrm>
+              <a:off x="1675141" y="4336484"/>
+              <a:ext cx="0" cy="1317069"/>
+            </a:xfrm>
+            <a:custGeom>
+              <a:avLst/>
+              <a:pathLst>
+                <a:path w="0" h="1317069">
+                  <a:moveTo>
+                    <a:pt x="0" y="1317069"/>
+                  </a:moveTo>
+                  <a:lnTo>
+                    <a:pt x="0" y="0"/>
+                  </a:lnTo>
+                  <a:lnTo>
+                    <a:pt x="0" y="0"/>
+                  </a:lnTo>
+                </a:path>
+              </a:pathLst>
+            </a:custGeom>
+            <a:ln w="6775" cap="flat">
+              <a:solidFill>
+                <a:srgbClr val="EBEBEB">
+                  <a:alpha val="100000"/>
+                </a:srgbClr>
+              </a:solidFill>
+              <a:prstDash val="solid"/>
+              <a:round/>
+            </a:ln>
+          </p:spPr>
+          <p:txBody>
+            <a:bodyPr/>
+            <a:lstStyle/>
+            <a:p/>
+          </p:txBody>
+        </p:sp>
+        <p:sp>
+          <p:nvSpPr>
+            <p:cNvPr id="49" name="pl49"/>
+            <p:cNvSpPr/>
+            <p:nvPr/>
+          </p:nvSpPr>
+          <p:spPr>
+            <a:xfrm>
+              <a:off x="2535404" y="4336484"/>
+              <a:ext cx="0" cy="1317069"/>
+            </a:xfrm>
+            <a:custGeom>
+              <a:avLst/>
+              <a:pathLst>
+                <a:path w="0" h="1317069">
+                  <a:moveTo>
+                    <a:pt x="0" y="1317069"/>
+                  </a:moveTo>
+                  <a:lnTo>
+                    <a:pt x="0" y="0"/>
+                  </a:lnTo>
+                  <a:lnTo>
+                    <a:pt x="0" y="0"/>
+                  </a:lnTo>
+                </a:path>
+              </a:pathLst>
+            </a:custGeom>
+            <a:ln w="6775" cap="flat">
+              <a:solidFill>
+                <a:srgbClr val="EBEBEB">
+                  <a:alpha val="100000"/>
+                </a:srgbClr>
+              </a:solidFill>
+              <a:prstDash val="solid"/>
+              <a:round/>
+            </a:ln>
+          </p:spPr>
+          <p:txBody>
+            <a:bodyPr/>
+            <a:lstStyle/>
+            <a:p/>
+          </p:txBody>
+        </p:sp>
+        <p:sp>
+          <p:nvSpPr>
+            <p:cNvPr id="50" name="pl50"/>
+            <p:cNvSpPr/>
+            <p:nvPr/>
+          </p:nvSpPr>
+          <p:spPr>
+            <a:xfrm>
+              <a:off x="3395667" y="4336484"/>
+              <a:ext cx="0" cy="1317069"/>
+            </a:xfrm>
+            <a:custGeom>
+              <a:avLst/>
+              <a:pathLst>
+                <a:path w="0" h="1317069">
+                  <a:moveTo>
+                    <a:pt x="0" y="1317069"/>
+                  </a:moveTo>
+                  <a:lnTo>
+                    <a:pt x="0" y="0"/>
+                  </a:lnTo>
+                  <a:lnTo>
+                    <a:pt x="0" y="0"/>
+                  </a:lnTo>
+                </a:path>
+              </a:pathLst>
+            </a:custGeom>
+            <a:ln w="6775" cap="flat">
+              <a:solidFill>
+                <a:srgbClr val="EBEBEB">
+                  <a:alpha val="100000"/>
+                </a:srgbClr>
+              </a:solidFill>
+              <a:prstDash val="solid"/>
+              <a:round/>
+            </a:ln>
+          </p:spPr>
+          <p:txBody>
+            <a:bodyPr/>
+            <a:lstStyle/>
+            <a:p/>
+          </p:txBody>
+        </p:sp>
+        <p:sp>
+          <p:nvSpPr>
+            <p:cNvPr id="51" name="pl51"/>
+            <p:cNvSpPr/>
+            <p:nvPr/>
+          </p:nvSpPr>
+          <p:spPr>
+            <a:xfrm>
+              <a:off x="4255930" y="4336484"/>
+              <a:ext cx="0" cy="1317069"/>
+            </a:xfrm>
+            <a:custGeom>
+              <a:avLst/>
+              <a:pathLst>
+                <a:path w="0" h="1317069">
+                  <a:moveTo>
+                    <a:pt x="0" y="1317069"/>
+                  </a:moveTo>
+                  <a:lnTo>
+                    <a:pt x="0" y="0"/>
+                  </a:lnTo>
+                  <a:lnTo>
+                    <a:pt x="0" y="0"/>
+                  </a:lnTo>
+                </a:path>
+              </a:pathLst>
+            </a:custGeom>
+            <a:ln w="6775" cap="flat">
+              <a:solidFill>
+                <a:srgbClr val="EBEBEB">
+                  <a:alpha val="100000"/>
+                </a:srgbClr>
+              </a:solidFill>
+              <a:prstDash val="solid"/>
+              <a:round/>
+            </a:ln>
+          </p:spPr>
+          <p:txBody>
+            <a:bodyPr/>
+            <a:lstStyle/>
+            <a:p/>
+          </p:txBody>
+        </p:sp>
+        <p:sp>
+          <p:nvSpPr>
+            <p:cNvPr id="52" name="pl52"/>
+            <p:cNvSpPr/>
+            <p:nvPr/>
+          </p:nvSpPr>
+          <p:spPr>
+            <a:xfrm>
+              <a:off x="5116193" y="4336484"/>
+              <a:ext cx="0" cy="1317069"/>
+            </a:xfrm>
+            <a:custGeom>
+              <a:avLst/>
+              <a:pathLst>
+                <a:path w="0" h="1317069">
+                  <a:moveTo>
+                    <a:pt x="0" y="1317069"/>
+                  </a:moveTo>
+                  <a:lnTo>
+                    <a:pt x="0" y="0"/>
+                  </a:lnTo>
+                  <a:lnTo>
+                    <a:pt x="0" y="0"/>
+                  </a:lnTo>
+                </a:path>
+              </a:pathLst>
+            </a:custGeom>
+            <a:ln w="6775" cap="flat">
+              <a:solidFill>
+                <a:srgbClr val="EBEBEB">
+                  <a:alpha val="100000"/>
+                </a:srgbClr>
+              </a:solidFill>
+              <a:prstDash val="solid"/>
+              <a:round/>
+            </a:ln>
+          </p:spPr>
+          <p:txBody>
+            <a:bodyPr/>
+            <a:lstStyle/>
+            <a:p/>
+          </p:txBody>
+        </p:sp>
+        <p:sp>
+          <p:nvSpPr>
+            <p:cNvPr id="53" name="pl53"/>
+            <p:cNvSpPr/>
+            <p:nvPr/>
+          </p:nvSpPr>
+          <p:spPr>
+            <a:xfrm>
+              <a:off x="5976457" y="4336484"/>
+              <a:ext cx="0" cy="1317069"/>
+            </a:xfrm>
+            <a:custGeom>
+              <a:avLst/>
+              <a:pathLst>
+                <a:path w="0" h="1317069">
+                  <a:moveTo>
+                    <a:pt x="0" y="1317069"/>
+                  </a:moveTo>
+                  <a:lnTo>
+                    <a:pt x="0" y="0"/>
+                  </a:lnTo>
+                  <a:lnTo>
+                    <a:pt x="0" y="0"/>
+                  </a:lnTo>
+                </a:path>
+              </a:pathLst>
+            </a:custGeom>
+            <a:ln w="6775" cap="flat">
+              <a:solidFill>
+                <a:srgbClr val="EBEBEB">
+                  <a:alpha val="100000"/>
+                </a:srgbClr>
+              </a:solidFill>
+              <a:prstDash val="solid"/>
+              <a:round/>
+            </a:ln>
+          </p:spPr>
+          <p:txBody>
+            <a:bodyPr/>
+            <a:lstStyle/>
+            <a:p/>
+          </p:txBody>
+        </p:sp>
+        <p:sp>
+          <p:nvSpPr>
+            <p:cNvPr id="54" name="pl54"/>
+            <p:cNvSpPr/>
+            <p:nvPr/>
+          </p:nvSpPr>
+          <p:spPr>
+            <a:xfrm>
+              <a:off x="6836720" y="4336484"/>
+              <a:ext cx="0" cy="1317069"/>
+            </a:xfrm>
+            <a:custGeom>
+              <a:avLst/>
+              <a:pathLst>
+                <a:path w="0" h="1317069">
+                  <a:moveTo>
+                    <a:pt x="0" y="1317069"/>
+                  </a:moveTo>
+                  <a:lnTo>
+                    <a:pt x="0" y="0"/>
+                  </a:lnTo>
+                  <a:lnTo>
+                    <a:pt x="0" y="0"/>
+                  </a:lnTo>
+                </a:path>
+              </a:pathLst>
+            </a:custGeom>
+            <a:ln w="6775" cap="flat">
+              <a:solidFill>
+                <a:srgbClr val="EBEBEB">
+                  <a:alpha val="100000"/>
+                </a:srgbClr>
+              </a:solidFill>
+              <a:prstDash val="solid"/>
+              <a:round/>
+            </a:ln>
+          </p:spPr>
+          <p:txBody>
+            <a:bodyPr/>
+            <a:lstStyle/>
+            <a:p/>
+          </p:txBody>
+        </p:sp>
+        <p:sp>
+          <p:nvSpPr>
+            <p:cNvPr id="55" name="pl55"/>
+            <p:cNvSpPr/>
+            <p:nvPr/>
+          </p:nvSpPr>
+          <p:spPr>
+            <a:xfrm>
+              <a:off x="7696983" y="4336484"/>
+              <a:ext cx="0" cy="1317069"/>
+            </a:xfrm>
+            <a:custGeom>
+              <a:avLst/>
+              <a:pathLst>
+                <a:path w="0" h="1317069">
+                  <a:moveTo>
+                    <a:pt x="0" y="1317069"/>
+                  </a:moveTo>
+                  <a:lnTo>
+                    <a:pt x="0" y="0"/>
+                  </a:lnTo>
+                  <a:lnTo>
+                    <a:pt x="0" y="0"/>
+                  </a:lnTo>
+                </a:path>
+              </a:pathLst>
+            </a:custGeom>
+            <a:ln w="6775" cap="flat">
+              <a:solidFill>
+                <a:srgbClr val="EBEBEB">
+                  <a:alpha val="100000"/>
+                </a:srgbClr>
+              </a:solidFill>
+              <a:prstDash val="solid"/>
+              <a:round/>
+            </a:ln>
+          </p:spPr>
+          <p:txBody>
+            <a:bodyPr/>
+            <a:lstStyle/>
+            <a:p/>
+          </p:txBody>
+        </p:sp>
+        <p:sp>
+          <p:nvSpPr>
+            <p:cNvPr id="56" name="pl56"/>
+            <p:cNvSpPr/>
+            <p:nvPr/>
+          </p:nvSpPr>
+          <p:spPr>
+            <a:xfrm>
+              <a:off x="887106" y="5593686"/>
+              <a:ext cx="7660515" cy="0"/>
+            </a:xfrm>
+            <a:custGeom>
+              <a:avLst/>
+              <a:pathLst>
+                <a:path w="7660515" h="0">
+                  <a:moveTo>
+                    <a:pt x="0" y="0"/>
+                  </a:moveTo>
+                  <a:lnTo>
+                    <a:pt x="7660515" y="0"/>
+                  </a:lnTo>
+                  <a:lnTo>
+                    <a:pt x="7660515" y="0"/>
+                  </a:lnTo>
+                </a:path>
+              </a:pathLst>
+            </a:custGeom>
+            <a:ln w="13550" cap="flat">
+              <a:solidFill>
+                <a:srgbClr val="EBEBEB">
+                  <a:alpha val="100000"/>
+                </a:srgbClr>
+              </a:solidFill>
+              <a:prstDash val="solid"/>
+              <a:round/>
+            </a:ln>
+          </p:spPr>
+          <p:txBody>
+            <a:bodyPr/>
+            <a:lstStyle/>
+            <a:p/>
+          </p:txBody>
+        </p:sp>
+        <p:sp>
+          <p:nvSpPr>
+            <p:cNvPr id="57" name="pl57"/>
+            <p:cNvSpPr/>
+            <p:nvPr/>
+          </p:nvSpPr>
+          <p:spPr>
+            <a:xfrm>
+              <a:off x="887106" y="5294352"/>
+              <a:ext cx="7660515" cy="0"/>
+            </a:xfrm>
+            <a:custGeom>
+              <a:avLst/>
+              <a:pathLst>
+                <a:path w="7660515" h="0">
+                  <a:moveTo>
+                    <a:pt x="0" y="0"/>
+                  </a:moveTo>
+                  <a:lnTo>
+                    <a:pt x="7660515" y="0"/>
+                  </a:lnTo>
+                  <a:lnTo>
+                    <a:pt x="7660515" y="0"/>
+                  </a:lnTo>
+                </a:path>
+              </a:pathLst>
+            </a:custGeom>
+            <a:ln w="13550" cap="flat">
+              <a:solidFill>
+                <a:srgbClr val="EBEBEB">
+                  <a:alpha val="100000"/>
+                </a:srgbClr>
+              </a:solidFill>
+              <a:prstDash val="solid"/>
+              <a:round/>
+            </a:ln>
+          </p:spPr>
+          <p:txBody>
+            <a:bodyPr/>
+            <a:lstStyle/>
+            <a:p/>
+          </p:txBody>
+        </p:sp>
+        <p:sp>
+          <p:nvSpPr>
+            <p:cNvPr id="58" name="pl58"/>
+            <p:cNvSpPr/>
+            <p:nvPr/>
+          </p:nvSpPr>
+          <p:spPr>
+            <a:xfrm>
+              <a:off x="887106" y="4995019"/>
+              <a:ext cx="7660515" cy="0"/>
+            </a:xfrm>
+            <a:custGeom>
+              <a:avLst/>
+              <a:pathLst>
+                <a:path w="7660515" h="0">
+                  <a:moveTo>
+                    <a:pt x="0" y="0"/>
+                  </a:moveTo>
+                  <a:lnTo>
+                    <a:pt x="7660515" y="0"/>
+                  </a:lnTo>
+                  <a:lnTo>
+                    <a:pt x="7660515" y="0"/>
+                  </a:lnTo>
+                </a:path>
+              </a:pathLst>
+            </a:custGeom>
+            <a:ln w="13550" cap="flat">
+              <a:solidFill>
+                <a:srgbClr val="EBEBEB">
+                  <a:alpha val="100000"/>
+                </a:srgbClr>
+              </a:solidFill>
+              <a:prstDash val="solid"/>
+              <a:round/>
+            </a:ln>
+          </p:spPr>
+          <p:txBody>
+            <a:bodyPr/>
+            <a:lstStyle/>
+            <a:p/>
+          </p:txBody>
+        </p:sp>
+        <p:sp>
+          <p:nvSpPr>
+            <p:cNvPr id="59" name="pl59"/>
+            <p:cNvSpPr/>
+            <p:nvPr/>
+          </p:nvSpPr>
+          <p:spPr>
+            <a:xfrm>
+              <a:off x="887106" y="4695685"/>
+              <a:ext cx="7660515" cy="0"/>
+            </a:xfrm>
+            <a:custGeom>
+              <a:avLst/>
+              <a:pathLst>
+                <a:path w="7660515" h="0">
+                  <a:moveTo>
+                    <a:pt x="0" y="0"/>
+                  </a:moveTo>
+                  <a:lnTo>
+                    <a:pt x="7660515" y="0"/>
+                  </a:lnTo>
+                  <a:lnTo>
+                    <a:pt x="7660515" y="0"/>
+                  </a:lnTo>
+                </a:path>
+              </a:pathLst>
+            </a:custGeom>
+            <a:ln w="13550" cap="flat">
+              <a:solidFill>
+                <a:srgbClr val="EBEBEB">
+                  <a:alpha val="100000"/>
+                </a:srgbClr>
+              </a:solidFill>
+              <a:prstDash val="solid"/>
+              <a:round/>
+            </a:ln>
+          </p:spPr>
+          <p:txBody>
+            <a:bodyPr/>
+            <a:lstStyle/>
+            <a:p/>
+          </p:txBody>
+        </p:sp>
+        <p:sp>
+          <p:nvSpPr>
+            <p:cNvPr id="60" name="pl60"/>
+            <p:cNvSpPr/>
+            <p:nvPr/>
+          </p:nvSpPr>
+          <p:spPr>
+            <a:xfrm>
+              <a:off x="887106" y="4396351"/>
+              <a:ext cx="7660515" cy="0"/>
+            </a:xfrm>
+            <a:custGeom>
+              <a:avLst/>
+              <a:pathLst>
+                <a:path w="7660515" h="0">
+                  <a:moveTo>
+                    <a:pt x="0" y="0"/>
+                  </a:moveTo>
+                  <a:lnTo>
+                    <a:pt x="7660515" y="0"/>
+                  </a:lnTo>
+                  <a:lnTo>
+                    <a:pt x="7660515" y="0"/>
+                  </a:lnTo>
+                </a:path>
+              </a:pathLst>
+            </a:custGeom>
+            <a:ln w="13550" cap="flat">
+              <a:solidFill>
+                <a:srgbClr val="EBEBEB">
+                  <a:alpha val="100000"/>
+                </a:srgbClr>
+              </a:solidFill>
+              <a:prstDash val="solid"/>
+              <a:round/>
+            </a:ln>
+          </p:spPr>
+          <p:txBody>
+            <a:bodyPr/>
+            <a:lstStyle/>
+            <a:p/>
+          </p:txBody>
+        </p:sp>
+        <p:sp>
+          <p:nvSpPr>
+            <p:cNvPr id="61" name="pl61"/>
+            <p:cNvSpPr/>
+            <p:nvPr/>
+          </p:nvSpPr>
+          <p:spPr>
+            <a:xfrm>
+              <a:off x="1245010" y="4336484"/>
+              <a:ext cx="0" cy="1317069"/>
+            </a:xfrm>
+            <a:custGeom>
+              <a:avLst/>
+              <a:pathLst>
+                <a:path w="0" h="1317069">
+                  <a:moveTo>
+                    <a:pt x="0" y="1317069"/>
+                  </a:moveTo>
+                  <a:lnTo>
+                    <a:pt x="0" y="0"/>
+                  </a:lnTo>
+                  <a:lnTo>
+                    <a:pt x="0" y="0"/>
+                  </a:lnTo>
+                </a:path>
+              </a:pathLst>
+            </a:custGeom>
+            <a:ln w="13550" cap="flat">
+              <a:solidFill>
+                <a:srgbClr val="EBEBEB">
+                  <a:alpha val="100000"/>
+                </a:srgbClr>
+              </a:solidFill>
+              <a:prstDash val="solid"/>
+              <a:round/>
+            </a:ln>
+          </p:spPr>
+          <p:txBody>
+            <a:bodyPr/>
+            <a:lstStyle/>
+            <a:p/>
+          </p:txBody>
+        </p:sp>
+        <p:sp>
+          <p:nvSpPr>
+            <p:cNvPr id="62" name="pl62"/>
+            <p:cNvSpPr/>
+            <p:nvPr/>
+          </p:nvSpPr>
+          <p:spPr>
+            <a:xfrm>
+              <a:off x="2105273" y="4336484"/>
+              <a:ext cx="0" cy="1317069"/>
+            </a:xfrm>
+            <a:custGeom>
+              <a:avLst/>
+              <a:pathLst>
+                <a:path w="0" h="1317069">
+                  <a:moveTo>
+                    <a:pt x="0" y="1317069"/>
+                  </a:moveTo>
+                  <a:lnTo>
+                    <a:pt x="0" y="0"/>
+                  </a:lnTo>
+                  <a:lnTo>
+                    <a:pt x="0" y="0"/>
+                  </a:lnTo>
+                </a:path>
+              </a:pathLst>
+            </a:custGeom>
+            <a:ln w="13550" cap="flat">
+              <a:solidFill>
+                <a:srgbClr val="EBEBEB">
+                  <a:alpha val="100000"/>
+                </a:srgbClr>
+              </a:solidFill>
+              <a:prstDash val="solid"/>
+              <a:round/>
+            </a:ln>
+          </p:spPr>
+          <p:txBody>
+            <a:bodyPr/>
+            <a:lstStyle/>
+            <a:p/>
+          </p:txBody>
+        </p:sp>
+        <p:sp>
+          <p:nvSpPr>
+            <p:cNvPr id="63" name="pl63"/>
+            <p:cNvSpPr/>
+            <p:nvPr/>
+          </p:nvSpPr>
+          <p:spPr>
+            <a:xfrm>
+              <a:off x="2965536" y="4336484"/>
+              <a:ext cx="0" cy="1317069"/>
+            </a:xfrm>
+            <a:custGeom>
+              <a:avLst/>
+              <a:pathLst>
+                <a:path w="0" h="1317069">
+                  <a:moveTo>
+                    <a:pt x="0" y="1317069"/>
+                  </a:moveTo>
+                  <a:lnTo>
+                    <a:pt x="0" y="0"/>
+                  </a:lnTo>
+                  <a:lnTo>
+                    <a:pt x="0" y="0"/>
+                  </a:lnTo>
+                </a:path>
+              </a:pathLst>
+            </a:custGeom>
+            <a:ln w="13550" cap="flat">
+              <a:solidFill>
+                <a:srgbClr val="EBEBEB">
+                  <a:alpha val="100000"/>
+                </a:srgbClr>
+              </a:solidFill>
+              <a:prstDash val="solid"/>
+              <a:round/>
+            </a:ln>
+          </p:spPr>
+          <p:txBody>
+            <a:bodyPr/>
+            <a:lstStyle/>
+            <a:p/>
+          </p:txBody>
+        </p:sp>
+        <p:sp>
+          <p:nvSpPr>
+            <p:cNvPr id="64" name="pl64"/>
+            <p:cNvSpPr/>
+            <p:nvPr/>
+          </p:nvSpPr>
+          <p:spPr>
+            <a:xfrm>
+              <a:off x="3825799" y="4336484"/>
+              <a:ext cx="0" cy="1317069"/>
+            </a:xfrm>
+            <a:custGeom>
+              <a:avLst/>
+              <a:pathLst>
+                <a:path w="0" h="1317069">
+                  <a:moveTo>
+                    <a:pt x="0" y="1317069"/>
+                  </a:moveTo>
+                  <a:lnTo>
+                    <a:pt x="0" y="0"/>
+                  </a:lnTo>
+                  <a:lnTo>
+                    <a:pt x="0" y="0"/>
+                  </a:lnTo>
+                </a:path>
+              </a:pathLst>
+            </a:custGeom>
+            <a:ln w="13550" cap="flat">
+              <a:solidFill>
+                <a:srgbClr val="EBEBEB">
+                  <a:alpha val="100000"/>
+                </a:srgbClr>
+              </a:solidFill>
+              <a:prstDash val="solid"/>
+              <a:round/>
+            </a:ln>
+          </p:spPr>
+          <p:txBody>
+            <a:bodyPr/>
+            <a:lstStyle/>
+            <a:p/>
+          </p:txBody>
+        </p:sp>
+        <p:sp>
+          <p:nvSpPr>
+            <p:cNvPr id="65" name="pl65"/>
+            <p:cNvSpPr/>
+            <p:nvPr/>
+          </p:nvSpPr>
+          <p:spPr>
+            <a:xfrm>
+              <a:off x="4686062" y="4336484"/>
+              <a:ext cx="0" cy="1317069"/>
+            </a:xfrm>
+            <a:custGeom>
+              <a:avLst/>
+              <a:pathLst>
+                <a:path w="0" h="1317069">
+                  <a:moveTo>
+                    <a:pt x="0" y="1317069"/>
+                  </a:moveTo>
+                  <a:lnTo>
+                    <a:pt x="0" y="0"/>
+                  </a:lnTo>
+                  <a:lnTo>
+                    <a:pt x="0" y="0"/>
+                  </a:lnTo>
+                </a:path>
+              </a:pathLst>
+            </a:custGeom>
+            <a:ln w="13550" cap="flat">
+              <a:solidFill>
+                <a:srgbClr val="EBEBEB">
+                  <a:alpha val="100000"/>
+                </a:srgbClr>
+              </a:solidFill>
+              <a:prstDash val="solid"/>
+              <a:round/>
+            </a:ln>
+          </p:spPr>
+          <p:txBody>
+            <a:bodyPr/>
+            <a:lstStyle/>
+            <a:p/>
+          </p:txBody>
+        </p:sp>
+        <p:sp>
+          <p:nvSpPr>
+            <p:cNvPr id="66" name="pl66"/>
+            <p:cNvSpPr/>
+            <p:nvPr/>
+          </p:nvSpPr>
+          <p:spPr>
+            <a:xfrm>
+              <a:off x="5546325" y="4336484"/>
+              <a:ext cx="0" cy="1317069"/>
+            </a:xfrm>
+            <a:custGeom>
+              <a:avLst/>
+              <a:pathLst>
+                <a:path w="0" h="1317069">
+                  <a:moveTo>
+                    <a:pt x="0" y="1317069"/>
+                  </a:moveTo>
+                  <a:lnTo>
+                    <a:pt x="0" y="0"/>
+                  </a:lnTo>
+                  <a:lnTo>
+                    <a:pt x="0" y="0"/>
+                  </a:lnTo>
+                </a:path>
+              </a:pathLst>
+            </a:custGeom>
+            <a:ln w="13550" cap="flat">
+              <a:solidFill>
+                <a:srgbClr val="EBEBEB">
+                  <a:alpha val="100000"/>
+                </a:srgbClr>
+              </a:solidFill>
+              <a:prstDash val="solid"/>
+              <a:round/>
+            </a:ln>
+          </p:spPr>
+          <p:txBody>
+            <a:bodyPr/>
+            <a:lstStyle/>
+            <a:p/>
+          </p:txBody>
+        </p:sp>
+        <p:sp>
+          <p:nvSpPr>
+            <p:cNvPr id="67" name="pl67"/>
+            <p:cNvSpPr/>
+            <p:nvPr/>
+          </p:nvSpPr>
+          <p:spPr>
+            <a:xfrm>
+              <a:off x="6406588" y="4336484"/>
+              <a:ext cx="0" cy="1317069"/>
+            </a:xfrm>
+            <a:custGeom>
+              <a:avLst/>
+              <a:pathLst>
+                <a:path w="0" h="1317069">
+                  <a:moveTo>
+                    <a:pt x="0" y="1317069"/>
+                  </a:moveTo>
+                  <a:lnTo>
+                    <a:pt x="0" y="0"/>
+                  </a:lnTo>
+                  <a:lnTo>
+                    <a:pt x="0" y="0"/>
+                  </a:lnTo>
+                </a:path>
+              </a:pathLst>
+            </a:custGeom>
+            <a:ln w="13550" cap="flat">
+              <a:solidFill>
+                <a:srgbClr val="EBEBEB">
+                  <a:alpha val="100000"/>
+                </a:srgbClr>
+              </a:solidFill>
+              <a:prstDash val="solid"/>
+              <a:round/>
+            </a:ln>
+          </p:spPr>
+          <p:txBody>
+            <a:bodyPr/>
+            <a:lstStyle/>
+            <a:p/>
+          </p:txBody>
+        </p:sp>
+        <p:sp>
+          <p:nvSpPr>
+            <p:cNvPr id="68" name="pl68"/>
+            <p:cNvSpPr/>
+            <p:nvPr/>
+          </p:nvSpPr>
+          <p:spPr>
+            <a:xfrm>
+              <a:off x="7266851" y="4336484"/>
+              <a:ext cx="0" cy="1317069"/>
+            </a:xfrm>
+            <a:custGeom>
+              <a:avLst/>
+              <a:pathLst>
+                <a:path w="0" h="1317069">
+                  <a:moveTo>
+                    <a:pt x="0" y="1317069"/>
+                  </a:moveTo>
+                  <a:lnTo>
+                    <a:pt x="0" y="0"/>
+                  </a:lnTo>
+                  <a:lnTo>
+                    <a:pt x="0" y="0"/>
+                  </a:lnTo>
+                </a:path>
+              </a:pathLst>
+            </a:custGeom>
+            <a:ln w="13550" cap="flat">
+              <a:solidFill>
+                <a:srgbClr val="EBEBEB">
+                  <a:alpha val="100000"/>
+                </a:srgbClr>
+              </a:solidFill>
+              <a:prstDash val="solid"/>
+              <a:round/>
+            </a:ln>
+          </p:spPr>
+          <p:txBody>
+            <a:bodyPr/>
+            <a:lstStyle/>
+            <a:p/>
+          </p:txBody>
+        </p:sp>
+        <p:sp>
+          <p:nvSpPr>
+            <p:cNvPr id="69" name="pl69"/>
+            <p:cNvSpPr/>
+            <p:nvPr/>
+          </p:nvSpPr>
+          <p:spPr>
+            <a:xfrm>
+              <a:off x="8127114" y="4336484"/>
+              <a:ext cx="0" cy="1317069"/>
+            </a:xfrm>
+            <a:custGeom>
+              <a:avLst/>
+              <a:pathLst>
+                <a:path w="0" h="1317069">
+                  <a:moveTo>
+                    <a:pt x="0" y="1317069"/>
+                  </a:moveTo>
+                  <a:lnTo>
+                    <a:pt x="0" y="0"/>
+                  </a:lnTo>
+                  <a:lnTo>
+                    <a:pt x="0" y="0"/>
+                  </a:lnTo>
+                </a:path>
+              </a:pathLst>
+            </a:custGeom>
+            <a:ln w="13550" cap="flat">
+              <a:solidFill>
+                <a:srgbClr val="EBEBEB">
+                  <a:alpha val="100000"/>
+                </a:srgbClr>
+              </a:solidFill>
+              <a:prstDash val="solid"/>
+              <a:round/>
+            </a:ln>
+          </p:spPr>
+          <p:txBody>
+            <a:bodyPr/>
+            <a:lstStyle/>
+            <a:p/>
+          </p:txBody>
+        </p:sp>
+        <p:sp>
+          <p:nvSpPr>
+            <p:cNvPr id="70" name="pg70"/>
+            <p:cNvSpPr/>
+            <p:nvPr/>
+          </p:nvSpPr>
+          <p:spPr>
+            <a:xfrm>
+              <a:off x="1235312" y="5017133"/>
+              <a:ext cx="6964104" cy="451958"/>
+            </a:xfrm>
+            <a:custGeom>
+              <a:avLst/>
+              <a:pathLst>
+                <a:path w="6964104" h="451958">
+                  <a:moveTo>
+                    <a:pt x="0" y="0"/>
+                  </a:moveTo>
+                  <a:lnTo>
+                    <a:pt x="70344" y="8853"/>
+                  </a:lnTo>
+                  <a:lnTo>
+                    <a:pt x="140688" y="17570"/>
+                  </a:lnTo>
+                  <a:lnTo>
+                    <a:pt x="211033" y="26154"/>
+                  </a:lnTo>
+                  <a:lnTo>
+                    <a:pt x="281377" y="34605"/>
+                  </a:lnTo>
+                  <a:lnTo>
+                    <a:pt x="351722" y="42927"/>
+                  </a:lnTo>
+                  <a:lnTo>
+                    <a:pt x="422066" y="51122"/>
+                  </a:lnTo>
+                  <a:lnTo>
+                    <a:pt x="492411" y="59190"/>
+                  </a:lnTo>
+                  <a:lnTo>
+                    <a:pt x="562755" y="67134"/>
+                  </a:lnTo>
+                  <a:lnTo>
+                    <a:pt x="633100" y="74957"/>
+                  </a:lnTo>
+                  <a:lnTo>
+                    <a:pt x="703444" y="82659"/>
+                  </a:lnTo>
+                  <a:lnTo>
+                    <a:pt x="773789" y="90243"/>
+                  </a:lnTo>
+                  <a:lnTo>
+                    <a:pt x="844133" y="97711"/>
+                  </a:lnTo>
+                  <a:lnTo>
+                    <a:pt x="914478" y="105064"/>
+                  </a:lnTo>
+                  <a:lnTo>
+                    <a:pt x="984822" y="112304"/>
+                  </a:lnTo>
+                  <a:lnTo>
+                    <a:pt x="1055167" y="119432"/>
+                  </a:lnTo>
+                  <a:lnTo>
+                    <a:pt x="1125511" y="126452"/>
+                  </a:lnTo>
+                  <a:lnTo>
+                    <a:pt x="1195856" y="133363"/>
+                  </a:lnTo>
+                  <a:lnTo>
+                    <a:pt x="1266200" y="140169"/>
+                  </a:lnTo>
+                  <a:lnTo>
+                    <a:pt x="1336545" y="146870"/>
+                  </a:lnTo>
+                  <a:lnTo>
+                    <a:pt x="1406889" y="153468"/>
+                  </a:lnTo>
+                  <a:lnTo>
+                    <a:pt x="1477234" y="159965"/>
+                  </a:lnTo>
+                  <a:lnTo>
+                    <a:pt x="1547578" y="166362"/>
+                  </a:lnTo>
+                  <a:lnTo>
+                    <a:pt x="1617923" y="172660"/>
+                  </a:lnTo>
+                  <a:lnTo>
+                    <a:pt x="1688267" y="178862"/>
+                  </a:lnTo>
+                  <a:lnTo>
+                    <a:pt x="1758612" y="184969"/>
+                  </a:lnTo>
+                  <a:lnTo>
+                    <a:pt x="1828956" y="190982"/>
+                  </a:lnTo>
+                  <a:lnTo>
+                    <a:pt x="1899301" y="196903"/>
+                  </a:lnTo>
+                  <a:lnTo>
+                    <a:pt x="1969645" y="202733"/>
+                  </a:lnTo>
+                  <a:lnTo>
+                    <a:pt x="2039990" y="208473"/>
+                  </a:lnTo>
+                  <a:lnTo>
+                    <a:pt x="2110334" y="214125"/>
+                  </a:lnTo>
+                  <a:lnTo>
+                    <a:pt x="2180679" y="219690"/>
+                  </a:lnTo>
+                  <a:lnTo>
+                    <a:pt x="2251023" y="225170"/>
+                  </a:lnTo>
+                  <a:lnTo>
+                    <a:pt x="2321368" y="230566"/>
+                  </a:lnTo>
+                  <a:lnTo>
+                    <a:pt x="2391712" y="235879"/>
+                  </a:lnTo>
+                  <a:lnTo>
+                    <a:pt x="2462057" y="241110"/>
+                  </a:lnTo>
+                  <a:lnTo>
+                    <a:pt x="2532401" y="246261"/>
+                  </a:lnTo>
+                  <a:lnTo>
+                    <a:pt x="2602746" y="251333"/>
+                  </a:lnTo>
+                  <a:lnTo>
+                    <a:pt x="2673090" y="256327"/>
+                  </a:lnTo>
+                  <a:lnTo>
+                    <a:pt x="2743435" y="261244"/>
+                  </a:lnTo>
+                  <a:lnTo>
+                    <a:pt x="2813779" y="266086"/>
+                  </a:lnTo>
+                  <a:lnTo>
+                    <a:pt x="2884124" y="270853"/>
+                  </a:lnTo>
+                  <a:lnTo>
+                    <a:pt x="2954468" y="275547"/>
+                  </a:lnTo>
+                  <a:lnTo>
+                    <a:pt x="3024813" y="278554"/>
+                  </a:lnTo>
+                  <a:lnTo>
+                    <a:pt x="3095157" y="280628"/>
+                  </a:lnTo>
+                  <a:lnTo>
+                    <a:pt x="3165502" y="282688"/>
+                  </a:lnTo>
+                  <a:lnTo>
+                    <a:pt x="3235846" y="284733"/>
+                  </a:lnTo>
+                  <a:lnTo>
+                    <a:pt x="3306191" y="286764"/>
+                  </a:lnTo>
+                  <a:lnTo>
+                    <a:pt x="3376535" y="288780"/>
+                  </a:lnTo>
+                  <a:lnTo>
+                    <a:pt x="3446880" y="290783"/>
+                  </a:lnTo>
+                  <a:lnTo>
+                    <a:pt x="3517224" y="292772"/>
+                  </a:lnTo>
+                  <a:lnTo>
+                    <a:pt x="3587569" y="294747"/>
+                  </a:lnTo>
+                  <a:lnTo>
+                    <a:pt x="3657913" y="296708"/>
+                  </a:lnTo>
+                  <a:lnTo>
+                    <a:pt x="3728257" y="298656"/>
+                  </a:lnTo>
+                  <a:lnTo>
+                    <a:pt x="3798602" y="300590"/>
+                  </a:lnTo>
+                  <a:lnTo>
+                    <a:pt x="3868946" y="302510"/>
+                  </a:lnTo>
+                  <a:lnTo>
+                    <a:pt x="3939291" y="304418"/>
+                  </a:lnTo>
+                  <a:lnTo>
+                    <a:pt x="4009635" y="306311"/>
+                  </a:lnTo>
+                  <a:lnTo>
+                    <a:pt x="4079980" y="308192"/>
+                  </a:lnTo>
+                  <a:lnTo>
+                    <a:pt x="4150324" y="310060"/>
+                  </a:lnTo>
+                  <a:lnTo>
+                    <a:pt x="4220669" y="311914"/>
+                  </a:lnTo>
+                  <a:lnTo>
+                    <a:pt x="4291013" y="313756"/>
+                  </a:lnTo>
+                  <a:lnTo>
+                    <a:pt x="4361358" y="315585"/>
+                  </a:lnTo>
+                  <a:lnTo>
+                    <a:pt x="4431702" y="317401"/>
+                  </a:lnTo>
+                  <a:lnTo>
+                    <a:pt x="4502047" y="319205"/>
+                  </a:lnTo>
+                  <a:lnTo>
+                    <a:pt x="4572391" y="320996"/>
+                  </a:lnTo>
+                  <a:lnTo>
+                    <a:pt x="4642736" y="322774"/>
+                  </a:lnTo>
+                  <a:lnTo>
+                    <a:pt x="4713080" y="324541"/>
+                  </a:lnTo>
+                  <a:lnTo>
+                    <a:pt x="4783425" y="326295"/>
+                  </a:lnTo>
+                  <a:lnTo>
+                    <a:pt x="4853769" y="328036"/>
+                  </a:lnTo>
+                  <a:lnTo>
+                    <a:pt x="4924114" y="329766"/>
+                  </a:lnTo>
+                  <a:lnTo>
+                    <a:pt x="4994458" y="331483"/>
+                  </a:lnTo>
+                  <a:lnTo>
+                    <a:pt x="5064803" y="333189"/>
+                  </a:lnTo>
+                  <a:lnTo>
+                    <a:pt x="5135147" y="334882"/>
+                  </a:lnTo>
+                  <a:lnTo>
+                    <a:pt x="5205492" y="336564"/>
+                  </a:lnTo>
+                  <a:lnTo>
+                    <a:pt x="5275836" y="338235"/>
+                  </a:lnTo>
+                  <a:lnTo>
+                    <a:pt x="5346181" y="339893"/>
+                  </a:lnTo>
+                  <a:lnTo>
+                    <a:pt x="5416525" y="341540"/>
+                  </a:lnTo>
+                  <a:lnTo>
+                    <a:pt x="5486870" y="343176"/>
+                  </a:lnTo>
+                  <a:lnTo>
+                    <a:pt x="5557214" y="344800"/>
+                  </a:lnTo>
+                  <a:lnTo>
+                    <a:pt x="5627559" y="346413"/>
+                  </a:lnTo>
+                  <a:lnTo>
+                    <a:pt x="5697903" y="348014"/>
+                  </a:lnTo>
+                  <a:lnTo>
+                    <a:pt x="5768248" y="349605"/>
+                  </a:lnTo>
+                  <a:lnTo>
+                    <a:pt x="5838592" y="351184"/>
+                  </a:lnTo>
+                  <a:lnTo>
+                    <a:pt x="5908937" y="352753"/>
+                  </a:lnTo>
+                  <a:lnTo>
+                    <a:pt x="5979281" y="354310"/>
+                  </a:lnTo>
+                  <a:lnTo>
+                    <a:pt x="6049626" y="355857"/>
+                  </a:lnTo>
+                  <a:lnTo>
+                    <a:pt x="6119970" y="357393"/>
+                  </a:lnTo>
+                  <a:lnTo>
+                    <a:pt x="6190315" y="358918"/>
+                  </a:lnTo>
+                  <a:lnTo>
+                    <a:pt x="6260659" y="360433"/>
+                  </a:lnTo>
+                  <a:lnTo>
+                    <a:pt x="6331004" y="361937"/>
+                  </a:lnTo>
+                  <a:lnTo>
+                    <a:pt x="6401348" y="363431"/>
+                  </a:lnTo>
+                  <a:lnTo>
+                    <a:pt x="6471693" y="364914"/>
+                  </a:lnTo>
+                  <a:lnTo>
+                    <a:pt x="6542037" y="366387"/>
+                  </a:lnTo>
+                  <a:lnTo>
+                    <a:pt x="6612382" y="367849"/>
+                  </a:lnTo>
+                  <a:lnTo>
+                    <a:pt x="6682726" y="369302"/>
+                  </a:lnTo>
+                  <a:lnTo>
+                    <a:pt x="6753071" y="370744"/>
+                  </a:lnTo>
+                  <a:lnTo>
+                    <a:pt x="6823415" y="372176"/>
+                  </a:lnTo>
+                  <a:lnTo>
+                    <a:pt x="6893760" y="373599"/>
+                  </a:lnTo>
+                  <a:lnTo>
+                    <a:pt x="6964104" y="375011"/>
+                  </a:lnTo>
+                  <a:lnTo>
+                    <a:pt x="6964104" y="451958"/>
+                  </a:lnTo>
+                  <a:lnTo>
+                    <a:pt x="6893760" y="450015"/>
+                  </a:lnTo>
+                  <a:lnTo>
+                    <a:pt x="6823415" y="448041"/>
+                  </a:lnTo>
+                  <a:lnTo>
+                    <a:pt x="6753071" y="446037"/>
+                  </a:lnTo>
+                  <a:lnTo>
+                    <a:pt x="6682726" y="444002"/>
+                  </a:lnTo>
+                  <a:lnTo>
+                    <a:pt x="6612382" y="441935"/>
+                  </a:lnTo>
+                  <a:lnTo>
+                    <a:pt x="6542037" y="439835"/>
+                  </a:lnTo>
+                  <a:lnTo>
+                    <a:pt x="6471693" y="437703"/>
+                  </a:lnTo>
+                  <a:lnTo>
+                    <a:pt x="6401348" y="435538"/>
+                  </a:lnTo>
+                  <a:lnTo>
+                    <a:pt x="6331004" y="433339"/>
+                  </a:lnTo>
+                  <a:lnTo>
+                    <a:pt x="6260659" y="431105"/>
+                  </a:lnTo>
+                  <a:lnTo>
+                    <a:pt x="6190315" y="428837"/>
+                  </a:lnTo>
+                  <a:lnTo>
+                    <a:pt x="6119970" y="426533"/>
+                  </a:lnTo>
+                  <a:lnTo>
+                    <a:pt x="6049626" y="424194"/>
+                  </a:lnTo>
+                  <a:lnTo>
+                    <a:pt x="5979281" y="421818"/>
+                  </a:lnTo>
+                  <a:lnTo>
+                    <a:pt x="5908937" y="419405"/>
+                  </a:lnTo>
+                  <a:lnTo>
+                    <a:pt x="5838592" y="416954"/>
+                  </a:lnTo>
+                  <a:lnTo>
+                    <a:pt x="5768248" y="414465"/>
+                  </a:lnTo>
+                  <a:lnTo>
+                    <a:pt x="5697903" y="411937"/>
+                  </a:lnTo>
+                  <a:lnTo>
+                    <a:pt x="5627559" y="409370"/>
+                  </a:lnTo>
+                  <a:lnTo>
+                    <a:pt x="5557214" y="406763"/>
+                  </a:lnTo>
+                  <a:lnTo>
+                    <a:pt x="5486870" y="404115"/>
+                  </a:lnTo>
+                  <a:lnTo>
+                    <a:pt x="5416525" y="401426"/>
+                  </a:lnTo>
+                  <a:lnTo>
+                    <a:pt x="5346181" y="398694"/>
+                  </a:lnTo>
+                  <a:lnTo>
+                    <a:pt x="5275836" y="395921"/>
+                  </a:lnTo>
+                  <a:lnTo>
+                    <a:pt x="5205492" y="393104"/>
+                  </a:lnTo>
+                  <a:lnTo>
+                    <a:pt x="5135147" y="390243"/>
+                  </a:lnTo>
+                  <a:lnTo>
+                    <a:pt x="5064803" y="387337"/>
+                  </a:lnTo>
+                  <a:lnTo>
+                    <a:pt x="4994458" y="384386"/>
+                  </a:lnTo>
+                  <a:lnTo>
+                    <a:pt x="4924114" y="381390"/>
+                  </a:lnTo>
+                  <a:lnTo>
+                    <a:pt x="4853769" y="378346"/>
+                  </a:lnTo>
+                  <a:lnTo>
+                    <a:pt x="4783425" y="375255"/>
+                  </a:lnTo>
+                  <a:lnTo>
+                    <a:pt x="4713080" y="372116"/>
+                  </a:lnTo>
+                  <a:lnTo>
+                    <a:pt x="4642736" y="368928"/>
+                  </a:lnTo>
+                  <a:lnTo>
+                    <a:pt x="4572391" y="365690"/>
+                  </a:lnTo>
+                  <a:lnTo>
+                    <a:pt x="4502047" y="362401"/>
+                  </a:lnTo>
+                  <a:lnTo>
+                    <a:pt x="4431702" y="359061"/>
+                  </a:lnTo>
+                  <a:lnTo>
+                    <a:pt x="4361358" y="355670"/>
+                  </a:lnTo>
+                  <a:lnTo>
+                    <a:pt x="4291013" y="352225"/>
+                  </a:lnTo>
+                  <a:lnTo>
+                    <a:pt x="4220669" y="348727"/>
+                  </a:lnTo>
+                  <a:lnTo>
+                    <a:pt x="4150324" y="345174"/>
+                  </a:lnTo>
+                  <a:lnTo>
+                    <a:pt x="4079980" y="341565"/>
+                  </a:lnTo>
+                  <a:lnTo>
+                    <a:pt x="4009635" y="337900"/>
+                  </a:lnTo>
+                  <a:lnTo>
+                    <a:pt x="3939291" y="334179"/>
+                  </a:lnTo>
+                  <a:lnTo>
+                    <a:pt x="3868946" y="330399"/>
+                  </a:lnTo>
+                  <a:lnTo>
+                    <a:pt x="3798602" y="326560"/>
+                  </a:lnTo>
+                  <a:lnTo>
+                    <a:pt x="3728257" y="322661"/>
+                  </a:lnTo>
+                  <a:lnTo>
+                    <a:pt x="3657913" y="318702"/>
+                  </a:lnTo>
+                  <a:lnTo>
+                    <a:pt x="3587569" y="314681"/>
+                  </a:lnTo>
+                  <a:lnTo>
+                    <a:pt x="3517224" y="310597"/>
+                  </a:lnTo>
+                  <a:lnTo>
+                    <a:pt x="3446880" y="306449"/>
+                  </a:lnTo>
+                  <a:lnTo>
+                    <a:pt x="3376535" y="302237"/>
+                  </a:lnTo>
+                  <a:lnTo>
+                    <a:pt x="3306191" y="297959"/>
+                  </a:lnTo>
+                  <a:lnTo>
+                    <a:pt x="3235846" y="293614"/>
+                  </a:lnTo>
+                  <a:lnTo>
+                    <a:pt x="3165502" y="289202"/>
+                  </a:lnTo>
+                  <a:lnTo>
+                    <a:pt x="3095157" y="284720"/>
+                  </a:lnTo>
+                  <a:lnTo>
+                    <a:pt x="3024813" y="280169"/>
+                  </a:lnTo>
+                  <a:lnTo>
+                    <a:pt x="2954468" y="276466"/>
+                  </a:lnTo>
+                  <a:lnTo>
+                    <a:pt x="2884124" y="274363"/>
+                  </a:lnTo>
+                  <a:lnTo>
+                    <a:pt x="2813779" y="272245"/>
+                  </a:lnTo>
+                  <a:lnTo>
+                    <a:pt x="2743435" y="270112"/>
+                  </a:lnTo>
+                  <a:lnTo>
+                    <a:pt x="2673090" y="267965"/>
+                  </a:lnTo>
+                  <a:lnTo>
+                    <a:pt x="2602746" y="265802"/>
+                  </a:lnTo>
+                  <a:lnTo>
+                    <a:pt x="2532401" y="263624"/>
+                  </a:lnTo>
+                  <a:lnTo>
+                    <a:pt x="2462057" y="261431"/>
+                  </a:lnTo>
+                  <a:lnTo>
+                    <a:pt x="2391712" y="259223"/>
+                  </a:lnTo>
+                  <a:lnTo>
+                    <a:pt x="2321368" y="256999"/>
+                  </a:lnTo>
+                  <a:lnTo>
+                    <a:pt x="2251023" y="254759"/>
+                  </a:lnTo>
+                  <a:lnTo>
+                    <a:pt x="2180679" y="252504"/>
+                  </a:lnTo>
+                  <a:lnTo>
+                    <a:pt x="2110334" y="250233"/>
+                  </a:lnTo>
+                  <a:lnTo>
+                    <a:pt x="2039990" y="247946"/>
+                  </a:lnTo>
+                  <a:lnTo>
+                    <a:pt x="1969645" y="245643"/>
+                  </a:lnTo>
+                  <a:lnTo>
+                    <a:pt x="1899301" y="243324"/>
+                  </a:lnTo>
+                  <a:lnTo>
+                    <a:pt x="1828956" y="240989"/>
+                  </a:lnTo>
+                  <a:lnTo>
+                    <a:pt x="1758612" y="238637"/>
+                  </a:lnTo>
+                  <a:lnTo>
+                    <a:pt x="1688267" y="236269"/>
+                  </a:lnTo>
+                  <a:lnTo>
+                    <a:pt x="1617923" y="233884"/>
+                  </a:lnTo>
+                  <a:lnTo>
+                    <a:pt x="1547578" y="231482"/>
+                  </a:lnTo>
+                  <a:lnTo>
+                    <a:pt x="1477234" y="229064"/>
+                  </a:lnTo>
+                  <a:lnTo>
+                    <a:pt x="1406889" y="226629"/>
+                  </a:lnTo>
+                  <a:lnTo>
+                    <a:pt x="1336545" y="224176"/>
+                  </a:lnTo>
+                  <a:lnTo>
+                    <a:pt x="1266200" y="221707"/>
+                  </a:lnTo>
+                  <a:lnTo>
+                    <a:pt x="1195856" y="219220"/>
+                  </a:lnTo>
+                  <a:lnTo>
+                    <a:pt x="1125511" y="216716"/>
+                  </a:lnTo>
+                  <a:lnTo>
+                    <a:pt x="1055167" y="214194"/>
+                  </a:lnTo>
+                  <a:lnTo>
+                    <a:pt x="984822" y="211654"/>
+                  </a:lnTo>
+                  <a:lnTo>
+                    <a:pt x="914478" y="209097"/>
+                  </a:lnTo>
+                  <a:lnTo>
+                    <a:pt x="844133" y="206522"/>
+                  </a:lnTo>
+                  <a:lnTo>
+                    <a:pt x="773789" y="203929"/>
+                  </a:lnTo>
+                  <a:lnTo>
+                    <a:pt x="703444" y="201317"/>
+                  </a:lnTo>
+                  <a:lnTo>
+                    <a:pt x="633100" y="198687"/>
+                  </a:lnTo>
+                  <a:lnTo>
+                    <a:pt x="562755" y="196039"/>
+                  </a:lnTo>
+                  <a:lnTo>
+                    <a:pt x="492411" y="193372"/>
+                  </a:lnTo>
+                  <a:lnTo>
+                    <a:pt x="422066" y="190687"/>
+                  </a:lnTo>
+                  <a:lnTo>
+                    <a:pt x="351722" y="187983"/>
+                  </a:lnTo>
+                  <a:lnTo>
+                    <a:pt x="281377" y="185260"/>
+                  </a:lnTo>
+                  <a:lnTo>
+                    <a:pt x="211033" y="182517"/>
+                  </a:lnTo>
+                  <a:lnTo>
+                    <a:pt x="140688" y="179756"/>
+                  </a:lnTo>
+                  <a:lnTo>
+                    <a:pt x="70344" y="176975"/>
+                  </a:lnTo>
+                  <a:lnTo>
+                    <a:pt x="0" y="174175"/>
+                  </a:lnTo>
+                  <a:close/>
+                </a:path>
+              </a:pathLst>
+            </a:custGeom>
+            <a:solidFill>
+              <a:srgbClr val="FF8C00">
+                <a:alpha val="20000"/>
+              </a:srgbClr>
+            </a:solidFill>
+          </p:spPr>
+          <p:txBody>
+            <a:bodyPr/>
+            <a:lstStyle/>
+            <a:p/>
+          </p:txBody>
+        </p:sp>
+        <p:sp>
+          <p:nvSpPr>
+            <p:cNvPr id="71" name="pl71"/>
+            <p:cNvSpPr/>
+            <p:nvPr/>
+          </p:nvSpPr>
+          <p:spPr>
+            <a:xfrm>
+              <a:off x="1235312" y="5017133"/>
+              <a:ext cx="6964104" cy="375011"/>
+            </a:xfrm>
+            <a:custGeom>
+              <a:avLst/>
+              <a:pathLst>
+                <a:path w="6964104" h="375011">
+                  <a:moveTo>
+                    <a:pt x="0" y="0"/>
+                  </a:moveTo>
+                  <a:lnTo>
+                    <a:pt x="70344" y="8853"/>
+                  </a:lnTo>
+                  <a:lnTo>
+                    <a:pt x="140688" y="17570"/>
+                  </a:lnTo>
+                  <a:lnTo>
+                    <a:pt x="211033" y="26154"/>
+                  </a:lnTo>
+                  <a:lnTo>
+                    <a:pt x="281377" y="34605"/>
+                  </a:lnTo>
+                  <a:lnTo>
+                    <a:pt x="351722" y="42927"/>
+                  </a:lnTo>
+                  <a:lnTo>
+                    <a:pt x="422066" y="51122"/>
+                  </a:lnTo>
+                  <a:lnTo>
+                    <a:pt x="492411" y="59190"/>
+                  </a:lnTo>
+                  <a:lnTo>
+                    <a:pt x="562755" y="67134"/>
+                  </a:lnTo>
+                  <a:lnTo>
+                    <a:pt x="633100" y="74957"/>
+                  </a:lnTo>
+                  <a:lnTo>
+                    <a:pt x="703444" y="82659"/>
+                  </a:lnTo>
+                  <a:lnTo>
+                    <a:pt x="773789" y="90243"/>
+                  </a:lnTo>
+                  <a:lnTo>
+                    <a:pt x="844133" y="97711"/>
+                  </a:lnTo>
+                  <a:lnTo>
+                    <a:pt x="914478" y="105064"/>
+                  </a:lnTo>
+                  <a:lnTo>
+                    <a:pt x="984822" y="112304"/>
+                  </a:lnTo>
+                  <a:lnTo>
+                    <a:pt x="1055167" y="119432"/>
+                  </a:lnTo>
+                  <a:lnTo>
+                    <a:pt x="1125511" y="126452"/>
+                  </a:lnTo>
+                  <a:lnTo>
+                    <a:pt x="1195856" y="133363"/>
+                  </a:lnTo>
+                  <a:lnTo>
+                    <a:pt x="1266200" y="140169"/>
+                  </a:lnTo>
+                  <a:lnTo>
+                    <a:pt x="1336545" y="146870"/>
+                  </a:lnTo>
+                  <a:lnTo>
+                    <a:pt x="1406889" y="153468"/>
+                  </a:lnTo>
+                  <a:lnTo>
+                    <a:pt x="1477234" y="159965"/>
+                  </a:lnTo>
+                  <a:lnTo>
+                    <a:pt x="1547578" y="166362"/>
+                  </a:lnTo>
+                  <a:lnTo>
+                    <a:pt x="1617923" y="172660"/>
+                  </a:lnTo>
+                  <a:lnTo>
+                    <a:pt x="1688267" y="178862"/>
+                  </a:lnTo>
+                  <a:lnTo>
+                    <a:pt x="1758612" y="184969"/>
+                  </a:lnTo>
+                  <a:lnTo>
+                    <a:pt x="1828956" y="190982"/>
+                  </a:lnTo>
+                  <a:lnTo>
+                    <a:pt x="1899301" y="196903"/>
+                  </a:lnTo>
+                  <a:lnTo>
+                    <a:pt x="1969645" y="202733"/>
+                  </a:lnTo>
+                  <a:lnTo>
+                    <a:pt x="2039990" y="208473"/>
+                  </a:lnTo>
+                  <a:lnTo>
+                    <a:pt x="2110334" y="214125"/>
+                  </a:lnTo>
+                  <a:lnTo>
+                    <a:pt x="2180679" y="219690"/>
+                  </a:lnTo>
+                  <a:lnTo>
+                    <a:pt x="2251023" y="225170"/>
+                  </a:lnTo>
+                  <a:lnTo>
+                    <a:pt x="2321368" y="230566"/>
+                  </a:lnTo>
+                  <a:lnTo>
+                    <a:pt x="2391712" y="235879"/>
+                  </a:lnTo>
+                  <a:lnTo>
+                    <a:pt x="2462057" y="241110"/>
+                  </a:lnTo>
+                  <a:lnTo>
+                    <a:pt x="2532401" y="246261"/>
+                  </a:lnTo>
+                  <a:lnTo>
+                    <a:pt x="2602746" y="251333"/>
+                  </a:lnTo>
+                  <a:lnTo>
+                    <a:pt x="2673090" y="256327"/>
+                  </a:lnTo>
+                  <a:lnTo>
+                    <a:pt x="2743435" y="261244"/>
+                  </a:lnTo>
+                  <a:lnTo>
+                    <a:pt x="2813779" y="266086"/>
+                  </a:lnTo>
+                  <a:lnTo>
+                    <a:pt x="2884124" y="270853"/>
+                  </a:lnTo>
+                  <a:lnTo>
+                    <a:pt x="2954468" y="275547"/>
+                  </a:lnTo>
+                  <a:lnTo>
+                    <a:pt x="3024813" y="278554"/>
+                  </a:lnTo>
+                  <a:lnTo>
+                    <a:pt x="3095157" y="280628"/>
+                  </a:lnTo>
+                  <a:lnTo>
+                    <a:pt x="3165502" y="282688"/>
+                  </a:lnTo>
+                  <a:lnTo>
+                    <a:pt x="3235846" y="284733"/>
+                  </a:lnTo>
+                  <a:lnTo>
+                    <a:pt x="3306191" y="286764"/>
+                  </a:lnTo>
+                  <a:lnTo>
+                    <a:pt x="3376535" y="288780"/>
+                  </a:lnTo>
+                  <a:lnTo>
+                    <a:pt x="3446880" y="290783"/>
+                  </a:lnTo>
+                  <a:lnTo>
+                    <a:pt x="3517224" y="292772"/>
+                  </a:lnTo>
+                  <a:lnTo>
+                    <a:pt x="3587569" y="294747"/>
+                  </a:lnTo>
+                  <a:lnTo>
+                    <a:pt x="3657913" y="296708"/>
+                  </a:lnTo>
+                  <a:lnTo>
+                    <a:pt x="3728257" y="298656"/>
+                  </a:lnTo>
+                  <a:lnTo>
+                    <a:pt x="3798602" y="300590"/>
+                  </a:lnTo>
+                  <a:lnTo>
+                    <a:pt x="3868946" y="302510"/>
+                  </a:lnTo>
+                  <a:lnTo>
+                    <a:pt x="3939291" y="304418"/>
+                  </a:lnTo>
+                  <a:lnTo>
+                    <a:pt x="4009635" y="306311"/>
+                  </a:lnTo>
+                  <a:lnTo>
+                    <a:pt x="4079980" y="308192"/>
+                  </a:lnTo>
+                  <a:lnTo>
+                    <a:pt x="4150324" y="310060"/>
+                  </a:lnTo>
+                  <a:lnTo>
+                    <a:pt x="4220669" y="311914"/>
+                  </a:lnTo>
+                  <a:lnTo>
+                    <a:pt x="4291013" y="313756"/>
+                  </a:lnTo>
+                  <a:lnTo>
+                    <a:pt x="4361358" y="315585"/>
+                  </a:lnTo>
+                  <a:lnTo>
+                    <a:pt x="4431702" y="317401"/>
+                  </a:lnTo>
+                  <a:lnTo>
+                    <a:pt x="4502047" y="319205"/>
+                  </a:lnTo>
+                  <a:lnTo>
+                    <a:pt x="4572391" y="320996"/>
+                  </a:lnTo>
+                  <a:lnTo>
+                    <a:pt x="4642736" y="322774"/>
+                  </a:lnTo>
+                  <a:lnTo>
+                    <a:pt x="4713080" y="324541"/>
+                  </a:lnTo>
+                  <a:lnTo>
+                    <a:pt x="4783425" y="326295"/>
+                  </a:lnTo>
+                  <a:lnTo>
+                    <a:pt x="4853769" y="328036"/>
+                  </a:lnTo>
+                  <a:lnTo>
+                    <a:pt x="4924114" y="329766"/>
+                  </a:lnTo>
+                  <a:lnTo>
+                    <a:pt x="4994458" y="331483"/>
+                  </a:lnTo>
+                  <a:lnTo>
+                    <a:pt x="5064803" y="333189"/>
+                  </a:lnTo>
+                  <a:lnTo>
+                    <a:pt x="5135147" y="334882"/>
+                  </a:lnTo>
+                  <a:lnTo>
+                    <a:pt x="5205492" y="336564"/>
+                  </a:lnTo>
+                  <a:lnTo>
+                    <a:pt x="5275836" y="338235"/>
+                  </a:lnTo>
+                  <a:lnTo>
+                    <a:pt x="5346181" y="339893"/>
+                  </a:lnTo>
+                  <a:lnTo>
+                    <a:pt x="5416525" y="341540"/>
+                  </a:lnTo>
+                  <a:lnTo>
+                    <a:pt x="5486870" y="343176"/>
+                  </a:lnTo>
+                  <a:lnTo>
+                    <a:pt x="5557214" y="344800"/>
+                  </a:lnTo>
+                  <a:lnTo>
+                    <a:pt x="5627559" y="346413"/>
+                  </a:lnTo>
+                  <a:lnTo>
+                    <a:pt x="5697903" y="348014"/>
+                  </a:lnTo>
+                  <a:lnTo>
+                    <a:pt x="5768248" y="349605"/>
+                  </a:lnTo>
+                  <a:lnTo>
+                    <a:pt x="5838592" y="351184"/>
+                  </a:lnTo>
+                  <a:lnTo>
+                    <a:pt x="5908937" y="352753"/>
+                  </a:lnTo>
+                  <a:lnTo>
+                    <a:pt x="5979281" y="354310"/>
+                  </a:lnTo>
+                  <a:lnTo>
+                    <a:pt x="6049626" y="355857"/>
+                  </a:lnTo>
+                  <a:lnTo>
+                    <a:pt x="6119970" y="357393"/>
+                  </a:lnTo>
+                  <a:lnTo>
+                    <a:pt x="6190315" y="358918"/>
+                  </a:lnTo>
+                  <a:lnTo>
+                    <a:pt x="6260659" y="360433"/>
+                  </a:lnTo>
+                  <a:lnTo>
+                    <a:pt x="6331004" y="361937"/>
+                  </a:lnTo>
+                  <a:lnTo>
+                    <a:pt x="6401348" y="363431"/>
+                  </a:lnTo>
+                  <a:lnTo>
+                    <a:pt x="6471693" y="364914"/>
+                  </a:lnTo>
+                  <a:lnTo>
+                    <a:pt x="6542037" y="366387"/>
+                  </a:lnTo>
+                  <a:lnTo>
+                    <a:pt x="6612382" y="367849"/>
+                  </a:lnTo>
+                  <a:lnTo>
+                    <a:pt x="6682726" y="369302"/>
+                  </a:lnTo>
+                  <a:lnTo>
+                    <a:pt x="6753071" y="370744"/>
+                  </a:lnTo>
+                  <a:lnTo>
+                    <a:pt x="6823415" y="372176"/>
+                  </a:lnTo>
+                  <a:lnTo>
+                    <a:pt x="6893760" y="373599"/>
+                  </a:lnTo>
+                  <a:lnTo>
+                    <a:pt x="6964104" y="375011"/>
+                  </a:lnTo>
+                </a:path>
+              </a:pathLst>
+            </a:custGeom>
+          </p:spPr>
+          <p:txBody>
+            <a:bodyPr/>
+            <a:lstStyle/>
+            <a:p/>
+          </p:txBody>
+        </p:sp>
+        <p:sp>
+          <p:nvSpPr>
+            <p:cNvPr id="72" name="pl72"/>
+            <p:cNvSpPr/>
+            <p:nvPr/>
+          </p:nvSpPr>
+          <p:spPr>
+            <a:xfrm>
+              <a:off x="1235312" y="5191308"/>
+              <a:ext cx="6964104" cy="277783"/>
+            </a:xfrm>
+            <a:custGeom>
+              <a:avLst/>
+              <a:pathLst>
+                <a:path w="6964104" h="277783">
+                  <a:moveTo>
+                    <a:pt x="6964104" y="277783"/>
+                  </a:moveTo>
+                  <a:lnTo>
+                    <a:pt x="6893760" y="275840"/>
+                  </a:lnTo>
+                  <a:lnTo>
+                    <a:pt x="6823415" y="273866"/>
+                  </a:lnTo>
+                  <a:lnTo>
+                    <a:pt x="6753071" y="271862"/>
+                  </a:lnTo>
+                  <a:lnTo>
+                    <a:pt x="6682726" y="269827"/>
+                  </a:lnTo>
+                  <a:lnTo>
+                    <a:pt x="6612382" y="267760"/>
+                  </a:lnTo>
+                  <a:lnTo>
+                    <a:pt x="6542037" y="265660"/>
+                  </a:lnTo>
+                  <a:lnTo>
+                    <a:pt x="6471693" y="263528"/>
+                  </a:lnTo>
+                  <a:lnTo>
+                    <a:pt x="6401348" y="261363"/>
+                  </a:lnTo>
+                  <a:lnTo>
+                    <a:pt x="6331004" y="259164"/>
+                  </a:lnTo>
+                  <a:lnTo>
+                    <a:pt x="6260659" y="256930"/>
+                  </a:lnTo>
+                  <a:lnTo>
+                    <a:pt x="6190315" y="254662"/>
+                  </a:lnTo>
+                  <a:lnTo>
+                    <a:pt x="6119970" y="252358"/>
+                  </a:lnTo>
+                  <a:lnTo>
+                    <a:pt x="6049626" y="250019"/>
+                  </a:lnTo>
+                  <a:lnTo>
+                    <a:pt x="5979281" y="247643"/>
+                  </a:lnTo>
+                  <a:lnTo>
+                    <a:pt x="5908937" y="245230"/>
+                  </a:lnTo>
+                  <a:lnTo>
+                    <a:pt x="5838592" y="242779"/>
+                  </a:lnTo>
+                  <a:lnTo>
+                    <a:pt x="5768248" y="240290"/>
+                  </a:lnTo>
+                  <a:lnTo>
+                    <a:pt x="5697903" y="237762"/>
+                  </a:lnTo>
+                  <a:lnTo>
+                    <a:pt x="5627559" y="235195"/>
+                  </a:lnTo>
+                  <a:lnTo>
+                    <a:pt x="5557214" y="232588"/>
+                  </a:lnTo>
+                  <a:lnTo>
+                    <a:pt x="5486870" y="229940"/>
+                  </a:lnTo>
+                  <a:lnTo>
+                    <a:pt x="5416525" y="227251"/>
+                  </a:lnTo>
+                  <a:lnTo>
+                    <a:pt x="5346181" y="224519"/>
+                  </a:lnTo>
+                  <a:lnTo>
+                    <a:pt x="5275836" y="221746"/>
+                  </a:lnTo>
+                  <a:lnTo>
+                    <a:pt x="5205492" y="218929"/>
+                  </a:lnTo>
+                  <a:lnTo>
+                    <a:pt x="5135147" y="216068"/>
+                  </a:lnTo>
+                  <a:lnTo>
+                    <a:pt x="5064803" y="213162"/>
+                  </a:lnTo>
+                  <a:lnTo>
+                    <a:pt x="4994458" y="210211"/>
+                  </a:lnTo>
+                  <a:lnTo>
+                    <a:pt x="4924114" y="207215"/>
+                  </a:lnTo>
+                  <a:lnTo>
+                    <a:pt x="4853769" y="204171"/>
+                  </a:lnTo>
+                  <a:lnTo>
+                    <a:pt x="4783425" y="201080"/>
+                  </a:lnTo>
+                  <a:lnTo>
+                    <a:pt x="4713080" y="197941"/>
+                  </a:lnTo>
+                  <a:lnTo>
+                    <a:pt x="4642736" y="194752"/>
+                  </a:lnTo>
+                  <a:lnTo>
+                    <a:pt x="4572391" y="191515"/>
+                  </a:lnTo>
+                  <a:lnTo>
+                    <a:pt x="4502047" y="188226"/>
+                  </a:lnTo>
+                  <a:lnTo>
+                    <a:pt x="4431702" y="184886"/>
+                  </a:lnTo>
+                  <a:lnTo>
+                    <a:pt x="4361358" y="181495"/>
+                  </a:lnTo>
+                  <a:lnTo>
+                    <a:pt x="4291013" y="178050"/>
+                  </a:lnTo>
+                  <a:lnTo>
+                    <a:pt x="4220669" y="174551"/>
+                  </a:lnTo>
+                  <a:lnTo>
+                    <a:pt x="4150324" y="170998"/>
+                  </a:lnTo>
+                  <a:lnTo>
+                    <a:pt x="4079980" y="167390"/>
+                  </a:lnTo>
+                  <a:lnTo>
+                    <a:pt x="4009635" y="163725"/>
+                  </a:lnTo>
+                  <a:lnTo>
+                    <a:pt x="3939291" y="160004"/>
+                  </a:lnTo>
+                  <a:lnTo>
+                    <a:pt x="3868946" y="156224"/>
+                  </a:lnTo>
+                  <a:lnTo>
+                    <a:pt x="3798602" y="152385"/>
+                  </a:lnTo>
+                  <a:lnTo>
+                    <a:pt x="3728257" y="148486"/>
+                  </a:lnTo>
+                  <a:lnTo>
+                    <a:pt x="3657913" y="144527"/>
+                  </a:lnTo>
+                  <a:lnTo>
+                    <a:pt x="3587569" y="140506"/>
+                  </a:lnTo>
+                  <a:lnTo>
+                    <a:pt x="3517224" y="136422"/>
+                  </a:lnTo>
+                  <a:lnTo>
+                    <a:pt x="3446880" y="132274"/>
+                  </a:lnTo>
+                  <a:lnTo>
+                    <a:pt x="3376535" y="128062"/>
+                  </a:lnTo>
+                  <a:lnTo>
+                    <a:pt x="3306191" y="123784"/>
+                  </a:lnTo>
+                  <a:lnTo>
+                    <a:pt x="3235846" y="119439"/>
+                  </a:lnTo>
+                  <a:lnTo>
+                    <a:pt x="3165502" y="115027"/>
+                  </a:lnTo>
+                  <a:lnTo>
+                    <a:pt x="3095157" y="110545"/>
+                  </a:lnTo>
+                  <a:lnTo>
+                    <a:pt x="3024813" y="105994"/>
+                  </a:lnTo>
+                  <a:lnTo>
+                    <a:pt x="2954468" y="102291"/>
+                  </a:lnTo>
+                  <a:lnTo>
+                    <a:pt x="2884124" y="100188"/>
+                  </a:lnTo>
+                  <a:lnTo>
+                    <a:pt x="2813779" y="98070"/>
+                  </a:lnTo>
+                  <a:lnTo>
+                    <a:pt x="2743435" y="95937"/>
+                  </a:lnTo>
+                  <a:lnTo>
+                    <a:pt x="2673090" y="93789"/>
+                  </a:lnTo>
+                  <a:lnTo>
+                    <a:pt x="2602746" y="91627"/>
+                  </a:lnTo>
+                  <a:lnTo>
+                    <a:pt x="2532401" y="89449"/>
+                  </a:lnTo>
+                  <a:lnTo>
+                    <a:pt x="2462057" y="87256"/>
+                  </a:lnTo>
+                  <a:lnTo>
+                    <a:pt x="2391712" y="85047"/>
+                  </a:lnTo>
+                  <a:lnTo>
+                    <a:pt x="2321368" y="82824"/>
+                  </a:lnTo>
+                  <a:lnTo>
+                    <a:pt x="2251023" y="80584"/>
+                  </a:lnTo>
+                  <a:lnTo>
+                    <a:pt x="2180679" y="78329"/>
+                  </a:lnTo>
+                  <a:lnTo>
+                    <a:pt x="2110334" y="76058"/>
+                  </a:lnTo>
+                  <a:lnTo>
+                    <a:pt x="2039990" y="73771"/>
+                  </a:lnTo>
+                  <a:lnTo>
+                    <a:pt x="1969645" y="71468"/>
+                  </a:lnTo>
+                  <a:lnTo>
+                    <a:pt x="1899301" y="69149"/>
+                  </a:lnTo>
+                  <a:lnTo>
+                    <a:pt x="1828956" y="66813"/>
+                  </a:lnTo>
+                  <a:lnTo>
+                    <a:pt x="1758612" y="64462"/>
+                  </a:lnTo>
+                  <a:lnTo>
+                    <a:pt x="1688267" y="62094"/>
+                  </a:lnTo>
+                  <a:lnTo>
+                    <a:pt x="1617923" y="59709"/>
+                  </a:lnTo>
+                  <a:lnTo>
+                    <a:pt x="1547578" y="57307"/>
+                  </a:lnTo>
+                  <a:lnTo>
+                    <a:pt x="1477234" y="54889"/>
+                  </a:lnTo>
+                  <a:lnTo>
+                    <a:pt x="1406889" y="52454"/>
+                  </a:lnTo>
+                  <a:lnTo>
+                    <a:pt x="1336545" y="50001"/>
+                  </a:lnTo>
+                  <a:lnTo>
+                    <a:pt x="1266200" y="47532"/>
+                  </a:lnTo>
+                  <a:lnTo>
+                    <a:pt x="1195856" y="45045"/>
+                  </a:lnTo>
+                  <a:lnTo>
+                    <a:pt x="1125511" y="42541"/>
+                  </a:lnTo>
+                  <a:lnTo>
+                    <a:pt x="1055167" y="40019"/>
+                  </a:lnTo>
+                  <a:lnTo>
+                    <a:pt x="984822" y="37479"/>
+                  </a:lnTo>
+                  <a:lnTo>
+                    <a:pt x="914478" y="34922"/>
+                  </a:lnTo>
+                  <a:lnTo>
+                    <a:pt x="844133" y="32347"/>
+                  </a:lnTo>
+                  <a:lnTo>
+                    <a:pt x="773789" y="29753"/>
+                  </a:lnTo>
+                  <a:lnTo>
+                    <a:pt x="703444" y="27142"/>
+                  </a:lnTo>
+                  <a:lnTo>
+                    <a:pt x="633100" y="24512"/>
+                  </a:lnTo>
+                  <a:lnTo>
+                    <a:pt x="562755" y="21864"/>
+                  </a:lnTo>
+                  <a:lnTo>
+                    <a:pt x="492411" y="19197"/>
+                  </a:lnTo>
+                  <a:lnTo>
+                    <a:pt x="422066" y="16512"/>
+                  </a:lnTo>
+                  <a:lnTo>
+                    <a:pt x="351722" y="13808"/>
+                  </a:lnTo>
+                  <a:lnTo>
+                    <a:pt x="281377" y="11084"/>
+                  </a:lnTo>
+                  <a:lnTo>
+                    <a:pt x="211033" y="8342"/>
+                  </a:lnTo>
+                  <a:lnTo>
+                    <a:pt x="140688" y="5581"/>
+                  </a:lnTo>
+                  <a:lnTo>
+                    <a:pt x="70344" y="2800"/>
+                  </a:lnTo>
+                  <a:lnTo>
+                    <a:pt x="0" y="0"/>
+                  </a:lnTo>
+                </a:path>
+              </a:pathLst>
+            </a:custGeom>
+          </p:spPr>
+          <p:txBody>
+            <a:bodyPr/>
+            <a:lstStyle/>
+            <a:p/>
+          </p:txBody>
+        </p:sp>
+        <p:sp>
+          <p:nvSpPr>
+            <p:cNvPr id="73" name="pl73"/>
+            <p:cNvSpPr/>
+            <p:nvPr/>
+          </p:nvSpPr>
+          <p:spPr>
+            <a:xfrm>
+              <a:off x="1235312" y="5112030"/>
+              <a:ext cx="6964104" cy="323191"/>
+            </a:xfrm>
+            <a:custGeom>
+              <a:avLst/>
+              <a:pathLst>
+                <a:path w="6964104" h="323191">
+                  <a:moveTo>
+                    <a:pt x="0" y="0"/>
+                  </a:moveTo>
+                  <a:lnTo>
+                    <a:pt x="70344" y="5378"/>
+                  </a:lnTo>
+                  <a:lnTo>
+                    <a:pt x="140688" y="10696"/>
+                  </a:lnTo>
+                  <a:lnTo>
+                    <a:pt x="211033" y="15955"/>
+                  </a:lnTo>
+                  <a:lnTo>
+                    <a:pt x="281377" y="21155"/>
+                  </a:lnTo>
+                  <a:lnTo>
+                    <a:pt x="351722" y="26298"/>
+                  </a:lnTo>
+                  <a:lnTo>
+                    <a:pt x="422066" y="31382"/>
+                  </a:lnTo>
+                  <a:lnTo>
+                    <a:pt x="492411" y="36410"/>
+                  </a:lnTo>
+                  <a:lnTo>
+                    <a:pt x="562755" y="41382"/>
+                  </a:lnTo>
+                  <a:lnTo>
+                    <a:pt x="633100" y="46298"/>
+                  </a:lnTo>
+                  <a:lnTo>
+                    <a:pt x="703444" y="51160"/>
+                  </a:lnTo>
+                  <a:lnTo>
+                    <a:pt x="773789" y="55967"/>
+                  </a:lnTo>
+                  <a:lnTo>
+                    <a:pt x="844133" y="60720"/>
+                  </a:lnTo>
+                  <a:lnTo>
+                    <a:pt x="914478" y="65421"/>
+                  </a:lnTo>
+                  <a:lnTo>
+                    <a:pt x="984822" y="70069"/>
+                  </a:lnTo>
+                  <a:lnTo>
+                    <a:pt x="1055167" y="74664"/>
+                  </a:lnTo>
+                  <a:lnTo>
+                    <a:pt x="1125511" y="79209"/>
+                  </a:lnTo>
+                  <a:lnTo>
+                    <a:pt x="1195856" y="83703"/>
+                  </a:lnTo>
+                  <a:lnTo>
+                    <a:pt x="1266200" y="88147"/>
+                  </a:lnTo>
+                  <a:lnTo>
+                    <a:pt x="1336545" y="92541"/>
+                  </a:lnTo>
+                  <a:lnTo>
+                    <a:pt x="1406889" y="96886"/>
+                  </a:lnTo>
+                  <a:lnTo>
+                    <a:pt x="1477234" y="101182"/>
+                  </a:lnTo>
+                  <a:lnTo>
+                    <a:pt x="1547578" y="105431"/>
+                  </a:lnTo>
+                  <a:lnTo>
+                    <a:pt x="1617923" y="109632"/>
+                  </a:lnTo>
+                  <a:lnTo>
+                    <a:pt x="1688267" y="113786"/>
+                  </a:lnTo>
+                  <a:lnTo>
+                    <a:pt x="1758612" y="117894"/>
+                  </a:lnTo>
+                  <a:lnTo>
+                    <a:pt x="1828956" y="121956"/>
+                  </a:lnTo>
+                  <a:lnTo>
+                    <a:pt x="1899301" y="125973"/>
+                  </a:lnTo>
+                  <a:lnTo>
+                    <a:pt x="1969645" y="129944"/>
+                  </a:lnTo>
+                  <a:lnTo>
+                    <a:pt x="2039990" y="133872"/>
+                  </a:lnTo>
+                  <a:lnTo>
+                    <a:pt x="2110334" y="137755"/>
+                  </a:lnTo>
+                  <a:lnTo>
+                    <a:pt x="2180679" y="141595"/>
+                  </a:lnTo>
+                  <a:lnTo>
+                    <a:pt x="2251023" y="145393"/>
+                  </a:lnTo>
+                  <a:lnTo>
+                    <a:pt x="2321368" y="149147"/>
+                  </a:lnTo>
+                  <a:lnTo>
+                    <a:pt x="2391712" y="152860"/>
+                  </a:lnTo>
+                  <a:lnTo>
+                    <a:pt x="2462057" y="156532"/>
+                  </a:lnTo>
+                  <a:lnTo>
+                    <a:pt x="2532401" y="160162"/>
+                  </a:lnTo>
+                  <a:lnTo>
+                    <a:pt x="2602746" y="163752"/>
+                  </a:lnTo>
+                  <a:lnTo>
+                    <a:pt x="2673090" y="167302"/>
+                  </a:lnTo>
+                  <a:lnTo>
+                    <a:pt x="2743435" y="170812"/>
+                  </a:lnTo>
+                  <a:lnTo>
+                    <a:pt x="2813779" y="174283"/>
+                  </a:lnTo>
+                  <a:lnTo>
+                    <a:pt x="2884124" y="177716"/>
+                  </a:lnTo>
+                  <a:lnTo>
+                    <a:pt x="2954468" y="181110"/>
+                  </a:lnTo>
+                  <a:lnTo>
+                    <a:pt x="3024813" y="184466"/>
+                  </a:lnTo>
+                  <a:lnTo>
+                    <a:pt x="3095157" y="187784"/>
+                  </a:lnTo>
+                  <a:lnTo>
+                    <a:pt x="3165502" y="191066"/>
+                  </a:lnTo>
+                  <a:lnTo>
+                    <a:pt x="3235846" y="194310"/>
+                  </a:lnTo>
+                  <a:lnTo>
+                    <a:pt x="3306191" y="197519"/>
+                  </a:lnTo>
+                  <a:lnTo>
+                    <a:pt x="3376535" y="200692"/>
+                  </a:lnTo>
+                  <a:lnTo>
+                    <a:pt x="3446880" y="203829"/>
+                  </a:lnTo>
+                  <a:lnTo>
+                    <a:pt x="3517224" y="206932"/>
+                  </a:lnTo>
+                  <a:lnTo>
+                    <a:pt x="3587569" y="209999"/>
+                  </a:lnTo>
+                  <a:lnTo>
+                    <a:pt x="3657913" y="213033"/>
+                  </a:lnTo>
+                  <a:lnTo>
+                    <a:pt x="3728257" y="216032"/>
+                  </a:lnTo>
+                  <a:lnTo>
+                    <a:pt x="3798602" y="218998"/>
+                  </a:lnTo>
+                  <a:lnTo>
+                    <a:pt x="3868946" y="221931"/>
+                  </a:lnTo>
+                  <a:lnTo>
+                    <a:pt x="3939291" y="224832"/>
+                  </a:lnTo>
+                  <a:lnTo>
+                    <a:pt x="4009635" y="227699"/>
+                  </a:lnTo>
+                  <a:lnTo>
+                    <a:pt x="4079980" y="230535"/>
+                  </a:lnTo>
+                  <a:lnTo>
+                    <a:pt x="4150324" y="233339"/>
+                  </a:lnTo>
+                  <a:lnTo>
+                    <a:pt x="4220669" y="236112"/>
+                  </a:lnTo>
+                  <a:lnTo>
+                    <a:pt x="4291013" y="238854"/>
+                  </a:lnTo>
+                  <a:lnTo>
+                    <a:pt x="4361358" y="241565"/>
+                  </a:lnTo>
+                  <a:lnTo>
+                    <a:pt x="4431702" y="244246"/>
+                  </a:lnTo>
+                  <a:lnTo>
+                    <a:pt x="4502047" y="246897"/>
+                  </a:lnTo>
+                  <a:lnTo>
+                    <a:pt x="4572391" y="249519"/>
+                  </a:lnTo>
+                  <a:lnTo>
+                    <a:pt x="4642736" y="252111"/>
+                  </a:lnTo>
+                  <a:lnTo>
+                    <a:pt x="4713080" y="254674"/>
+                  </a:lnTo>
+                  <a:lnTo>
+                    <a:pt x="4783425" y="257209"/>
+                  </a:lnTo>
+                  <a:lnTo>
+                    <a:pt x="4853769" y="259715"/>
+                  </a:lnTo>
+                  <a:lnTo>
+                    <a:pt x="4924114" y="262193"/>
+                  </a:lnTo>
+                  <a:lnTo>
+                    <a:pt x="4994458" y="264644"/>
+                  </a:lnTo>
+                  <a:lnTo>
+                    <a:pt x="5064803" y="267067"/>
+                  </a:lnTo>
+                  <a:lnTo>
+                    <a:pt x="5135147" y="269463"/>
+                  </a:lnTo>
+                  <a:lnTo>
+                    <a:pt x="5205492" y="271833"/>
+                  </a:lnTo>
+                  <a:lnTo>
+                    <a:pt x="5275836" y="274176"/>
+                  </a:lnTo>
+                  <a:lnTo>
+                    <a:pt x="5346181" y="276492"/>
+                  </a:lnTo>
+                  <a:lnTo>
+                    <a:pt x="5416525" y="278783"/>
+                  </a:lnTo>
+                  <a:lnTo>
+                    <a:pt x="5486870" y="281049"/>
+                  </a:lnTo>
+                  <a:lnTo>
+                    <a:pt x="5557214" y="283289"/>
+                  </a:lnTo>
+                  <a:lnTo>
+                    <a:pt x="5627559" y="285504"/>
+                  </a:lnTo>
+                  <a:lnTo>
+                    <a:pt x="5697903" y="287694"/>
+                  </a:lnTo>
+                  <a:lnTo>
+                    <a:pt x="5768248" y="289860"/>
+                  </a:lnTo>
+                  <a:lnTo>
+                    <a:pt x="5838592" y="292002"/>
+                  </a:lnTo>
+                  <a:lnTo>
+                    <a:pt x="5908937" y="294119"/>
+                  </a:lnTo>
+                  <a:lnTo>
+                    <a:pt x="5979281" y="296214"/>
+                  </a:lnTo>
+                  <a:lnTo>
+                    <a:pt x="6049626" y="298284"/>
+                  </a:lnTo>
+                  <a:lnTo>
+                    <a:pt x="6119970" y="300332"/>
+                  </a:lnTo>
+                  <a:lnTo>
+                    <a:pt x="6190315" y="302357"/>
+                  </a:lnTo>
+                  <a:lnTo>
+                    <a:pt x="6260659" y="304359"/>
+                  </a:lnTo>
+                  <a:lnTo>
+                    <a:pt x="6331004" y="306339"/>
+                  </a:lnTo>
+                  <a:lnTo>
+                    <a:pt x="6401348" y="308296"/>
+                  </a:lnTo>
+                  <a:lnTo>
+                    <a:pt x="6471693" y="310232"/>
+                  </a:lnTo>
+                  <a:lnTo>
+                    <a:pt x="6542037" y="312146"/>
+                  </a:lnTo>
+                  <a:lnTo>
+                    <a:pt x="6612382" y="314039"/>
+                  </a:lnTo>
+                  <a:lnTo>
+                    <a:pt x="6682726" y="315911"/>
+                  </a:lnTo>
+                  <a:lnTo>
+                    <a:pt x="6753071" y="317762"/>
+                  </a:lnTo>
+                  <a:lnTo>
+                    <a:pt x="6823415" y="319592"/>
+                  </a:lnTo>
+                  <a:lnTo>
+                    <a:pt x="6893760" y="321401"/>
+                  </a:lnTo>
+                  <a:lnTo>
+                    <a:pt x="6964104" y="323191"/>
+                  </a:lnTo>
+                </a:path>
+              </a:pathLst>
+            </a:custGeom>
+            <a:ln w="27101" cap="flat">
+              <a:solidFill>
+                <a:srgbClr val="FF8C00">
+                  <a:alpha val="100000"/>
+                </a:srgbClr>
+              </a:solidFill>
+              <a:prstDash val="solid"/>
+              <a:round/>
+            </a:ln>
+          </p:spPr>
+          <p:txBody>
+            <a:bodyPr/>
+            <a:lstStyle/>
+            <a:p/>
+          </p:txBody>
+        </p:sp>
+        <p:sp>
+          <p:nvSpPr>
+            <p:cNvPr id="74" name="pl74"/>
+            <p:cNvSpPr/>
+            <p:nvPr/>
+          </p:nvSpPr>
+          <p:spPr>
+            <a:xfrm>
+              <a:off x="887106" y="5294352"/>
+              <a:ext cx="7660515" cy="0"/>
+            </a:xfrm>
+            <a:custGeom>
+              <a:avLst/>
+              <a:pathLst>
+                <a:path w="7660515" h="0">
+                  <a:moveTo>
+                    <a:pt x="0" y="0"/>
+                  </a:moveTo>
+                  <a:lnTo>
+                    <a:pt x="7660515" y="0"/>
+                  </a:lnTo>
+                  <a:lnTo>
+                    <a:pt x="7660515" y="0"/>
+                  </a:lnTo>
+                </a:path>
+              </a:pathLst>
+            </a:custGeom>
+            <a:ln w="13550" cap="flat">
+              <a:solidFill>
+                <a:srgbClr val="7F7F7F">
+                  <a:alpha val="100000"/>
+                </a:srgbClr>
+              </a:solidFill>
+              <a:prstDash val="dash"/>
+              <a:round/>
+            </a:ln>
+          </p:spPr>
+          <p:txBody>
+            <a:bodyPr/>
+            <a:lstStyle/>
+            <a:p/>
+          </p:txBody>
+        </p:sp>
+        <p:sp>
+          <p:nvSpPr>
+            <p:cNvPr id="75" name="pl75"/>
+            <p:cNvSpPr/>
+            <p:nvPr/>
+          </p:nvSpPr>
+          <p:spPr>
+            <a:xfrm>
+              <a:off x="4215100" y="4336484"/>
+              <a:ext cx="0" cy="1317069"/>
+            </a:xfrm>
+            <a:custGeom>
+              <a:avLst/>
+              <a:pathLst>
+                <a:path w="0" h="1317069">
+                  <a:moveTo>
+                    <a:pt x="0" y="1317069"/>
+                  </a:moveTo>
+                  <a:lnTo>
+                    <a:pt x="0" y="0"/>
+                  </a:lnTo>
+                  <a:lnTo>
+                    <a:pt x="0" y="0"/>
+                  </a:lnTo>
+                </a:path>
+              </a:pathLst>
+            </a:custGeom>
+            <a:ln w="13550" cap="flat">
+              <a:solidFill>
+                <a:srgbClr val="666666">
+                  <a:alpha val="100000"/>
+                </a:srgbClr>
+              </a:solidFill>
+              <a:prstDash val="dot"/>
+              <a:round/>
+            </a:ln>
+          </p:spPr>
+          <p:txBody>
+            <a:bodyPr/>
+            <a:lstStyle/>
+            <a:p/>
+          </p:txBody>
+        </p:sp>
+        <p:sp>
+          <p:nvSpPr>
+            <p:cNvPr id="76" name="pl76"/>
+            <p:cNvSpPr/>
+            <p:nvPr/>
+          </p:nvSpPr>
+          <p:spPr>
+            <a:xfrm>
+              <a:off x="3046793" y="4336484"/>
+              <a:ext cx="0" cy="1317069"/>
+            </a:xfrm>
+            <a:custGeom>
+              <a:avLst/>
+              <a:pathLst>
+                <a:path w="0" h="1317069">
+                  <a:moveTo>
+                    <a:pt x="0" y="1317069"/>
+                  </a:moveTo>
+                  <a:lnTo>
+                    <a:pt x="0" y="0"/>
+                  </a:lnTo>
+                  <a:lnTo>
+                    <a:pt x="0" y="0"/>
+                  </a:lnTo>
+                </a:path>
+              </a:pathLst>
+            </a:custGeom>
+            <a:ln w="13550" cap="flat">
+              <a:solidFill>
+                <a:srgbClr val="4682B4">
+                  <a:alpha val="69803"/>
+                </a:srgbClr>
+              </a:solidFill>
+              <a:prstDash val="dash"/>
+              <a:round/>
+            </a:ln>
+          </p:spPr>
+          <p:txBody>
+            <a:bodyPr/>
+            <a:lstStyle/>
+            <a:p/>
+          </p:txBody>
+        </p:sp>
+        <p:sp>
+          <p:nvSpPr>
+            <p:cNvPr id="77" name="pl77"/>
+            <p:cNvSpPr/>
+            <p:nvPr/>
+          </p:nvSpPr>
+          <p:spPr>
+            <a:xfrm>
+              <a:off x="5409191" y="4336484"/>
+              <a:ext cx="0" cy="1317069"/>
+            </a:xfrm>
+            <a:custGeom>
+              <a:avLst/>
+              <a:pathLst>
+                <a:path w="0" h="1317069">
+                  <a:moveTo>
+                    <a:pt x="0" y="1317069"/>
+                  </a:moveTo>
+                  <a:lnTo>
+                    <a:pt x="0" y="0"/>
+                  </a:lnTo>
+                  <a:lnTo>
+                    <a:pt x="0" y="0"/>
+                  </a:lnTo>
+                </a:path>
+              </a:pathLst>
+            </a:custGeom>
+            <a:ln w="13550" cap="flat">
+              <a:solidFill>
+                <a:srgbClr val="4682B4">
+                  <a:alpha val="69803"/>
+                </a:srgbClr>
+              </a:solidFill>
+              <a:prstDash val="dash"/>
+              <a:round/>
+            </a:ln>
+          </p:spPr>
+          <p:txBody>
+            <a:bodyPr/>
+            <a:lstStyle/>
+            <a:p/>
+          </p:txBody>
+        </p:sp>
+        <p:sp>
+          <p:nvSpPr>
+            <p:cNvPr id="78" name="tx78"/>
+            <p:cNvSpPr/>
+            <p:nvPr/>
+          </p:nvSpPr>
+          <p:spPr>
+            <a:xfrm>
+              <a:off x="762297" y="5553636"/>
+              <a:ext cx="62179" cy="80101"/>
+            </a:xfrm>
+            <a:prstGeom prst="rect">
+              <a:avLst/>
+            </a:prstGeom>
+            <a:noFill/>
+          </p:spPr>
+          <p:txBody>
+            <a:bodyPr lIns="0" rIns="0" tIns="0" bIns="0" anchorCtr="1" anchor="ctr" wrap="none"/>
+            <a:lstStyle/>
+            <a:p>
+              <a:pPr algn="l" marL="0" marR="0" indent="0">
+                <a:lnSpc>
+                  <a:spcPts val="880"/>
+                </a:lnSpc>
+                <a:spcBef>
+                  <a:spcPts val="0"/>
+                </a:spcBef>
+                <a:spcAft>
+                  <a:spcPts val="0"/>
+                </a:spcAft>
+              </a:pPr>
+              <a:r>
+                <a:rPr sz="880">
+                  <a:solidFill>
+                    <a:srgbClr val="4D4D4D">
+                      <a:alpha val="100000"/>
+                    </a:srgbClr>
+                  </a:solidFill>
+                  <a:latin typeface="Helvetica"/>
+                  <a:cs typeface="Helvetica"/>
+                </a:rPr>
+                <a:t>0</a:t>
+              </a:r>
+            </a:p>
+          </p:txBody>
+        </p:sp>
+        <p:sp>
+          <p:nvSpPr>
+            <p:cNvPr id="79" name="tx79"/>
+            <p:cNvSpPr/>
+            <p:nvPr/>
+          </p:nvSpPr>
+          <p:spPr>
+            <a:xfrm>
+              <a:off x="762297" y="5254302"/>
+              <a:ext cx="62179" cy="80101"/>
+            </a:xfrm>
+            <a:prstGeom prst="rect">
+              <a:avLst/>
+            </a:prstGeom>
+            <a:noFill/>
+          </p:spPr>
+          <p:txBody>
+            <a:bodyPr lIns="0" rIns="0" tIns="0" bIns="0" anchorCtr="1" anchor="ctr" wrap="none"/>
+            <a:lstStyle/>
+            <a:p>
+              <a:pPr algn="l" marL="0" marR="0" indent="0">
+                <a:lnSpc>
+                  <a:spcPts val="880"/>
+                </a:lnSpc>
+                <a:spcBef>
+                  <a:spcPts val="0"/>
+                </a:spcBef>
+                <a:spcAft>
+                  <a:spcPts val="0"/>
+                </a:spcAft>
+              </a:pPr>
+              <a:r>
+                <a:rPr sz="880">
+                  <a:solidFill>
+                    <a:srgbClr val="4D4D4D">
+                      <a:alpha val="100000"/>
+                    </a:srgbClr>
+                  </a:solidFill>
+                  <a:latin typeface="Helvetica"/>
+                  <a:cs typeface="Helvetica"/>
+                </a:rPr>
+                <a:t>1</a:t>
+              </a:r>
+            </a:p>
+          </p:txBody>
+        </p:sp>
+        <p:sp>
+          <p:nvSpPr>
+            <p:cNvPr id="80" name="tx80"/>
+            <p:cNvSpPr/>
+            <p:nvPr/>
+          </p:nvSpPr>
+          <p:spPr>
+            <a:xfrm>
+              <a:off x="762297" y="4954968"/>
+              <a:ext cx="62179" cy="80101"/>
+            </a:xfrm>
+            <a:prstGeom prst="rect">
+              <a:avLst/>
+            </a:prstGeom>
+            <a:noFill/>
+          </p:spPr>
+          <p:txBody>
+            <a:bodyPr lIns="0" rIns="0" tIns="0" bIns="0" anchorCtr="1" anchor="ctr" wrap="none"/>
+            <a:lstStyle/>
+            <a:p>
+              <a:pPr algn="l" marL="0" marR="0" indent="0">
+                <a:lnSpc>
+                  <a:spcPts val="880"/>
+                </a:lnSpc>
+                <a:spcBef>
+                  <a:spcPts val="0"/>
+                </a:spcBef>
+                <a:spcAft>
+                  <a:spcPts val="0"/>
+                </a:spcAft>
+              </a:pPr>
+              <a:r>
+                <a:rPr sz="880">
+                  <a:solidFill>
+                    <a:srgbClr val="4D4D4D">
+                      <a:alpha val="100000"/>
+                    </a:srgbClr>
+                  </a:solidFill>
+                  <a:latin typeface="Helvetica"/>
+                  <a:cs typeface="Helvetica"/>
+                </a:rPr>
+                <a:t>2</a:t>
+              </a:r>
+            </a:p>
+          </p:txBody>
+        </p:sp>
+        <p:sp>
+          <p:nvSpPr>
+            <p:cNvPr id="81" name="tx81"/>
+            <p:cNvSpPr/>
+            <p:nvPr/>
+          </p:nvSpPr>
+          <p:spPr>
+            <a:xfrm>
+              <a:off x="762297" y="4655634"/>
+              <a:ext cx="62179" cy="80101"/>
+            </a:xfrm>
+            <a:prstGeom prst="rect">
+              <a:avLst/>
+            </a:prstGeom>
+            <a:noFill/>
+          </p:spPr>
+          <p:txBody>
+            <a:bodyPr lIns="0" rIns="0" tIns="0" bIns="0" anchorCtr="1" anchor="ctr" wrap="none"/>
+            <a:lstStyle/>
+            <a:p>
+              <a:pPr algn="l" marL="0" marR="0" indent="0">
+                <a:lnSpc>
+                  <a:spcPts val="880"/>
+                </a:lnSpc>
+                <a:spcBef>
+                  <a:spcPts val="0"/>
+                </a:spcBef>
+                <a:spcAft>
+                  <a:spcPts val="0"/>
+                </a:spcAft>
+              </a:pPr>
+              <a:r>
+                <a:rPr sz="880">
+                  <a:solidFill>
+                    <a:srgbClr val="4D4D4D">
+                      <a:alpha val="100000"/>
+                    </a:srgbClr>
+                  </a:solidFill>
+                  <a:latin typeface="Helvetica"/>
+                  <a:cs typeface="Helvetica"/>
+                </a:rPr>
+                <a:t>3</a:t>
+              </a:r>
+            </a:p>
+          </p:txBody>
+        </p:sp>
+        <p:sp>
+          <p:nvSpPr>
+            <p:cNvPr id="82" name="tx82"/>
+            <p:cNvSpPr/>
+            <p:nvPr/>
+          </p:nvSpPr>
+          <p:spPr>
+            <a:xfrm>
+              <a:off x="762297" y="4356300"/>
+              <a:ext cx="62179" cy="80101"/>
+            </a:xfrm>
+            <a:prstGeom prst="rect">
+              <a:avLst/>
+            </a:prstGeom>
+            <a:noFill/>
+          </p:spPr>
+          <p:txBody>
+            <a:bodyPr lIns="0" rIns="0" tIns="0" bIns="0" anchorCtr="1" anchor="ctr" wrap="none"/>
+            <a:lstStyle/>
+            <a:p>
+              <a:pPr algn="l" marL="0" marR="0" indent="0">
+                <a:lnSpc>
+                  <a:spcPts val="880"/>
+                </a:lnSpc>
+                <a:spcBef>
+                  <a:spcPts val="0"/>
+                </a:spcBef>
+                <a:spcAft>
+                  <a:spcPts val="0"/>
+                </a:spcAft>
+              </a:pPr>
+              <a:r>
+                <a:rPr sz="880">
+                  <a:solidFill>
+                    <a:srgbClr val="4D4D4D">
+                      <a:alpha val="100000"/>
+                    </a:srgbClr>
+                  </a:solidFill>
+                  <a:latin typeface="Helvetica"/>
+                  <a:cs typeface="Helvetica"/>
+                </a:rPr>
+                <a:t>4</a:t>
+              </a:r>
+            </a:p>
+          </p:txBody>
+        </p:sp>
+        <p:sp>
+          <p:nvSpPr>
+            <p:cNvPr id="83" name="tx83"/>
+            <p:cNvSpPr/>
+            <p:nvPr/>
+          </p:nvSpPr>
+          <p:spPr>
+            <a:xfrm>
+              <a:off x="1164222" y="5716183"/>
+              <a:ext cx="161574" cy="80101"/>
+            </a:xfrm>
+            <a:prstGeom prst="rect">
+              <a:avLst/>
+            </a:prstGeom>
+            <a:noFill/>
+          </p:spPr>
+          <p:txBody>
+            <a:bodyPr lIns="0" rIns="0" tIns="0" bIns="0" anchorCtr="1" anchor="ctr" wrap="none"/>
+            <a:lstStyle/>
+            <a:p>
+              <a:pPr algn="l" marL="0" marR="0" indent="0">
+                <a:lnSpc>
+                  <a:spcPts val="880"/>
+                </a:lnSpc>
+                <a:spcBef>
+                  <a:spcPts val="0"/>
+                </a:spcBef>
+                <a:spcAft>
+                  <a:spcPts val="0"/>
+                </a:spcAft>
+              </a:pPr>
+              <a:r>
+                <a:rPr sz="880">
+                  <a:solidFill>
+                    <a:srgbClr val="4D4D4D">
+                      <a:alpha val="100000"/>
+                    </a:srgbClr>
+                  </a:solidFill>
+                  <a:latin typeface="Helvetica"/>
+                  <a:cs typeface="Helvetica"/>
+                </a:rPr>
+                <a:t>-50</a:t>
+              </a:r>
+            </a:p>
+          </p:txBody>
+        </p:sp>
+        <p:sp>
+          <p:nvSpPr>
+            <p:cNvPr id="84" name="tx84"/>
+            <p:cNvSpPr/>
+            <p:nvPr/>
+          </p:nvSpPr>
+          <p:spPr>
+            <a:xfrm>
+              <a:off x="2024485" y="5716183"/>
+              <a:ext cx="161574" cy="80101"/>
+            </a:xfrm>
+            <a:prstGeom prst="rect">
+              <a:avLst/>
+            </a:prstGeom>
+            <a:noFill/>
+          </p:spPr>
+          <p:txBody>
+            <a:bodyPr lIns="0" rIns="0" tIns="0" bIns="0" anchorCtr="1" anchor="ctr" wrap="none"/>
+            <a:lstStyle/>
+            <a:p>
+              <a:pPr algn="l" marL="0" marR="0" indent="0">
+                <a:lnSpc>
+                  <a:spcPts val="880"/>
+                </a:lnSpc>
+                <a:spcBef>
+                  <a:spcPts val="0"/>
+                </a:spcBef>
+                <a:spcAft>
+                  <a:spcPts val="0"/>
+                </a:spcAft>
+              </a:pPr>
+              <a:r>
+                <a:rPr sz="880">
+                  <a:solidFill>
+                    <a:srgbClr val="4D4D4D">
+                      <a:alpha val="100000"/>
+                    </a:srgbClr>
+                  </a:solidFill>
+                  <a:latin typeface="Helvetica"/>
+                  <a:cs typeface="Helvetica"/>
+                </a:rPr>
+                <a:t>-40</a:t>
+              </a:r>
+            </a:p>
+          </p:txBody>
+        </p:sp>
+        <p:sp>
+          <p:nvSpPr>
+            <p:cNvPr id="85" name="tx85"/>
+            <p:cNvSpPr/>
+            <p:nvPr/>
+          </p:nvSpPr>
+          <p:spPr>
+            <a:xfrm>
+              <a:off x="2884749" y="5716183"/>
+              <a:ext cx="161574" cy="80101"/>
+            </a:xfrm>
+            <a:prstGeom prst="rect">
+              <a:avLst/>
+            </a:prstGeom>
+            <a:noFill/>
+          </p:spPr>
+          <p:txBody>
+            <a:bodyPr lIns="0" rIns="0" tIns="0" bIns="0" anchorCtr="1" anchor="ctr" wrap="none"/>
+            <a:lstStyle/>
+            <a:p>
+              <a:pPr algn="l" marL="0" marR="0" indent="0">
+                <a:lnSpc>
+                  <a:spcPts val="880"/>
+                </a:lnSpc>
+                <a:spcBef>
+                  <a:spcPts val="0"/>
+                </a:spcBef>
+                <a:spcAft>
+                  <a:spcPts val="0"/>
+                </a:spcAft>
+              </a:pPr>
+              <a:r>
+                <a:rPr sz="880">
+                  <a:solidFill>
+                    <a:srgbClr val="4D4D4D">
+                      <a:alpha val="100000"/>
+                    </a:srgbClr>
+                  </a:solidFill>
+                  <a:latin typeface="Helvetica"/>
+                  <a:cs typeface="Helvetica"/>
+                </a:rPr>
+                <a:t>-30</a:t>
+              </a:r>
+            </a:p>
+          </p:txBody>
+        </p:sp>
+        <p:sp>
+          <p:nvSpPr>
+            <p:cNvPr id="86" name="tx86"/>
+            <p:cNvSpPr/>
+            <p:nvPr/>
+          </p:nvSpPr>
+          <p:spPr>
+            <a:xfrm>
+              <a:off x="3745012" y="5716183"/>
+              <a:ext cx="161574" cy="80101"/>
+            </a:xfrm>
+            <a:prstGeom prst="rect">
+              <a:avLst/>
+            </a:prstGeom>
+            <a:noFill/>
+          </p:spPr>
+          <p:txBody>
+            <a:bodyPr lIns="0" rIns="0" tIns="0" bIns="0" anchorCtr="1" anchor="ctr" wrap="none"/>
+            <a:lstStyle/>
+            <a:p>
+              <a:pPr algn="l" marL="0" marR="0" indent="0">
+                <a:lnSpc>
+                  <a:spcPts val="880"/>
+                </a:lnSpc>
+                <a:spcBef>
+                  <a:spcPts val="0"/>
+                </a:spcBef>
+                <a:spcAft>
+                  <a:spcPts val="0"/>
+                </a:spcAft>
+              </a:pPr>
+              <a:r>
+                <a:rPr sz="880">
+                  <a:solidFill>
+                    <a:srgbClr val="4D4D4D">
+                      <a:alpha val="100000"/>
+                    </a:srgbClr>
+                  </a:solidFill>
+                  <a:latin typeface="Helvetica"/>
+                  <a:cs typeface="Helvetica"/>
+                </a:rPr>
+                <a:t>-20</a:t>
+              </a:r>
+            </a:p>
+          </p:txBody>
+        </p:sp>
+        <p:sp>
+          <p:nvSpPr>
+            <p:cNvPr id="87" name="tx87"/>
+            <p:cNvSpPr/>
+            <p:nvPr/>
+          </p:nvSpPr>
+          <p:spPr>
+            <a:xfrm>
+              <a:off x="4605275" y="5716183"/>
+              <a:ext cx="161574" cy="80101"/>
+            </a:xfrm>
+            <a:prstGeom prst="rect">
+              <a:avLst/>
+            </a:prstGeom>
+            <a:noFill/>
+          </p:spPr>
+          <p:txBody>
+            <a:bodyPr lIns="0" rIns="0" tIns="0" bIns="0" anchorCtr="1" anchor="ctr" wrap="none"/>
+            <a:lstStyle/>
+            <a:p>
+              <a:pPr algn="l" marL="0" marR="0" indent="0">
+                <a:lnSpc>
+                  <a:spcPts val="880"/>
+                </a:lnSpc>
+                <a:spcBef>
+                  <a:spcPts val="0"/>
+                </a:spcBef>
+                <a:spcAft>
+                  <a:spcPts val="0"/>
+                </a:spcAft>
+              </a:pPr>
+              <a:r>
+                <a:rPr sz="880">
+                  <a:solidFill>
+                    <a:srgbClr val="4D4D4D">
+                      <a:alpha val="100000"/>
+                    </a:srgbClr>
+                  </a:solidFill>
+                  <a:latin typeface="Helvetica"/>
+                  <a:cs typeface="Helvetica"/>
+                </a:rPr>
+                <a:t>-10</a:t>
+              </a:r>
+            </a:p>
+          </p:txBody>
+        </p:sp>
+        <p:sp>
+          <p:nvSpPr>
+            <p:cNvPr id="88" name="tx88"/>
+            <p:cNvSpPr/>
+            <p:nvPr/>
+          </p:nvSpPr>
+          <p:spPr>
+            <a:xfrm>
+              <a:off x="5515235" y="5716183"/>
+              <a:ext cx="62179" cy="80101"/>
+            </a:xfrm>
+            <a:prstGeom prst="rect">
+              <a:avLst/>
+            </a:prstGeom>
+            <a:noFill/>
+          </p:spPr>
+          <p:txBody>
+            <a:bodyPr lIns="0" rIns="0" tIns="0" bIns="0" anchorCtr="1" anchor="ctr" wrap="none"/>
+            <a:lstStyle/>
+            <a:p>
+              <a:pPr algn="l" marL="0" marR="0" indent="0">
+                <a:lnSpc>
+                  <a:spcPts val="880"/>
+                </a:lnSpc>
+                <a:spcBef>
+                  <a:spcPts val="0"/>
+                </a:spcBef>
+                <a:spcAft>
+                  <a:spcPts val="0"/>
+                </a:spcAft>
+              </a:pPr>
+              <a:r>
+                <a:rPr sz="880">
+                  <a:solidFill>
+                    <a:srgbClr val="4D4D4D">
+                      <a:alpha val="100000"/>
+                    </a:srgbClr>
+                  </a:solidFill>
+                  <a:latin typeface="Helvetica"/>
+                  <a:cs typeface="Helvetica"/>
+                </a:rPr>
+                <a:t>0</a:t>
+              </a:r>
+            </a:p>
+          </p:txBody>
+        </p:sp>
+        <p:sp>
+          <p:nvSpPr>
+            <p:cNvPr id="89" name="tx89"/>
+            <p:cNvSpPr/>
+            <p:nvPr/>
+          </p:nvSpPr>
+          <p:spPr>
+            <a:xfrm>
+              <a:off x="6344409" y="5716183"/>
+              <a:ext cx="124358" cy="80101"/>
+            </a:xfrm>
+            <a:prstGeom prst="rect">
+              <a:avLst/>
+            </a:prstGeom>
+            <a:noFill/>
+          </p:spPr>
+          <p:txBody>
+            <a:bodyPr lIns="0" rIns="0" tIns="0" bIns="0" anchorCtr="1" anchor="ctr" wrap="none"/>
+            <a:lstStyle/>
+            <a:p>
+              <a:pPr algn="l" marL="0" marR="0" indent="0">
+                <a:lnSpc>
+                  <a:spcPts val="880"/>
+                </a:lnSpc>
+                <a:spcBef>
+                  <a:spcPts val="0"/>
+                </a:spcBef>
+                <a:spcAft>
+                  <a:spcPts val="0"/>
+                </a:spcAft>
+              </a:pPr>
+              <a:r>
+                <a:rPr sz="880">
+                  <a:solidFill>
+                    <a:srgbClr val="4D4D4D">
+                      <a:alpha val="100000"/>
+                    </a:srgbClr>
+                  </a:solidFill>
+                  <a:latin typeface="Helvetica"/>
+                  <a:cs typeface="Helvetica"/>
+                </a:rPr>
+                <a:t>10</a:t>
+              </a:r>
+            </a:p>
+          </p:txBody>
+        </p:sp>
+        <p:sp>
+          <p:nvSpPr>
+            <p:cNvPr id="90" name="tx90"/>
+            <p:cNvSpPr/>
+            <p:nvPr/>
+          </p:nvSpPr>
+          <p:spPr>
+            <a:xfrm>
+              <a:off x="7204672" y="5716183"/>
+              <a:ext cx="124358" cy="80101"/>
+            </a:xfrm>
+            <a:prstGeom prst="rect">
+              <a:avLst/>
+            </a:prstGeom>
+            <a:noFill/>
+          </p:spPr>
+          <p:txBody>
+            <a:bodyPr lIns="0" rIns="0" tIns="0" bIns="0" anchorCtr="1" anchor="ctr" wrap="none"/>
+            <a:lstStyle/>
+            <a:p>
+              <a:pPr algn="l" marL="0" marR="0" indent="0">
+                <a:lnSpc>
+                  <a:spcPts val="880"/>
+                </a:lnSpc>
+                <a:spcBef>
+                  <a:spcPts val="0"/>
+                </a:spcBef>
+                <a:spcAft>
+                  <a:spcPts val="0"/>
+                </a:spcAft>
+              </a:pPr>
+              <a:r>
+                <a:rPr sz="880">
+                  <a:solidFill>
+                    <a:srgbClr val="4D4D4D">
+                      <a:alpha val="100000"/>
+                    </a:srgbClr>
+                  </a:solidFill>
+                  <a:latin typeface="Helvetica"/>
+                  <a:cs typeface="Helvetica"/>
+                </a:rPr>
+                <a:t>20</a:t>
+              </a:r>
+            </a:p>
+          </p:txBody>
+        </p:sp>
+        <p:sp>
+          <p:nvSpPr>
+            <p:cNvPr id="91" name="tx91"/>
+            <p:cNvSpPr/>
+            <p:nvPr/>
+          </p:nvSpPr>
+          <p:spPr>
+            <a:xfrm>
+              <a:off x="8064935" y="5716183"/>
+              <a:ext cx="124358" cy="80101"/>
+            </a:xfrm>
+            <a:prstGeom prst="rect">
+              <a:avLst/>
+            </a:prstGeom>
+            <a:noFill/>
+          </p:spPr>
+          <p:txBody>
+            <a:bodyPr lIns="0" rIns="0" tIns="0" bIns="0" anchorCtr="1" anchor="ctr" wrap="none"/>
+            <a:lstStyle/>
+            <a:p>
+              <a:pPr algn="l" marL="0" marR="0" indent="0">
+                <a:lnSpc>
+                  <a:spcPts val="880"/>
+                </a:lnSpc>
+                <a:spcBef>
+                  <a:spcPts val="0"/>
+                </a:spcBef>
+                <a:spcAft>
+                  <a:spcPts val="0"/>
+                </a:spcAft>
+              </a:pPr>
+              <a:r>
+                <a:rPr sz="880">
+                  <a:solidFill>
+                    <a:srgbClr val="4D4D4D">
+                      <a:alpha val="100000"/>
+                    </a:srgbClr>
+                  </a:solidFill>
+                  <a:latin typeface="Helvetica"/>
+                  <a:cs typeface="Helvetica"/>
+                </a:rPr>
+                <a:t>30</a:t>
+              </a:r>
+            </a:p>
+          </p:txBody>
+        </p:sp>
+        <p:sp>
+          <p:nvSpPr>
+            <p:cNvPr id="92" name="tx92"/>
+            <p:cNvSpPr/>
+            <p:nvPr/>
+          </p:nvSpPr>
+          <p:spPr>
+            <a:xfrm>
+              <a:off x="1561815" y="5855859"/>
+              <a:ext cx="6311097" cy="100218"/>
+            </a:xfrm>
+            <a:prstGeom prst="rect">
+              <a:avLst/>
+            </a:prstGeom>
+            <a:noFill/>
+          </p:spPr>
+          <p:txBody>
+            <a:bodyPr lIns="0" rIns="0" tIns="0" bIns="0" anchorCtr="1" anchor="ctr" wrap="none"/>
+            <a:lstStyle/>
+            <a:p>
+              <a:pPr algn="l" marL="0" marR="0" indent="0">
+                <a:lnSpc>
+                  <a:spcPts val="1100"/>
+                </a:lnSpc>
+                <a:spcBef>
+                  <a:spcPts val="0"/>
+                </a:spcBef>
+                <a:spcAft>
+                  <a:spcPts val="0"/>
+                </a:spcAft>
+              </a:pPr>
+              <a:r>
+                <a:rPr sz="1100">
+                  <a:solidFill>
+                    <a:srgbClr val="000000">
+                      <a:alpha val="100000"/>
+                    </a:srgbClr>
+                  </a:solidFill>
+                  <a:latin typeface="Helvetica"/>
+                  <a:cs typeface="Helvetica"/>
+                </a:rPr>
+                <a:t>Sensitivity eGFR Difference (%): 100 × (CKD-EPI 2012 CysC − CKD-EPI 2021 Cr) / CKD-EPI 2021 Cr</a:t>
+              </a:r>
+            </a:p>
+          </p:txBody>
+        </p:sp>
+        <p:sp>
+          <p:nvSpPr>
+            <p:cNvPr id="93" name="tx93"/>
+            <p:cNvSpPr/>
+            <p:nvPr/>
+          </p:nvSpPr>
+          <p:spPr>
+            <a:xfrm rot="-5400000">
+              <a:off x="138035" y="4944909"/>
+              <a:ext cx="1016904" cy="100218"/>
+            </a:xfrm>
+            <a:prstGeom prst="rect">
+              <a:avLst/>
+            </a:prstGeom>
+            <a:noFill/>
+          </p:spPr>
+          <p:txBody>
+            <a:bodyPr lIns="0" rIns="0" tIns="0" bIns="0" anchorCtr="1" anchor="ctr" wrap="none"/>
+            <a:lstStyle/>
+            <a:p>
+              <a:pPr algn="l" marL="0" marR="0" indent="0">
+                <a:lnSpc>
+                  <a:spcPts val="1100"/>
+                </a:lnSpc>
+                <a:spcBef>
+                  <a:spcPts val="0"/>
+                </a:spcBef>
+                <a:spcAft>
+                  <a:spcPts val="0"/>
+                </a:spcAft>
+              </a:pPr>
+              <a:r>
+                <a:rPr sz="1100">
+                  <a:solidFill>
+                    <a:srgbClr val="000000">
+                      <a:alpha val="100000"/>
+                    </a:srgbClr>
+                  </a:solidFill>
+                  <a:latin typeface="Helvetica"/>
+                  <a:cs typeface="Helvetica"/>
+                </a:rPr>
+                <a:t>subHR (95% CI)</a:t>
+              </a:r>
+            </a:p>
+          </p:txBody>
+        </p:sp>
+        <p:sp>
+          <p:nvSpPr>
+            <p:cNvPr id="94" name="tx94"/>
+            <p:cNvSpPr/>
+            <p:nvPr/>
+          </p:nvSpPr>
+          <p:spPr>
+            <a:xfrm>
+              <a:off x="887106" y="4159544"/>
+              <a:ext cx="7026615" cy="82021"/>
+            </a:xfrm>
+            <a:prstGeom prst="rect">
+              <a:avLst/>
+            </a:prstGeom>
+            <a:noFill/>
+          </p:spPr>
+          <p:txBody>
+            <a:bodyPr lIns="0" rIns="0" tIns="0" bIns="0" anchorCtr="1" anchor="ctr" wrap="none"/>
+            <a:lstStyle/>
+            <a:p>
+              <a:pPr algn="l" marL="0" marR="0" indent="0">
+                <a:lnSpc>
+                  <a:spcPts val="900"/>
+                </a:lnSpc>
+                <a:spcBef>
+                  <a:spcPts val="0"/>
+                </a:spcBef>
+                <a:spcAft>
+                  <a:spcPts val="0"/>
+                </a:spcAft>
+              </a:pPr>
+              <a:r>
+                <a:rPr sz="900">
+                  <a:solidFill>
+                    <a:srgbClr val="404040">
+                      <a:alpha val="100000"/>
+                    </a:srgbClr>
+                  </a:solidFill>
+                  <a:latin typeface="Helvetica"/>
+                  <a:cs typeface="Helvetica"/>
+                </a:rPr>
+                <a:t>subHR per 10 % decline: 1.15 (1.09-1.21), p_Bonf = &lt;0.001 (n = 6)  |  per IQR decline (Δ = 27.5 %): 1.46 (1.26-1.68)  |  IQR: [-29.1, -1.6] %</a:t>
+              </a:r>
+            </a:p>
+          </p:txBody>
+        </p:sp>
+        <p:sp>
+          <p:nvSpPr>
+            <p:cNvPr id="95" name="tx95"/>
+            <p:cNvSpPr/>
+            <p:nvPr/>
+          </p:nvSpPr>
+          <p:spPr>
+            <a:xfrm>
+              <a:off x="887106" y="3932770"/>
               <a:ext cx="2718602" cy="120152"/>
             </a:xfrm>
             <a:prstGeom prst="rect">
